--- a/applied2/task1/Task1_GPU_Image_Rotation_Final.pptx
+++ b/applied2/task1/Task1_GPU_Image_Rotation_Final.pptx
@@ -2,22 +2,23 @@
 <file path=ppt/presentation.xml><?xml version="1.0" encoding="utf-8"?>
 <p:presentation xmlns:p="http://schemas.openxmlformats.org/presentationml/2006/main">
   <p:sldMasterIdLst>
-    <p:sldMasterId xmlns:r="http://schemas.openxmlformats.org/officeDocument/2006/relationships" id="2147483648" r:id="R75ec6246dfa94ae9"/>
+    <p:sldMasterId xmlns:r="http://schemas.openxmlformats.org/officeDocument/2006/relationships" id="2147483648" r:id="R824b14ef71b94fd1"/>
   </p:sldMasterIdLst>
   <p:notesMasterIdLst>
-    <p:notesMasterId xmlns:r="http://schemas.openxmlformats.org/officeDocument/2006/relationships" r:id="Rf3659aed367642c0"/>
+    <p:notesMasterId xmlns:r="http://schemas.openxmlformats.org/officeDocument/2006/relationships" r:id="Rbe565cb64b2d4df2"/>
   </p:notesMasterIdLst>
   <p:sldIdLst>
-    <p:sldId xmlns:r="http://schemas.openxmlformats.org/officeDocument/2006/relationships" id="256" r:id="Rd2e5bea033964593"/>
-    <p:sldId xmlns:r="http://schemas.openxmlformats.org/officeDocument/2006/relationships" id="257" r:id="R3f976d009ef14620"/>
-    <p:sldId xmlns:r="http://schemas.openxmlformats.org/officeDocument/2006/relationships" id="258" r:id="R736481c3c4c743ae"/>
-    <p:sldId xmlns:r="http://schemas.openxmlformats.org/officeDocument/2006/relationships" id="259" r:id="R76df8f3e6e36451b"/>
-    <p:sldId xmlns:r="http://schemas.openxmlformats.org/officeDocument/2006/relationships" id="260" r:id="R5553dcc5e6f54b6c"/>
-    <p:sldId xmlns:r="http://schemas.openxmlformats.org/officeDocument/2006/relationships" id="261" r:id="Rbef769b1c8db4160"/>
-    <p:sldId xmlns:r="http://schemas.openxmlformats.org/officeDocument/2006/relationships" id="262" r:id="Rcc33ba6002384ed6"/>
-    <p:sldId xmlns:r="http://schemas.openxmlformats.org/officeDocument/2006/relationships" id="263" r:id="Rc5228724f3124643"/>
-    <p:sldId xmlns:r="http://schemas.openxmlformats.org/officeDocument/2006/relationships" id="264" r:id="Rd65b660906a14bb0"/>
-    <p:sldId xmlns:r="http://schemas.openxmlformats.org/officeDocument/2006/relationships" id="265" r:id="Rebd1160f38d74781"/>
+    <p:sldId xmlns:r="http://schemas.openxmlformats.org/officeDocument/2006/relationships" id="256" r:id="Rd352ddda03e54a70"/>
+    <p:sldId xmlns:r="http://schemas.openxmlformats.org/officeDocument/2006/relationships" id="257" r:id="Rf5e6e32a114640c9"/>
+    <p:sldId xmlns:r="http://schemas.openxmlformats.org/officeDocument/2006/relationships" id="258" r:id="R905159a89df24bbb"/>
+    <p:sldId xmlns:r="http://schemas.openxmlformats.org/officeDocument/2006/relationships" id="259" r:id="Rbf60aab39e41440e"/>
+    <p:sldId xmlns:r="http://schemas.openxmlformats.org/officeDocument/2006/relationships" id="260" r:id="R9b5d6e5f77014abe"/>
+    <p:sldId xmlns:r="http://schemas.openxmlformats.org/officeDocument/2006/relationships" id="261" r:id="Rdaf0dcb649294d11"/>
+    <p:sldId xmlns:r="http://schemas.openxmlformats.org/officeDocument/2006/relationships" id="262" r:id="Rab34e6f63b4b41a9"/>
+    <p:sldId xmlns:r="http://schemas.openxmlformats.org/officeDocument/2006/relationships" id="263" r:id="Ra44a1b4d54b24fd7"/>
+    <p:sldId xmlns:r="http://schemas.openxmlformats.org/officeDocument/2006/relationships" id="264" r:id="Rae74208ee3d14e8a"/>
+    <p:sldId xmlns:r="http://schemas.openxmlformats.org/officeDocument/2006/relationships" id="265" r:id="Rd0cf968d2a0f4876"/>
+    <p:sldId xmlns:r="http://schemas.openxmlformats.org/officeDocument/2006/relationships" id="266" r:id="R2fb28f5e532a4c7f"/>
   </p:sldIdLst>
   <p:sldSz cx="12192000" cy="6858000"/>
   <p:notesSz cx="6858000" cy="9144000"/>
@@ -451,7 +452,7 @@
           <a:lstStyle xmlns:a="http://schemas.openxmlformats.org/drawingml/2006/main"/>
           <a:p xmlns:a="http://schemas.openxmlformats.org/drawingml/2006/main">
             <a:r>
-              <a:t>TASK 1 MAIN SLIDE. Suggested speaking time: 35 seconds.</a:t>
+              <a:t>TASK 1 MAIN SLIDE. Suggested speaking time: 30 seconds.</a:t>
             </a:r>
           </a:p>
           <a:p xmlns:a="http://schemas.openxmlformats.org/drawingml/2006/main">
@@ -466,7 +467,7 @@
           </a:p>
           <a:p xmlns:a="http://schemas.openxmlformats.org/drawingml/2006/main">
             <a:r>
-              <a:t>The host is the CPU. It loads and decodes the image, allocates memory and launches the CUDA kernel. The device is the GPU, which runs the rotation across many pixels. In this conventional discrete-GPU system, the input pixels move from system RAM to GPU memory over PCIe. After rotation, the result returns to RAM for saving or display. CUDA exposes these operations through memory-allocation and copy APIs. The CPU controls the work, while the GPU performs the parallel pixel calculations.</a:t>
+              <a:t>I'll explain how we'd rotate a large image using CUDA. The CPU, or host, loads and decodes the image, allocates buffers and launches the work. The GPU, or device, calculates the output pixels. In this design, system RAM and GPU memory are separate. We copy the pixels across PCIe using a host-to-device cudaMemcpy, then copy the result back. Those transfers take time, even when the rotation kernel is fast.</a:t>
             </a:r>
           </a:p>
           <a:p xmlns:a="http://schemas.openxmlformats.org/drawingml/2006/main">
@@ -641,6 +642,76 @@
 </p:notes>
 </file>
 
+<file path=ppt/notesSlides/notesSlide11.xml><?xml version="1.0" encoding="utf-8"?>
+<p:notes xmlns:p="http://schemas.openxmlformats.org/presentationml/2006/main">
+  <p:cSld>
+    <p:spTree>
+      <p:nvGrpSpPr>
+        <p:cNvPr id="1" name=""/>
+        <p:cNvGrpSpPr/>
+        <p:nvPr/>
+      </p:nvGrpSpPr>
+      <p:grpSpPr>
+        <a:xfrm xmlns:a="http://schemas.openxmlformats.org/drawingml/2006/main"/>
+      </p:grpSpPr>
+      <p:sp>
+        <p:nvSpPr>
+          <p:cNvPr id="2" name="Slide Image Placeholder 1"/>
+          <p:cNvSpPr>
+            <a:spLocks xmlns:a="http://schemas.openxmlformats.org/drawingml/2006/main" noGrp="1"/>
+          </p:cNvSpPr>
+          <p:nvPr>
+            <p:ph type="sldImg" idx="0"/>
+          </p:nvPr>
+        </p:nvSpPr>
+        <p:spPr/>
+      </p:sp>
+      <p:sp>
+        <p:nvSpPr>
+          <p:cNvPr id="3" name="Notes Placeholder 2"/>
+          <p:cNvSpPr>
+            <a:spLocks xmlns:a="http://schemas.openxmlformats.org/drawingml/2006/main" noGrp="1"/>
+          </p:cNvSpPr>
+          <p:nvPr>
+            <p:ph type="body" idx="1"/>
+          </p:nvPr>
+        </p:nvSpPr>
+        <p:spPr/>
+        <p:txBody>
+          <a:bodyPr xmlns:a="http://schemas.openxmlformats.org/drawingml/2006/main"/>
+          <a:lstStyle xmlns:a="http://schemas.openxmlformats.org/drawingml/2006/main"/>
+          <a:p xmlns:a="http://schemas.openxmlformats.org/drawingml/2006/main">
+            <a:r>
+              <a:t>Abbreviated teaching excerpts, not a complete program. H2D and D2H stand for cudaMemcpyHostToDevice and cudaMemcpyDeviceToHost. Full examples and preconditions are in Task1_CUDA_Performance_Examples.cu. ThreadIdx.x varies fastest; 32-wide blocks align a warp with one row, while 16-wide blocks span two. Neither choice is universally best: source-read locality, register use, alignment and occupancy matter. Pinned host buffers support asynchronous transfers. One stream orders its H2D, kernel and D2H. Independent images with separate buffers and streams may overlap if hardware permits. Wait before reading, reusing or freeing buffers. No benchmark was run. Sources [2,3,6,7,10] match the Task 1 references. Total work O(W*H), fixed batch k buffers O(k*W*H).</a:t>
+            </a:r>
+          </a:p>
+        </p:txBody>
+      </p:sp>
+      <p:sp>
+        <p:nvSpPr>
+          <p:cNvPr id="4" name="Slide Number Placeholder 3"/>
+          <p:cNvSpPr>
+            <a:spLocks xmlns:a="http://schemas.openxmlformats.org/drawingml/2006/main" noGrp="1"/>
+          </p:cNvSpPr>
+          <p:nvPr>
+            <p:ph type="sldNum" idx="5"/>
+          </p:nvPr>
+        </p:nvSpPr>
+        <p:spPr/>
+        <p:txBody>
+          <a:bodyPr xmlns:a="http://schemas.openxmlformats.org/drawingml/2006/main"/>
+          <a:lstStyle xmlns:a="http://schemas.openxmlformats.org/drawingml/2006/main"/>
+          <a:p xmlns:a="http://schemas.openxmlformats.org/drawingml/2006/main"/>
+        </p:txBody>
+      </p:sp>
+    </p:spTree>
+  </p:cSld>
+  <p:clrMapOvr>
+    <a:masterClrMapping xmlns:a="http://schemas.openxmlformats.org/drawingml/2006/main"/>
+  </p:clrMapOvr>
+</p:notes>
+</file>
+
 <file path=ppt/notesSlides/notesSlide2.xml><?xml version="1.0" encoding="utf-8"?>
 <p:notes xmlns:p="http://schemas.openxmlformats.org/presentationml/2006/main">
   <p:cSld>
@@ -681,7 +752,7 @@
           <a:lstStyle xmlns:a="http://schemas.openxmlformats.org/drawingml/2006/main"/>
           <a:p xmlns:a="http://schemas.openxmlformats.org/drawingml/2006/main">
             <a:r>
-              <a:t>TASK 1 MAIN SLIDE. Suggested speaking time: 40 seconds.</a:t>
+              <a:t>TASK 1 MAIN SLIDE. Suggested speaking time: 35 seconds.</a:t>
             </a:r>
           </a:p>
           <a:p xmlns:a="http://schemas.openxmlformats.org/drawingml/2006/main">
@@ -696,7 +767,7 @@
           </a:p>
           <a:p xmlns:a="http://schemas.openxmlformats.org/drawingml/2006/main">
             <a:r>
-              <a:t>Brightness adjustment is data parallel because each pixel receives the same independent operation: add a value and clamp the result to the valid range. Rotation also allows independent output pixels, but each thread must find a different source location. My proposed design uses inverse mapping: start at an output pixel, apply the inverse rotation about the image centre, and sample the input. I use nearest-neighbour sampling for simplicity, keep the original image dimensions, and fill uncovered pixels with black. Separate input and output buffers avoid overwriting data that other threads still need.</a:t>
+              <a:t>Brightness is data-parallel because each pixel gets the same independent adjustment. Rotation also gives each thread independent work, but the source position changes. We start with an output pixel and map backwards to its source, so every destination gets written. Here, that produces a ninety-degree counterclockwise rotation. We use nearest-neighbour sampling, keep the original dimensions and fill uncovered pixels with black. It's simple, but diagonal edges can look jagged and corners can be cropped.</a:t>
             </a:r>
           </a:p>
           <a:p xmlns:a="http://schemas.openxmlformats.org/drawingml/2006/main">
@@ -791,7 +862,7 @@
           <a:lstStyle xmlns:a="http://schemas.openxmlformats.org/drawingml/2006/main"/>
           <a:p xmlns:a="http://schemas.openxmlformats.org/drawingml/2006/main">
             <a:r>
-              <a:t>TASK 1 MAIN SLIDE. Suggested speaking time: 45 seconds.</a:t>
+              <a:t>TASK 1 MAIN SLIDE. Suggested speaking time: 30 seconds.</a:t>
             </a:r>
           </a:p>
           <a:p xmlns:a="http://schemas.openxmlformats.org/drawingml/2006/main">
@@ -806,7 +877,7 @@
           </a:p>
           <a:p xmlns:a="http://schemas.openxmlformats.org/drawingml/2006/main">
             <a:r>
-              <a:t>CUDA organises threads into blocks and blocks into a grid. With a sixteen-by-sixteen block, each block contains two hundred and fifty-six threads. A 1024-by-1024 image needs sixty-four blocks across and sixty-four down, giving four thousand and ninety-six blocks. Multiplying the block count by the threads per block gives one million, forty-eight thousand, five hundred and seventy-six launched threads. The launch specifies the grid first and the block second. Each thread calculates its pixel coordinates from its block and thread indices. For other image dimensions, we round the grid up and check the image boundary.</a:t>
+              <a:t>CUDA organises threads into blocks, and blocks into a grid. The launch here specifies both. For a one-thousand-and-twenty-four square image, sixteen-by-sixteen threads gives two hundred and fifty-six threads per block. We need sixty-four-by-sixty-four blocks: four thousand and ninety-six blocks, launching just over one million threads. Our bounds check handles images that don't divide evenly by sixteen.</a:t>
             </a:r>
           </a:p>
           <a:p xmlns:a="http://schemas.openxmlformats.org/drawingml/2006/main">
@@ -896,7 +967,7 @@
           <a:lstStyle xmlns:a="http://schemas.openxmlformats.org/drawingml/2006/main"/>
           <a:p xmlns:a="http://schemas.openxmlformats.org/drawingml/2006/main">
             <a:r>
-              <a:t>TASK 1 MAIN SLIDE. Suggested speaking time: 35 seconds.</a:t>
+              <a:t>TASK 1 MAIN SLIDE. Suggested speaking time: 25 seconds.</a:t>
             </a:r>
           </a:p>
           <a:p xmlns:a="http://schemas.openxmlformats.org/drawingml/2006/main">
@@ -911,7 +982,7 @@
           </a:p>
           <a:p xmlns:a="http://schemas.openxmlformats.org/drawingml/2006/main">
             <a:r>
-              <a:t>A launched thread is a logical unit of work. CUDA cores are physical execution units, so the GPU does not need a separate core for every pixel. Streaming multiprocessors accept blocks as resources become available. Each sixteen-by-sixteen block contains eight warps of thirty-two threads. Warp schedulers issue instructions from ready warps, and more blocks enter as earlier blocks finish. This lets thousands of cores process millions of pixels over time. The block order is unspecified, which is why our rotation design keeps output pixels independent.</a:t>
+              <a:t>That doesn't mean we need a million CUDA cores. An SM, or streaming multiprocessor, keeps blocks resident and schedules warps of thirty-two threads. The execution units are reused over time. More blocks enter as resources become available. Register use limits residency, so a bigger block doesn't automatically improve performance.</a:t>
             </a:r>
           </a:p>
           <a:p xmlns:a="http://schemas.openxmlformats.org/drawingml/2006/main">
@@ -1001,7 +1072,7 @@
           <a:lstStyle xmlns:a="http://schemas.openxmlformats.org/drawingml/2006/main"/>
           <a:p xmlns:a="http://schemas.openxmlformats.org/drawingml/2006/main">
             <a:r>
-              <a:t>TASK 1 MAIN SLIDE. Suggested speaking time: 45 seconds.</a:t>
+              <a:t>TASK 1 MAIN SLIDE. Suggested speaking time: 30 seconds.</a:t>
             </a:r>
           </a:p>
           <a:p xmlns:a="http://schemas.openxmlformats.org/drawingml/2006/main">
@@ -1016,7 +1087,7 @@
           </a:p>
           <a:p xmlns:a="http://schemas.openxmlformats.org/drawingml/2006/main">
             <a:r>
-              <a:t>Larger images usually provide more blocks to keep the GPU busy and spread fixed launch overhead across more work. However, the improvement eventually levels off because execution and memory bandwidth are finite. Image transfers also grow with image size, so a fast kernel alone does not guarantee a faster application. A fair comparison includes input transfer, the kernel, output transfer and the setup costs being measured. Speed-up is CPU time divided by GPU total time for the same operation. Keeping several processing stages on the GPU can reduce repeated copies. This presentation makes no measured speed-up claim.</a:t>
+              <a:t>Larger images usually keep more SMs busy and spread launch overhead across more pixels. Coalesced writes use memory bandwidth efficiently, while rotation's irregular reads can limit performance. Keeping intermediate images on the GPU avoids repeated copies. For a fair speed-up, compare CPU time against the complete GPU time: setup, both transfers and the kernel. Our next step is to measure those stages; we haven't claimed a benchmark result.</a:t>
             </a:r>
           </a:p>
           <a:p xmlns:a="http://schemas.openxmlformats.org/drawingml/2006/main">
@@ -1111,7 +1182,7 @@
           <a:lstStyle xmlns:a="http://schemas.openxmlformats.org/drawingml/2006/main"/>
           <a:p xmlns:a="http://schemas.openxmlformats.org/drawingml/2006/main">
             <a:r>
-              <a:t>TASK 1 MAIN SLIDE. Suggested speaking time: 40 seconds.</a:t>
+              <a:t>TASK 1 MAIN SLIDE. Suggested speaking time: 30 seconds.</a:t>
             </a:r>
           </a:p>
           <a:p xmlns:a="http://schemas.openxmlformats.org/drawingml/2006/main">
@@ -1126,7 +1197,7 @@
           </a:p>
           <a:p xmlns:a="http://schemas.openxmlformats.org/drawingml/2006/main">
             <a:r>
-              <a:t>The conventional storage path stages image data in CPU memory before sending it to the GPU. GPUDirect Storage can provide a direct DMA path from supported storage to GPU memory, avoiding that CPU bounce buffer. The CPU still initiates and controls the operation. For a large batch of images, this may help when storage transfer limits throughput and image decoding also fits the GPU pipeline. The benefit may be small for one small image, for data already in RAM, or when decoding must run on the CPU. The conclusion is conditional: measure the complete pipeline and check the storage and software support.</a:t>
+              <a:t>GPUDirect Storage can transfer data from supported storage into GPU memory through DMA, removing CPU RAM staging. The CPU still controls the I/O. It could help repeated large batches when storage is the bottleneck. It may offer little benefit for small jobs or CPU-only image decoding. So our design separates kernel performance from the complete pipeline. My teammate will now discuss what scaling that computing power means for AI.</a:t>
             </a:r>
           </a:p>
           <a:p xmlns:a="http://schemas.openxmlformats.org/drawingml/2006/main">
@@ -1524,7 +1595,7 @@
   </p:cSld>
   <p:clrMap bg1="lt1" tx1="dk1" bg2="lt2" tx2="dk2" accent1="accent1" accent2="accent2" accent3="accent3" accent4="accent4" accent5="accent5" accent6="accent6" hlink="hlink" folHlink="folHlink"/>
   <p:sldLayoutIdLst>
-    <p:sldLayoutId xmlns:r="http://schemas.openxmlformats.org/officeDocument/2006/relationships" id="2147483649" r:id="Rfa63ac14d1374464"/>
+    <p:sldLayoutId xmlns:r="http://schemas.openxmlformats.org/officeDocument/2006/relationships" id="2147483649" r:id="Rf76d0919fea5419b"/>
   </p:sldLayoutIdLst>
   <p:txStyles>
     <p:titleStyle>
@@ -2075,7 +2146,7 @@
           <p:cNvPr id="19" name="text-1">
             <a:extLst xmlns:a="http://schemas.openxmlformats.org/drawingml/2006/main">
               <a:ext uri="{FF2B5EF4-FFF2-40B4-BE49-F238E27FC236}">
-                <a16:creationId xmlns:a16="http://schemas.microsoft.com/office/drawing/2014/main" id="{2C3AF906-D082-4EDF-AF01-ECB7BE3AC39D}"/>
+                <a16:creationId xmlns:a16="http://schemas.microsoft.com/office/drawing/2014/main" id="{93A9D117-C86E-41B5-BCDC-2BCA1CE710AE}"/>
               </a:ext>
             </a:extLst>
           </p:cNvPr>
@@ -2132,7 +2203,7 @@
           <p:cNvPr id="2" name="text-2">
             <a:extLst xmlns:a="http://schemas.openxmlformats.org/drawingml/2006/main">
               <a:ext uri="{FF2B5EF4-FFF2-40B4-BE49-F238E27FC236}">
-                <a16:creationId xmlns:a16="http://schemas.microsoft.com/office/drawing/2014/main" id="{7D473AF3-B0AC-48E0-AFCE-5F2CA7B16F54}"/>
+                <a16:creationId xmlns:a16="http://schemas.microsoft.com/office/drawing/2014/main" id="{7D30AFB6-0C4D-4FAA-8958-6AB9456C24CC}"/>
               </a:ext>
             </a:extLst>
           </p:cNvPr>
@@ -2189,7 +2260,7 @@
           <p:cNvPr id="3" name="text-3">
             <a:extLst xmlns:a="http://schemas.openxmlformats.org/drawingml/2006/main">
               <a:ext uri="{FF2B5EF4-FFF2-40B4-BE49-F238E27FC236}">
-                <a16:creationId xmlns:a16="http://schemas.microsoft.com/office/drawing/2014/main" id="{46902750-4EEF-432B-B944-0786DD04E02A}"/>
+                <a16:creationId xmlns:a16="http://schemas.microsoft.com/office/drawing/2014/main" id="{C1C50430-7FA6-488D-A7BC-037194F59789}"/>
               </a:ext>
             </a:extLst>
           </p:cNvPr>
@@ -2246,7 +2317,7 @@
           <p:cNvPr id="4" name="text-4">
             <a:extLst xmlns:a="http://schemas.openxmlformats.org/drawingml/2006/main">
               <a:ext uri="{FF2B5EF4-FFF2-40B4-BE49-F238E27FC236}">
-                <a16:creationId xmlns:a16="http://schemas.microsoft.com/office/drawing/2014/main" id="{E0A697FF-2737-421E-8264-A4B71BEE65CF}"/>
+                <a16:creationId xmlns:a16="http://schemas.microsoft.com/office/drawing/2014/main" id="{02D7E96B-2229-4EBC-84A6-FFF8298444C2}"/>
               </a:ext>
             </a:extLst>
           </p:cNvPr>
@@ -2303,7 +2374,7 @@
           <p:cNvPr id="5" name="text-5">
             <a:extLst xmlns:a="http://schemas.openxmlformats.org/drawingml/2006/main">
               <a:ext uri="{FF2B5EF4-FFF2-40B4-BE49-F238E27FC236}">
-                <a16:creationId xmlns:a16="http://schemas.microsoft.com/office/drawing/2014/main" id="{424DADE8-4290-4250-9702-A1D0534063ED}"/>
+                <a16:creationId xmlns:a16="http://schemas.microsoft.com/office/drawing/2014/main" id="{E9491967-AD3A-4A8C-B61F-2AA005B0E657}"/>
               </a:ext>
             </a:extLst>
           </p:cNvPr>
@@ -2406,7 +2477,7 @@
           <p:cNvPr id="6" name="text-6">
             <a:extLst xmlns:a="http://schemas.openxmlformats.org/drawingml/2006/main">
               <a:ext uri="{FF2B5EF4-FFF2-40B4-BE49-F238E27FC236}">
-                <a16:creationId xmlns:a16="http://schemas.microsoft.com/office/drawing/2014/main" id="{00BC97C8-43B1-486A-9888-A9B44658D2FF}"/>
+                <a16:creationId xmlns:a16="http://schemas.microsoft.com/office/drawing/2014/main" id="{A238F78E-8D52-4729-B97A-57EAC92E7074}"/>
               </a:ext>
             </a:extLst>
           </p:cNvPr>
@@ -2463,7 +2534,7 @@
           <p:cNvPr id="7" name="diagram-7">
             <a:extLst xmlns:a="http://schemas.openxmlformats.org/drawingml/2006/main">
               <a:ext uri="{FF2B5EF4-FFF2-40B4-BE49-F238E27FC236}">
-                <a16:creationId xmlns:a16="http://schemas.microsoft.com/office/drawing/2014/main" id="{D893DFD1-B95D-46F0-AD3B-283BE7289615}"/>
+                <a16:creationId xmlns:a16="http://schemas.microsoft.com/office/drawing/2014/main" id="{C47F3A8A-B5DE-422E-9D75-95025330F2C0}"/>
               </a:ext>
             </a:extLst>
           </p:cNvPr>
@@ -2547,7 +2618,7 @@
           <p:cNvPr id="8" name="diagram-8">
             <a:extLst xmlns:a="http://schemas.openxmlformats.org/drawingml/2006/main">
               <a:ext uri="{FF2B5EF4-FFF2-40B4-BE49-F238E27FC236}">
-                <a16:creationId xmlns:a16="http://schemas.microsoft.com/office/drawing/2014/main" id="{5B855118-A53C-44E5-8577-FE05107AA39A}"/>
+                <a16:creationId xmlns:a16="http://schemas.microsoft.com/office/drawing/2014/main" id="{DE1DD8B4-CDDE-4BB7-8C72-3C86DB5786C7}"/>
               </a:ext>
             </a:extLst>
           </p:cNvPr>
@@ -2631,7 +2702,7 @@
           <p:cNvPr id="9" name="diagram-9">
             <a:extLst xmlns:a="http://schemas.openxmlformats.org/drawingml/2006/main">
               <a:ext uri="{FF2B5EF4-FFF2-40B4-BE49-F238E27FC236}">
-                <a16:creationId xmlns:a16="http://schemas.microsoft.com/office/drawing/2014/main" id="{E223BDDE-93C3-45B0-AE46-12F63E0638A2}"/>
+                <a16:creationId xmlns:a16="http://schemas.microsoft.com/office/drawing/2014/main" id="{9504F06B-1988-4F4F-8B46-A26768CA637F}"/>
               </a:ext>
             </a:extLst>
           </p:cNvPr>
@@ -2715,7 +2786,7 @@
           <p:cNvPr id="10" name="diagram-10">
             <a:extLst xmlns:a="http://schemas.openxmlformats.org/drawingml/2006/main">
               <a:ext uri="{FF2B5EF4-FFF2-40B4-BE49-F238E27FC236}">
-                <a16:creationId xmlns:a16="http://schemas.microsoft.com/office/drawing/2014/main" id="{154319D4-B9D5-49DF-A5A6-F048C621D30F}"/>
+                <a16:creationId xmlns:a16="http://schemas.microsoft.com/office/drawing/2014/main" id="{384D6AF8-4754-4C56-8DA8-22357D0A95CF}"/>
               </a:ext>
             </a:extLst>
           </p:cNvPr>
@@ -2824,7 +2895,7 @@
           <p:cNvPr id="12" name="text-11">
             <a:extLst xmlns:a="http://schemas.openxmlformats.org/drawingml/2006/main">
               <a:ext uri="{FF2B5EF4-FFF2-40B4-BE49-F238E27FC236}">
-                <a16:creationId xmlns:a16="http://schemas.microsoft.com/office/drawing/2014/main" id="{EB718906-AAAB-4F26-844B-1DCFDDADCC3C}"/>
+                <a16:creationId xmlns:a16="http://schemas.microsoft.com/office/drawing/2014/main" id="{21FDFDD8-B2EE-4BDE-A331-EBD8D479F134}"/>
               </a:ext>
             </a:extLst>
           </p:cNvPr>
@@ -2881,7 +2952,7 @@
           <p:cNvPr id="13" name="flow-12">
             <a:extLst xmlns:a="http://schemas.openxmlformats.org/drawingml/2006/main">
               <a:ext uri="{FF2B5EF4-FFF2-40B4-BE49-F238E27FC236}">
-                <a16:creationId xmlns:a16="http://schemas.microsoft.com/office/drawing/2014/main" id="{B3D80250-B0D9-4493-A649-37B3E2A1DF2E}"/>
+                <a16:creationId xmlns:a16="http://schemas.microsoft.com/office/drawing/2014/main" id="{FB936BB2-4D00-44E5-8480-066946EDFC91}"/>
               </a:ext>
             </a:extLst>
           </p:cNvPr>
@@ -2911,7 +2982,7 @@
           <p:cNvPr id="14" name="flow-13">
             <a:extLst xmlns:a="http://schemas.openxmlformats.org/drawingml/2006/main">
               <a:ext uri="{FF2B5EF4-FFF2-40B4-BE49-F238E27FC236}">
-                <a16:creationId xmlns:a16="http://schemas.microsoft.com/office/drawing/2014/main" id="{FC7A2091-CD97-4038-8EDC-48D64D9D78D9}"/>
+                <a16:creationId xmlns:a16="http://schemas.microsoft.com/office/drawing/2014/main" id="{D518227C-807D-490A-9521-C376925083FC}"/>
               </a:ext>
             </a:extLst>
           </p:cNvPr>
@@ -2941,7 +3012,7 @@
           <p:cNvPr id="15" name="text-14">
             <a:extLst xmlns:a="http://schemas.openxmlformats.org/drawingml/2006/main">
               <a:ext uri="{FF2B5EF4-FFF2-40B4-BE49-F238E27FC236}">
-                <a16:creationId xmlns:a16="http://schemas.microsoft.com/office/drawing/2014/main" id="{0C0AD6B3-3393-4DF5-BDA5-CA1D0BD2B59A}"/>
+                <a16:creationId xmlns:a16="http://schemas.microsoft.com/office/drawing/2014/main" id="{2B8D589E-B4AA-4582-ABAF-56DEEA3BA44D}"/>
               </a:ext>
             </a:extLst>
           </p:cNvPr>
@@ -2998,7 +3069,7 @@
           <p:cNvPr id="16" name="text-15">
             <a:extLst xmlns:a="http://schemas.openxmlformats.org/drawingml/2006/main">
               <a:ext uri="{FF2B5EF4-FFF2-40B4-BE49-F238E27FC236}">
-                <a16:creationId xmlns:a16="http://schemas.microsoft.com/office/drawing/2014/main" id="{ED84359C-476E-4177-814C-64D56D6C6002}"/>
+                <a16:creationId xmlns:a16="http://schemas.microsoft.com/office/drawing/2014/main" id="{19FFDC27-0D57-4C19-BB5D-7FB998E183A5}"/>
               </a:ext>
             </a:extLst>
           </p:cNvPr>
@@ -3081,7 +3152,7 @@
           <p:cNvPr id="18" name="text-16">
             <a:extLst xmlns:a="http://schemas.openxmlformats.org/drawingml/2006/main">
               <a:ext uri="{FF2B5EF4-FFF2-40B4-BE49-F238E27FC236}">
-                <a16:creationId xmlns:a16="http://schemas.microsoft.com/office/drawing/2014/main" id="{8A0AFDEA-095B-447A-9C7A-024853E37579}"/>
+                <a16:creationId xmlns:a16="http://schemas.microsoft.com/office/drawing/2014/main" id="{A3B3EA56-B645-4A43-845A-2A840E6CFA51}"/>
               </a:ext>
             </a:extLst>
           </p:cNvPr>
@@ -3136,7 +3207,7 @@
     </p:spTree>
     <p:extLst>
       <p:ext uri="{BB962C8B-B14F-4D97-AF65-F5344CB8AC3E}">
-        <p14:creationId xmlns:p14="http://schemas.microsoft.com/office/powerpoint/2010/main" val="225754115"/>
+        <p14:creationId xmlns:p14="http://schemas.microsoft.com/office/powerpoint/2010/main" val="1195905200"/>
       </p:ext>
     </p:extLst>
   </p:cSld>
@@ -3167,7 +3238,7 @@
           <p:cNvPr id="10" name="text-465">
             <a:extLst xmlns:a="http://schemas.openxmlformats.org/drawingml/2006/main">
               <a:ext uri="{FF2B5EF4-FFF2-40B4-BE49-F238E27FC236}">
-                <a16:creationId xmlns:a16="http://schemas.microsoft.com/office/drawing/2014/main" id="{755CAAE0-D6B9-4766-BADC-421F0144E021}"/>
+                <a16:creationId xmlns:a16="http://schemas.microsoft.com/office/drawing/2014/main" id="{74B5B81A-1235-4777-A1C1-C5A16281424F}"/>
               </a:ext>
             </a:extLst>
           </p:cNvPr>
@@ -3224,7 +3295,7 @@
           <p:cNvPr id="2" name="text-466">
             <a:extLst xmlns:a="http://schemas.openxmlformats.org/drawingml/2006/main">
               <a:ext uri="{FF2B5EF4-FFF2-40B4-BE49-F238E27FC236}">
-                <a16:creationId xmlns:a16="http://schemas.microsoft.com/office/drawing/2014/main" id="{626079D1-F5AA-4610-9F29-FE8150B1496F}"/>
+                <a16:creationId xmlns:a16="http://schemas.microsoft.com/office/drawing/2014/main" id="{3DE20425-52EA-4648-B95E-3B6A0369EB6B}"/>
               </a:ext>
             </a:extLst>
           </p:cNvPr>
@@ -3281,7 +3352,7 @@
           <p:cNvPr id="3" name="text-467">
             <a:extLst xmlns:a="http://schemas.openxmlformats.org/drawingml/2006/main">
               <a:ext uri="{FF2B5EF4-FFF2-40B4-BE49-F238E27FC236}">
-                <a16:creationId xmlns:a16="http://schemas.microsoft.com/office/drawing/2014/main" id="{53192F67-92FE-4474-8F95-E2A6308A0C14}"/>
+                <a16:creationId xmlns:a16="http://schemas.microsoft.com/office/drawing/2014/main" id="{CFED87DD-8C74-45FA-960D-76B4C6D66196}"/>
               </a:ext>
             </a:extLst>
           </p:cNvPr>
@@ -3338,7 +3409,7 @@
           <p:cNvPr id="4" name="text-468">
             <a:extLst xmlns:a="http://schemas.openxmlformats.org/drawingml/2006/main">
               <a:ext uri="{FF2B5EF4-FFF2-40B4-BE49-F238E27FC236}">
-                <a16:creationId xmlns:a16="http://schemas.microsoft.com/office/drawing/2014/main" id="{CD4B08E4-3196-4C96-9682-219EC210EE72}"/>
+                <a16:creationId xmlns:a16="http://schemas.microsoft.com/office/drawing/2014/main" id="{C42A7924-EB0C-4FE0-9547-0B3830C67C4F}"/>
               </a:ext>
             </a:extLst>
           </p:cNvPr>
@@ -3395,7 +3466,7 @@
           <p:cNvPr id="5" name="text-469">
             <a:extLst xmlns:a="http://schemas.openxmlformats.org/drawingml/2006/main">
               <a:ext uri="{FF2B5EF4-FFF2-40B4-BE49-F238E27FC236}">
-                <a16:creationId xmlns:a16="http://schemas.microsoft.com/office/drawing/2014/main" id="{88BB3148-8306-4B6A-9EFB-F3068498F3E3}"/>
+                <a16:creationId xmlns:a16="http://schemas.microsoft.com/office/drawing/2014/main" id="{CA9D9389-BC44-42B8-9C15-9E638E24DED2}"/>
               </a:ext>
             </a:extLst>
           </p:cNvPr>
@@ -3452,7 +3523,7 @@
           <p:cNvPr id="6" name="text-470">
             <a:extLst xmlns:a="http://schemas.openxmlformats.org/drawingml/2006/main">
               <a:ext uri="{FF2B5EF4-FFF2-40B4-BE49-F238E27FC236}">
-                <a16:creationId xmlns:a16="http://schemas.microsoft.com/office/drawing/2014/main" id="{5E572509-A3D0-4F04-AAF6-81FEC649901B}"/>
+                <a16:creationId xmlns:a16="http://schemas.microsoft.com/office/drawing/2014/main" id="{E890B0F8-AB64-4F9D-B934-5E2A24D481F0}"/>
               </a:ext>
             </a:extLst>
           </p:cNvPr>
@@ -3509,7 +3580,7 @@
           <p:cNvPr id="7" name="text-471">
             <a:extLst xmlns:a="http://schemas.openxmlformats.org/drawingml/2006/main">
               <a:ext uri="{FF2B5EF4-FFF2-40B4-BE49-F238E27FC236}">
-                <a16:creationId xmlns:a16="http://schemas.microsoft.com/office/drawing/2014/main" id="{8A867435-162C-4C31-A5C2-1DD675CAD1CE}"/>
+                <a16:creationId xmlns:a16="http://schemas.microsoft.com/office/drawing/2014/main" id="{6111329F-8AB3-404A-B8D7-51CA7B1ED24E}"/>
               </a:ext>
             </a:extLst>
           </p:cNvPr>
@@ -3566,7 +3637,7 @@
           <p:cNvPr id="8" name="text-472">
             <a:extLst xmlns:a="http://schemas.openxmlformats.org/drawingml/2006/main">
               <a:ext uri="{FF2B5EF4-FFF2-40B4-BE49-F238E27FC236}">
-                <a16:creationId xmlns:a16="http://schemas.microsoft.com/office/drawing/2014/main" id="{E270A063-AA60-4863-9071-6A06850EB71B}"/>
+                <a16:creationId xmlns:a16="http://schemas.microsoft.com/office/drawing/2014/main" id="{4A65E81A-25E3-4C4F-8679-530E672BBFF2}"/>
               </a:ext>
             </a:extLst>
           </p:cNvPr>
@@ -3623,7 +3694,7 @@
           <p:cNvPr id="9" name="text-473">
             <a:extLst xmlns:a="http://schemas.openxmlformats.org/drawingml/2006/main">
               <a:ext uri="{FF2B5EF4-FFF2-40B4-BE49-F238E27FC236}">
-                <a16:creationId xmlns:a16="http://schemas.microsoft.com/office/drawing/2014/main" id="{69659B0E-409C-464E-8483-1AD06B6B2189}"/>
+                <a16:creationId xmlns:a16="http://schemas.microsoft.com/office/drawing/2014/main" id="{62B4CD55-F808-4ABE-86E5-0A2BE9614C1B}"/>
               </a:ext>
             </a:extLst>
           </p:cNvPr>
@@ -3678,7 +3749,618 @@
     </p:spTree>
     <p:extLst>
       <p:ext uri="{BB962C8B-B14F-4D97-AF65-F5344CB8AC3E}">
-        <p14:creationId xmlns:p14="http://schemas.microsoft.com/office/powerpoint/2010/main" val="751178226"/>
+        <p14:creationId xmlns:p14="http://schemas.microsoft.com/office/powerpoint/2010/main" val="401404449"/>
+      </p:ext>
+    </p:extLst>
+  </p:cSld>
+</p:sld>
+</file>
+
+<file path=ppt/slides/slide11.xml><?xml version="1.0" encoding="utf-8"?>
+<p:sld xmlns:p="http://schemas.openxmlformats.org/presentationml/2006/main">
+  <p:cSld>
+    <p:bg>
+      <p:bgPr>
+        <a:solidFill xmlns:a="http://schemas.openxmlformats.org/drawingml/2006/main">
+          <a:srgbClr val="FAFCFD"/>
+        </a:solidFill>
+      </p:bgPr>
+    </p:bg>
+    <p:spTree>
+      <p:nvGrpSpPr>
+        <p:cNvPr id="1" name=""/>
+        <p:cNvGrpSpPr/>
+        <p:nvPr/>
+      </p:nvGrpSpPr>
+      <p:grpSpPr>
+        <a:xfrm xmlns:a="http://schemas.openxmlformats.org/drawingml/2006/main"/>
+      </p:grpSpPr>
+      <p:sp>
+        <p:nvSpPr>
+          <p:cNvPr id="10" name="text-474">
+            <a:extLst xmlns:a="http://schemas.openxmlformats.org/drawingml/2006/main">
+              <a:ext uri="{FF2B5EF4-FFF2-40B4-BE49-F238E27FC236}">
+                <a16:creationId xmlns:a16="http://schemas.microsoft.com/office/drawing/2014/main" id="{2BB8F238-5518-4AD3-9E77-F1DC328B648E}"/>
+              </a:ext>
+            </a:extLst>
+          </p:cNvPr>
+          <p:cNvSpPr>
+            <a:spLocks xmlns:a="http://schemas.openxmlformats.org/drawingml/2006/main" noGrp="1"/>
+          </p:cNvSpPr>
+          <p:nvPr/>
+        </p:nvSpPr>
+        <p:spPr>
+          <a:xfrm xmlns:a="http://schemas.openxmlformats.org/drawingml/2006/main">
+            <a:off x="571500" y="457200"/>
+            <a:ext cx="10953750" cy="895350"/>
+          </a:xfrm>
+          <a:prstGeom xmlns:a="http://schemas.openxmlformats.org/drawingml/2006/main" prst="rect">
+            <a:avLst/>
+          </a:prstGeom>
+          <a:noFill xmlns:a="http://schemas.openxmlformats.org/drawingml/2006/main"/>
+          <a:ln xmlns:a="http://schemas.openxmlformats.org/drawingml/2006/main" w="0">
+            <a:noFill/>
+          </a:ln>
+        </p:spPr>
+        <p:txBody>
+          <a:bodyPr xmlns:a="http://schemas.openxmlformats.org/drawingml/2006/main" wrap="square" lIns="0" tIns="0" rIns="0" bIns="0" anchor="t">
+            <a:noAutofit/>
+          </a:bodyPr>
+          <a:lstStyle xmlns:a="http://schemas.openxmlformats.org/drawingml/2006/main"/>
+          <a:p xmlns:a="http://schemas.openxmlformats.org/drawingml/2006/main">
+            <a:pPr algn="l">
+              <a:defRPr sz="3300" b="1">
+                <a:solidFill>
+                  <a:srgbClr val="142B3F"/>
+                </a:solidFill>
+                <a:latin typeface="Arial"/>
+                <a:ea typeface="Arial"/>
+                <a:cs typeface="Arial"/>
+              </a:defRPr>
+            </a:pPr>
+            <a:r>
+              <a:rPr sz="3300" b="1">
+                <a:solidFill>
+                  <a:srgbClr val="142B3F"/>
+                </a:solidFill>
+                <a:latin typeface="Arial"/>
+                <a:ea typeface="Arial"/>
+                <a:cs typeface="Arial"/>
+              </a:rPr>
+              <a:t>Appendix E: CUDA performance choices</a:t>
+            </a:r>
+          </a:p>
+        </p:txBody>
+      </p:sp>
+      <p:sp>
+        <p:nvSpPr>
+          <p:cNvPr id="2" name="text-475">
+            <a:extLst xmlns:a="http://schemas.openxmlformats.org/drawingml/2006/main">
+              <a:ext uri="{FF2B5EF4-FFF2-40B4-BE49-F238E27FC236}">
+                <a16:creationId xmlns:a16="http://schemas.microsoft.com/office/drawing/2014/main" id="{BFB8CD93-05B5-4914-920C-B473698BCB31}"/>
+              </a:ext>
+            </a:extLst>
+          </p:cNvPr>
+          <p:cNvSpPr>
+            <a:spLocks xmlns:a="http://schemas.openxmlformats.org/drawingml/2006/main" noGrp="1"/>
+          </p:cNvSpPr>
+          <p:nvPr/>
+        </p:nvSpPr>
+        <p:spPr>
+          <a:xfrm xmlns:a="http://schemas.openxmlformats.org/drawingml/2006/main">
+            <a:off x="571500" y="1314450"/>
+            <a:ext cx="10668000" cy="333375"/>
+          </a:xfrm>
+          <a:prstGeom xmlns:a="http://schemas.openxmlformats.org/drawingml/2006/main" prst="rect">
+            <a:avLst/>
+          </a:prstGeom>
+          <a:noFill xmlns:a="http://schemas.openxmlformats.org/drawingml/2006/main"/>
+          <a:ln xmlns:a="http://schemas.openxmlformats.org/drawingml/2006/main" w="0">
+            <a:noFill/>
+          </a:ln>
+        </p:spPr>
+        <p:txBody>
+          <a:bodyPr xmlns:a="http://schemas.openxmlformats.org/drawingml/2006/main" wrap="square" lIns="0" tIns="0" rIns="0" bIns="0" anchor="t">
+            <a:noAutofit/>
+          </a:bodyPr>
+          <a:lstStyle xmlns:a="http://schemas.openxmlformats.org/drawingml/2006/main"/>
+          <a:p xmlns:a="http://schemas.openxmlformats.org/drawingml/2006/main">
+            <a:pPr algn="l">
+              <a:defRPr sz="1650" b="0">
+                <a:solidFill>
+                  <a:srgbClr val="496274"/>
+                </a:solidFill>
+                <a:latin typeface="Arial"/>
+                <a:ea typeface="Arial"/>
+                <a:cs typeface="Arial"/>
+              </a:defRPr>
+            </a:pPr>
+            <a:r>
+              <a:rPr sz="1650" b="0">
+                <a:solidFill>
+                  <a:srgbClr val="496274"/>
+                </a:solidFill>
+                <a:latin typeface="Arial"/>
+                <a:ea typeface="Arial"/>
+                <a:cs typeface="Arial"/>
+              </a:rPr>
+              <a:t>Supplementary material for Q&amp;A</a:t>
+            </a:r>
+          </a:p>
+        </p:txBody>
+      </p:sp>
+      <p:sp>
+        <p:nvSpPr>
+          <p:cNvPr id="3" name="text-476">
+            <a:extLst xmlns:a="http://schemas.openxmlformats.org/drawingml/2006/main">
+              <a:ext uri="{FF2B5EF4-FFF2-40B4-BE49-F238E27FC236}">
+                <a16:creationId xmlns:a16="http://schemas.microsoft.com/office/drawing/2014/main" id="{6301DE9D-3AF2-4892-8961-41D931EF99E5}"/>
+              </a:ext>
+            </a:extLst>
+          </p:cNvPr>
+          <p:cNvSpPr>
+            <a:spLocks xmlns:a="http://schemas.openxmlformats.org/drawingml/2006/main" noGrp="1"/>
+          </p:cNvSpPr>
+          <p:nvPr/>
+        </p:nvSpPr>
+        <p:spPr>
+          <a:xfrm xmlns:a="http://schemas.openxmlformats.org/drawingml/2006/main">
+            <a:off x="571500" y="6400800"/>
+            <a:ext cx="10382250" cy="266700"/>
+          </a:xfrm>
+          <a:prstGeom xmlns:a="http://schemas.openxmlformats.org/drawingml/2006/main" prst="rect">
+            <a:avLst/>
+          </a:prstGeom>
+          <a:noFill xmlns:a="http://schemas.openxmlformats.org/drawingml/2006/main"/>
+          <a:ln xmlns:a="http://schemas.openxmlformats.org/drawingml/2006/main" w="0">
+            <a:noFill/>
+          </a:ln>
+        </p:spPr>
+        <p:txBody>
+          <a:bodyPr xmlns:a="http://schemas.openxmlformats.org/drawingml/2006/main" wrap="square" lIns="0" tIns="0" rIns="0" bIns="0" anchor="t">
+            <a:noAutofit/>
+          </a:bodyPr>
+          <a:lstStyle xmlns:a="http://schemas.openxmlformats.org/drawingml/2006/main"/>
+          <a:p xmlns:a="http://schemas.openxmlformats.org/drawingml/2006/main">
+            <a:pPr algn="l">
+              <a:defRPr sz="1200" b="0">
+                <a:solidFill>
+                  <a:srgbClr val="496274"/>
+                </a:solidFill>
+                <a:latin typeface="Arial"/>
+                <a:ea typeface="Arial"/>
+                <a:cs typeface="Arial"/>
+              </a:defRPr>
+            </a:pPr>
+            <a:r>
+              <a:rPr sz="1200" b="0">
+                <a:solidFill>
+                  <a:srgbClr val="496274"/>
+                </a:solidFill>
+                <a:latin typeface="Arial"/>
+                <a:ea typeface="Arial"/>
+                <a:cs typeface="Arial"/>
+              </a:rPr>
+              <a:t>Sources: [2] [3] [6] [7] [10]. Full references in appendix and companion PDF.</a:t>
+            </a:r>
+          </a:p>
+        </p:txBody>
+      </p:sp>
+      <p:sp>
+        <p:nvSpPr>
+          <p:cNvPr id="4" name="text-477">
+            <a:extLst xmlns:a="http://schemas.openxmlformats.org/drawingml/2006/main">
+              <a:ext uri="{FF2B5EF4-FFF2-40B4-BE49-F238E27FC236}">
+                <a16:creationId xmlns:a16="http://schemas.microsoft.com/office/drawing/2014/main" id="{2EFDFC3C-6BE0-4E01-BC8D-A62B53A6F051}"/>
+              </a:ext>
+            </a:extLst>
+          </p:cNvPr>
+          <p:cNvSpPr>
+            <a:spLocks xmlns:a="http://schemas.openxmlformats.org/drawingml/2006/main" noGrp="1"/>
+          </p:cNvSpPr>
+          <p:nvPr/>
+        </p:nvSpPr>
+        <p:spPr>
+          <a:xfrm xmlns:a="http://schemas.openxmlformats.org/drawingml/2006/main">
+            <a:off x="11144250" y="6400800"/>
+            <a:ext cx="428625" cy="266700"/>
+          </a:xfrm>
+          <a:prstGeom xmlns:a="http://schemas.openxmlformats.org/drawingml/2006/main" prst="rect">
+            <a:avLst/>
+          </a:prstGeom>
+          <a:noFill xmlns:a="http://schemas.openxmlformats.org/drawingml/2006/main"/>
+          <a:ln xmlns:a="http://schemas.openxmlformats.org/drawingml/2006/main" w="0">
+            <a:noFill/>
+          </a:ln>
+        </p:spPr>
+        <p:txBody>
+          <a:bodyPr xmlns:a="http://schemas.openxmlformats.org/drawingml/2006/main" wrap="square" lIns="0" tIns="0" rIns="0" bIns="0" anchor="t">
+            <a:noAutofit/>
+          </a:bodyPr>
+          <a:lstStyle xmlns:a="http://schemas.openxmlformats.org/drawingml/2006/main"/>
+          <a:p xmlns:a="http://schemas.openxmlformats.org/drawingml/2006/main">
+            <a:pPr algn="r">
+              <a:defRPr sz="1200" b="0">
+                <a:solidFill>
+                  <a:srgbClr val="496274"/>
+                </a:solidFill>
+                <a:latin typeface="Arial"/>
+                <a:ea typeface="Arial"/>
+                <a:cs typeface="Arial"/>
+              </a:defRPr>
+            </a:pPr>
+            <a:r>
+              <a:rPr sz="1200" b="0">
+                <a:solidFill>
+                  <a:srgbClr val="496274"/>
+                </a:solidFill>
+                <a:latin typeface="Arial"/>
+                <a:ea typeface="Arial"/>
+                <a:cs typeface="Arial"/>
+              </a:rPr>
+              <a:t>11</a:t>
+            </a:r>
+          </a:p>
+        </p:txBody>
+      </p:sp>
+      <p:sp>
+        <p:nvSpPr>
+          <p:cNvPr id="5" name="text-478">
+            <a:extLst xmlns:a="http://schemas.openxmlformats.org/drawingml/2006/main">
+              <a:ext uri="{FF2B5EF4-FFF2-40B4-BE49-F238E27FC236}">
+                <a16:creationId xmlns:a16="http://schemas.microsoft.com/office/drawing/2014/main" id="{7BED6EA7-35AF-46D1-8A22-B239366C4823}"/>
+              </a:ext>
+            </a:extLst>
+          </p:cNvPr>
+          <p:cNvSpPr>
+            <a:spLocks xmlns:a="http://schemas.openxmlformats.org/drawingml/2006/main" noGrp="1"/>
+          </p:cNvSpPr>
+          <p:nvPr/>
+        </p:nvSpPr>
+        <p:spPr>
+          <a:xfrm xmlns:a="http://schemas.openxmlformats.org/drawingml/2006/main">
+            <a:off x="571500" y="2000250"/>
+            <a:ext cx="10953750" cy="409575"/>
+          </a:xfrm>
+          <a:prstGeom xmlns:a="http://schemas.openxmlformats.org/drawingml/2006/main" prst="rect">
+            <a:avLst/>
+          </a:prstGeom>
+          <a:noFill xmlns:a="http://schemas.openxmlformats.org/drawingml/2006/main"/>
+          <a:ln xmlns:a="http://schemas.openxmlformats.org/drawingml/2006/main" w="0">
+            <a:noFill/>
+          </a:ln>
+        </p:spPr>
+        <p:txBody>
+          <a:bodyPr xmlns:a="http://schemas.openxmlformats.org/drawingml/2006/main" wrap="square" lIns="0" tIns="0" rIns="0" bIns="0" anchor="t">
+            <a:noAutofit/>
+          </a:bodyPr>
+          <a:lstStyle xmlns:a="http://schemas.openxmlformats.org/drawingml/2006/main"/>
+          <a:p xmlns:a="http://schemas.openxmlformats.org/drawingml/2006/main">
+            <a:pPr algn="l">
+              <a:defRPr sz="2175" b="1">
+                <a:solidFill>
+                  <a:srgbClr val="142B3F"/>
+                </a:solidFill>
+                <a:latin typeface="Arial"/>
+                <a:ea typeface="Arial"/>
+                <a:cs typeface="Arial"/>
+              </a:defRPr>
+            </a:pPr>
+            <a:r>
+              <a:rPr sz="2175" b="1">
+                <a:solidFill>
+                  <a:srgbClr val="142B3F"/>
+                </a:solidFill>
+                <a:latin typeface="Arial"/>
+                <a:ea typeface="Arial"/>
+                <a:cs typeface="Arial"/>
+              </a:rPr>
+              <a:t>Launch shape: same 256 threads, different warp layout</a:t>
+            </a:r>
+          </a:p>
+        </p:txBody>
+      </p:sp>
+      <p:sp>
+        <p:nvSpPr>
+          <p:cNvPr id="6" name="text-479">
+            <a:extLst xmlns:a="http://schemas.openxmlformats.org/drawingml/2006/main">
+              <a:ext uri="{FF2B5EF4-FFF2-40B4-BE49-F238E27FC236}">
+                <a16:creationId xmlns:a16="http://schemas.microsoft.com/office/drawing/2014/main" id="{01C2234F-9D57-4F7B-B940-538F5033CFA2}"/>
+              </a:ext>
+            </a:extLst>
+          </p:cNvPr>
+          <p:cNvSpPr>
+            <a:spLocks xmlns:a="http://schemas.openxmlformats.org/drawingml/2006/main" noGrp="1"/>
+          </p:cNvSpPr>
+          <p:nvPr/>
+        </p:nvSpPr>
+        <p:spPr>
+          <a:xfrm xmlns:a="http://schemas.openxmlformats.org/drawingml/2006/main">
+            <a:off x="571500" y="2495550"/>
+            <a:ext cx="10953750" cy="790575"/>
+          </a:xfrm>
+          <a:prstGeom xmlns:a="http://schemas.openxmlformats.org/drawingml/2006/main" prst="rect">
+            <a:avLst/>
+          </a:prstGeom>
+          <a:noFill xmlns:a="http://schemas.openxmlformats.org/drawingml/2006/main"/>
+          <a:ln xmlns:a="http://schemas.openxmlformats.org/drawingml/2006/main" w="0">
+            <a:noFill/>
+          </a:ln>
+        </p:spPr>
+        <p:txBody>
+          <a:bodyPr xmlns:a="http://schemas.openxmlformats.org/drawingml/2006/main" wrap="square" lIns="0" tIns="0" rIns="0" bIns="0" anchor="t">
+            <a:noAutofit/>
+          </a:bodyPr>
+          <a:lstStyle xmlns:a="http://schemas.openxmlformats.org/drawingml/2006/main"/>
+          <a:p xmlns:a="http://schemas.openxmlformats.org/drawingml/2006/main">
+            <a:pPr algn="l">
+              <a:defRPr sz="1875" b="0">
+                <a:solidFill>
+                  <a:srgbClr val="142B3F"/>
+                </a:solidFill>
+                <a:latin typeface="Consolas"/>
+                <a:ea typeface="Consolas"/>
+                <a:cs typeface="Consolas"/>
+              </a:defRPr>
+            </a:pPr>
+            <a:r>
+              <a:rPr sz="1875" b="0">
+                <a:solidFill>
+                  <a:srgbClr val="142B3F"/>
+                </a:solidFill>
+                <a:latin typeface="Consolas"/>
+                <a:ea typeface="Consolas"/>
+                <a:cs typeface="Consolas"/>
+              </a:rPr>
+              <a:t>dim3 blockA(16, 16);  // A warp spans two output rows</a:t>
+            </a:r>
+          </a:p>
+          <a:p xmlns:a="http://schemas.openxmlformats.org/drawingml/2006/main">
+            <a:pPr algn="l">
+              <a:defRPr sz="1875" b="0">
+                <a:solidFill>
+                  <a:srgbClr val="142B3F"/>
+                </a:solidFill>
+                <a:latin typeface="Consolas"/>
+                <a:ea typeface="Consolas"/>
+                <a:cs typeface="Consolas"/>
+              </a:defRPr>
+            </a:pPr>
+            <a:r>
+              <a:rPr sz="1875" b="0">
+                <a:solidFill>
+                  <a:srgbClr val="142B3F"/>
+                </a:solidFill>
+                <a:latin typeface="Consolas"/>
+                <a:ea typeface="Consolas"/>
+                <a:cs typeface="Consolas"/>
+              </a:rPr>
+              <a:t>dim3 blockB(32, 8);   // A warp spans one output row</a:t>
+            </a:r>
+          </a:p>
+        </p:txBody>
+      </p:sp>
+      <p:sp>
+        <p:nvSpPr>
+          <p:cNvPr id="7" name="text-480">
+            <a:extLst xmlns:a="http://schemas.openxmlformats.org/drawingml/2006/main">
+              <a:ext uri="{FF2B5EF4-FFF2-40B4-BE49-F238E27FC236}">
+                <a16:creationId xmlns:a16="http://schemas.microsoft.com/office/drawing/2014/main" id="{94C429C4-1AF7-46E7-AED8-ACA730F7BB36}"/>
+              </a:ext>
+            </a:extLst>
+          </p:cNvPr>
+          <p:cNvSpPr>
+            <a:spLocks xmlns:a="http://schemas.openxmlformats.org/drawingml/2006/main" noGrp="1"/>
+          </p:cNvSpPr>
+          <p:nvPr/>
+        </p:nvSpPr>
+        <p:spPr>
+          <a:xfrm xmlns:a="http://schemas.openxmlformats.org/drawingml/2006/main">
+            <a:off x="571500" y="3457575"/>
+            <a:ext cx="10953750" cy="428625"/>
+          </a:xfrm>
+          <a:prstGeom xmlns:a="http://schemas.openxmlformats.org/drawingml/2006/main" prst="rect">
+            <a:avLst/>
+          </a:prstGeom>
+          <a:noFill xmlns:a="http://schemas.openxmlformats.org/drawingml/2006/main"/>
+          <a:ln xmlns:a="http://schemas.openxmlformats.org/drawingml/2006/main" w="0">
+            <a:noFill/>
+          </a:ln>
+        </p:spPr>
+        <p:txBody>
+          <a:bodyPr xmlns:a="http://schemas.openxmlformats.org/drawingml/2006/main" wrap="square" lIns="0" tIns="0" rIns="0" bIns="0" anchor="t">
+            <a:noAutofit/>
+          </a:bodyPr>
+          <a:lstStyle xmlns:a="http://schemas.openxmlformats.org/drawingml/2006/main"/>
+          <a:p xmlns:a="http://schemas.openxmlformats.org/drawingml/2006/main">
+            <a:pPr algn="l">
+              <a:defRPr sz="2025" b="1">
+                <a:solidFill>
+                  <a:srgbClr val="142B3F"/>
+                </a:solidFill>
+                <a:latin typeface="Arial"/>
+                <a:ea typeface="Arial"/>
+                <a:cs typeface="Arial"/>
+              </a:defRPr>
+            </a:pPr>
+            <a:r>
+              <a:rPr sz="2025" b="1">
+                <a:solidFill>
+                  <a:srgbClr val="142B3F"/>
+                </a:solidFill>
+                <a:latin typeface="Arial"/>
+                <a:ea typeface="Arial"/>
+                <a:cs typeface="Arial"/>
+              </a:rPr>
+              <a:t>Pinned buffers + non-default stream: ordered work per image</a:t>
+            </a:r>
+          </a:p>
+        </p:txBody>
+      </p:sp>
+      <p:sp>
+        <p:nvSpPr>
+          <p:cNvPr id="8" name="text-481">
+            <a:extLst xmlns:a="http://schemas.openxmlformats.org/drawingml/2006/main">
+              <a:ext uri="{FF2B5EF4-FFF2-40B4-BE49-F238E27FC236}">
+                <a16:creationId xmlns:a16="http://schemas.microsoft.com/office/drawing/2014/main" id="{7D46EE37-1B69-4AF4-B10F-E982D6E86A26}"/>
+              </a:ext>
+            </a:extLst>
+          </p:cNvPr>
+          <p:cNvSpPr>
+            <a:spLocks xmlns:a="http://schemas.openxmlformats.org/drawingml/2006/main" noGrp="1"/>
+          </p:cNvSpPr>
+          <p:nvPr/>
+        </p:nvSpPr>
+        <p:spPr>
+          <a:xfrm xmlns:a="http://schemas.openxmlformats.org/drawingml/2006/main">
+            <a:off x="571500" y="3981450"/>
+            <a:ext cx="10953750" cy="1276350"/>
+          </a:xfrm>
+          <a:prstGeom xmlns:a="http://schemas.openxmlformats.org/drawingml/2006/main" prst="rect">
+            <a:avLst/>
+          </a:prstGeom>
+          <a:noFill xmlns:a="http://schemas.openxmlformats.org/drawingml/2006/main"/>
+          <a:ln xmlns:a="http://schemas.openxmlformats.org/drawingml/2006/main" w="0">
+            <a:noFill/>
+          </a:ln>
+        </p:spPr>
+        <p:txBody>
+          <a:bodyPr xmlns:a="http://schemas.openxmlformats.org/drawingml/2006/main" wrap="square" lIns="0" tIns="0" rIns="0" bIns="0" anchor="t">
+            <a:noAutofit/>
+          </a:bodyPr>
+          <a:lstStyle xmlns:a="http://schemas.openxmlformats.org/drawingml/2006/main"/>
+          <a:p xmlns:a="http://schemas.openxmlformats.org/drawingml/2006/main">
+            <a:pPr algn="l">
+              <a:defRPr sz="1875" b="0">
+                <a:solidFill>
+                  <a:srgbClr val="142B3F"/>
+                </a:solidFill>
+                <a:latin typeface="Consolas"/>
+                <a:ea typeface="Consolas"/>
+                <a:cs typeface="Consolas"/>
+              </a:defRPr>
+            </a:pPr>
+            <a:r>
+              <a:rPr sz="1875" b="0">
+                <a:solidFill>
+                  <a:srgbClr val="142B3F"/>
+                </a:solidFill>
+                <a:latin typeface="Consolas"/>
+                <a:ea typeface="Consolas"/>
+                <a:cs typeface="Consolas"/>
+              </a:rPr>
+              <a:t>cudaMemcpyAsync(d_in, h_in, bytes, H2D, stream);</a:t>
+            </a:r>
+          </a:p>
+          <a:p xmlns:a="http://schemas.openxmlformats.org/drawingml/2006/main">
+            <a:pPr algn="l">
+              <a:defRPr sz="1875" b="0">
+                <a:solidFill>
+                  <a:srgbClr val="142B3F"/>
+                </a:solidFill>
+                <a:latin typeface="Consolas"/>
+                <a:ea typeface="Consolas"/>
+                <a:cs typeface="Consolas"/>
+              </a:defRPr>
+            </a:pPr>
+            <a:r>
+              <a:rPr sz="1875" b="0">
+                <a:solidFill>
+                  <a:srgbClr val="142B3F"/>
+                </a:solidFill>
+                <a:latin typeface="Consolas"/>
+                <a:ea typeface="Consolas"/>
+                <a:cs typeface="Consolas"/>
+              </a:rPr>
+              <a:t>rotate_rgb&lt;&lt;&lt;grid, blockB, 0, stream&gt;&gt;&gt;(...);</a:t>
+            </a:r>
+          </a:p>
+          <a:p xmlns:a="http://schemas.openxmlformats.org/drawingml/2006/main">
+            <a:pPr algn="l">
+              <a:defRPr sz="1875" b="0">
+                <a:solidFill>
+                  <a:srgbClr val="142B3F"/>
+                </a:solidFill>
+                <a:latin typeface="Consolas"/>
+                <a:ea typeface="Consolas"/>
+                <a:cs typeface="Consolas"/>
+              </a:defRPr>
+            </a:pPr>
+            <a:r>
+              <a:rPr sz="1875" b="0">
+                <a:solidFill>
+                  <a:srgbClr val="142B3F"/>
+                </a:solidFill>
+                <a:latin typeface="Consolas"/>
+                <a:ea typeface="Consolas"/>
+                <a:cs typeface="Consolas"/>
+              </a:rPr>
+              <a:t>cudaMemcpyAsync(h_out, d_out, bytes, D2H, stream);</a:t>
+            </a:r>
+          </a:p>
+        </p:txBody>
+      </p:sp>
+      <p:sp>
+        <p:nvSpPr>
+          <p:cNvPr id="9" name="text-482">
+            <a:extLst xmlns:a="http://schemas.openxmlformats.org/drawingml/2006/main">
+              <a:ext uri="{FF2B5EF4-FFF2-40B4-BE49-F238E27FC236}">
+                <a16:creationId xmlns:a16="http://schemas.microsoft.com/office/drawing/2014/main" id="{B18EA9B7-437B-4685-8A9A-000FF0A15496}"/>
+              </a:ext>
+            </a:extLst>
+          </p:cNvPr>
+          <p:cNvSpPr>
+            <a:spLocks xmlns:a="http://schemas.openxmlformats.org/drawingml/2006/main" noGrp="1"/>
+          </p:cNvSpPr>
+          <p:nvPr/>
+        </p:nvSpPr>
+        <p:spPr>
+          <a:xfrm xmlns:a="http://schemas.openxmlformats.org/drawingml/2006/main">
+            <a:off x="571500" y="5495925"/>
+            <a:ext cx="10953750" cy="666750"/>
+          </a:xfrm>
+          <a:prstGeom xmlns:a="http://schemas.openxmlformats.org/drawingml/2006/main" prst="rect">
+            <a:avLst/>
+          </a:prstGeom>
+          <a:noFill xmlns:a="http://schemas.openxmlformats.org/drawingml/2006/main"/>
+          <a:ln xmlns:a="http://schemas.openxmlformats.org/drawingml/2006/main" w="0">
+            <a:noFill/>
+          </a:ln>
+        </p:spPr>
+        <p:txBody>
+          <a:bodyPr xmlns:a="http://schemas.openxmlformats.org/drawingml/2006/main" wrap="square" lIns="0" tIns="0" rIns="0" bIns="0" anchor="t">
+            <a:noAutofit/>
+          </a:bodyPr>
+          <a:lstStyle xmlns:a="http://schemas.openxmlformats.org/drawingml/2006/main"/>
+          <a:p xmlns:a="http://schemas.openxmlformats.org/drawingml/2006/main">
+            <a:pPr algn="l">
+              <a:defRPr sz="1950" b="0">
+                <a:solidFill>
+                  <a:srgbClr val="087E8B"/>
+                </a:solidFill>
+                <a:latin typeface="Arial"/>
+                <a:ea typeface="Arial"/>
+                <a:cs typeface="Arial"/>
+              </a:defRPr>
+            </a:pPr>
+            <a:r>
+              <a:rPr sz="1950" b="0">
+                <a:solidFill>
+                  <a:srgbClr val="087E8B"/>
+                </a:solidFill>
+                <a:latin typeface="Arial"/>
+                <a:ea typeface="Arial"/>
+                <a:cs typeface="Arial"/>
+              </a:rPr>
+              <a:t>Independent images may overlap. Hardware, buffers and dependencies matter.</a:t>
+            </a:r>
+          </a:p>
+        </p:txBody>
+      </p:sp>
+    </p:spTree>
+    <p:extLst>
+      <p:ext uri="{BB962C8B-B14F-4D97-AF65-F5344CB8AC3E}">
+        <p14:creationId xmlns:p14="http://schemas.microsoft.com/office/powerpoint/2010/main" val="902871285"/>
       </p:ext>
     </p:extLst>
   </p:cSld>
@@ -3709,7 +4391,7 @@
           <p:cNvPr id="64" name="text-17">
             <a:extLst xmlns:a="http://schemas.openxmlformats.org/drawingml/2006/main">
               <a:ext uri="{FF2B5EF4-FFF2-40B4-BE49-F238E27FC236}">
-                <a16:creationId xmlns:a16="http://schemas.microsoft.com/office/drawing/2014/main" id="{14CA0A67-3666-452C-90ED-992715E5B4D0}"/>
+                <a16:creationId xmlns:a16="http://schemas.microsoft.com/office/drawing/2014/main" id="{E8667DD1-B305-4619-8466-4F93EA7FBFBE}"/>
               </a:ext>
             </a:extLst>
           </p:cNvPr>
@@ -3766,7 +4448,7 @@
           <p:cNvPr id="2" name="text-18">
             <a:extLst xmlns:a="http://schemas.openxmlformats.org/drawingml/2006/main">
               <a:ext uri="{FF2B5EF4-FFF2-40B4-BE49-F238E27FC236}">
-                <a16:creationId xmlns:a16="http://schemas.microsoft.com/office/drawing/2014/main" id="{AF4A8F57-1F9A-4519-A698-60D697D911B5}"/>
+                <a16:creationId xmlns:a16="http://schemas.microsoft.com/office/drawing/2014/main" id="{DF05E86F-BFF2-490F-A468-71B3327F2D75}"/>
               </a:ext>
             </a:extLst>
           </p:cNvPr>
@@ -3823,7 +4505,7 @@
           <p:cNvPr id="3" name="text-19">
             <a:extLst xmlns:a="http://schemas.openxmlformats.org/drawingml/2006/main">
               <a:ext uri="{FF2B5EF4-FFF2-40B4-BE49-F238E27FC236}">
-                <a16:creationId xmlns:a16="http://schemas.microsoft.com/office/drawing/2014/main" id="{E4AD47D9-E1C4-47B4-BB82-A59CE05F1D14}"/>
+                <a16:creationId xmlns:a16="http://schemas.microsoft.com/office/drawing/2014/main" id="{D7148F0B-C9CA-4BB6-8FCE-3EBEFD19283D}"/>
               </a:ext>
             </a:extLst>
           </p:cNvPr>
@@ -3880,7 +4562,7 @@
           <p:cNvPr id="4" name="text-20">
             <a:extLst xmlns:a="http://schemas.openxmlformats.org/drawingml/2006/main">
               <a:ext uri="{FF2B5EF4-FFF2-40B4-BE49-F238E27FC236}">
-                <a16:creationId xmlns:a16="http://schemas.microsoft.com/office/drawing/2014/main" id="{ED6D905B-2FFC-4950-8015-DDD3B8F6F1E0}"/>
+                <a16:creationId xmlns:a16="http://schemas.microsoft.com/office/drawing/2014/main" id="{45044C08-B3EE-49F9-8351-D58E114F373F}"/>
               </a:ext>
             </a:extLst>
           </p:cNvPr>
@@ -3937,7 +4619,7 @@
           <p:cNvPr id="5" name="text-21">
             <a:extLst xmlns:a="http://schemas.openxmlformats.org/drawingml/2006/main">
               <a:ext uri="{FF2B5EF4-FFF2-40B4-BE49-F238E27FC236}">
-                <a16:creationId xmlns:a16="http://schemas.microsoft.com/office/drawing/2014/main" id="{6CC196EA-E6FA-4D02-A372-F21378B39481}"/>
+                <a16:creationId xmlns:a16="http://schemas.microsoft.com/office/drawing/2014/main" id="{107166EF-A373-4E06-8911-739FBE1BD6B8}"/>
               </a:ext>
             </a:extLst>
           </p:cNvPr>
@@ -4017,7 +4699,7 @@
           <p:cNvPr id="6" name="text-22">
             <a:extLst xmlns:a="http://schemas.openxmlformats.org/drawingml/2006/main">
               <a:ext uri="{FF2B5EF4-FFF2-40B4-BE49-F238E27FC236}">
-                <a16:creationId xmlns:a16="http://schemas.microsoft.com/office/drawing/2014/main" id="{BEEB3BBF-9A9C-4080-A92E-16C3DF3441CF}"/>
+                <a16:creationId xmlns:a16="http://schemas.microsoft.com/office/drawing/2014/main" id="{A96D9B0F-9D34-4AC5-94FB-CA25AFE503F7}"/>
               </a:ext>
             </a:extLst>
           </p:cNvPr>
@@ -4074,7 +4756,7 @@
           <p:cNvPr id="7" name="text-23">
             <a:extLst xmlns:a="http://schemas.openxmlformats.org/drawingml/2006/main">
               <a:ext uri="{FF2B5EF4-FFF2-40B4-BE49-F238E27FC236}">
-                <a16:creationId xmlns:a16="http://schemas.microsoft.com/office/drawing/2014/main" id="{482F6645-EF70-4632-9D6F-178DBF907EF5}"/>
+                <a16:creationId xmlns:a16="http://schemas.microsoft.com/office/drawing/2014/main" id="{22384B6A-5D6F-4832-92D3-2E1225F48007}"/>
               </a:ext>
             </a:extLst>
           </p:cNvPr>
@@ -4131,7 +4813,7 @@
           <p:cNvPr id="8" name="text-24">
             <a:extLst xmlns:a="http://schemas.openxmlformats.org/drawingml/2006/main">
               <a:ext uri="{FF2B5EF4-FFF2-40B4-BE49-F238E27FC236}">
-                <a16:creationId xmlns:a16="http://schemas.microsoft.com/office/drawing/2014/main" id="{52C8D0FE-7FAC-4359-BB47-7BD117202151}"/>
+                <a16:creationId xmlns:a16="http://schemas.microsoft.com/office/drawing/2014/main" id="{8EF53709-8041-4DF3-9665-E405C0597477}"/>
               </a:ext>
             </a:extLst>
           </p:cNvPr>
@@ -4211,7 +4893,7 @@
           <p:cNvPr id="9" name="text-25">
             <a:extLst xmlns:a="http://schemas.openxmlformats.org/drawingml/2006/main">
               <a:ext uri="{FF2B5EF4-FFF2-40B4-BE49-F238E27FC236}">
-                <a16:creationId xmlns:a16="http://schemas.microsoft.com/office/drawing/2014/main" id="{990A5D61-B0D0-4FE4-BF30-9F9CB063BA53}"/>
+                <a16:creationId xmlns:a16="http://schemas.microsoft.com/office/drawing/2014/main" id="{C69B4A12-9283-4026-A443-FBD1F182AA2C}"/>
               </a:ext>
             </a:extLst>
           </p:cNvPr>
@@ -4268,7 +4950,7 @@
           <p:cNvPr id="10" name="text-26">
             <a:extLst xmlns:a="http://schemas.openxmlformats.org/drawingml/2006/main">
               <a:ext uri="{FF2B5EF4-FFF2-40B4-BE49-F238E27FC236}">
-                <a16:creationId xmlns:a16="http://schemas.microsoft.com/office/drawing/2014/main" id="{13232E73-858E-42D6-AD91-980B2E27EFF0}"/>
+                <a16:creationId xmlns:a16="http://schemas.microsoft.com/office/drawing/2014/main" id="{8AE63DF3-150D-49D0-BD91-D2409D4BB642}"/>
               </a:ext>
             </a:extLst>
           </p:cNvPr>
@@ -4325,7 +5007,7 @@
           <p:cNvPr id="11" name="diagram-27">
             <a:extLst xmlns:a="http://schemas.openxmlformats.org/drawingml/2006/main">
               <a:ext uri="{FF2B5EF4-FFF2-40B4-BE49-F238E27FC236}">
-                <a16:creationId xmlns:a16="http://schemas.microsoft.com/office/drawing/2014/main" id="{1B680798-6C9B-42C9-964A-8EC31E05FA0B}"/>
+                <a16:creationId xmlns:a16="http://schemas.microsoft.com/office/drawing/2014/main" id="{92402422-DE0F-4330-A648-A4BA42B757A0}"/>
               </a:ext>
             </a:extLst>
           </p:cNvPr>
@@ -4357,7 +5039,7 @@
           <p:cNvPr id="12" name="diagram-28">
             <a:extLst xmlns:a="http://schemas.openxmlformats.org/drawingml/2006/main">
               <a:ext uri="{FF2B5EF4-FFF2-40B4-BE49-F238E27FC236}">
-                <a16:creationId xmlns:a16="http://schemas.microsoft.com/office/drawing/2014/main" id="{9AD68998-6E6D-449E-AA06-3CA0946CDC08}"/>
+                <a16:creationId xmlns:a16="http://schemas.microsoft.com/office/drawing/2014/main" id="{11260637-D079-42EB-801E-356327036FFB}"/>
               </a:ext>
             </a:extLst>
           </p:cNvPr>
@@ -4389,7 +5071,7 @@
           <p:cNvPr id="13" name="diagram-29">
             <a:extLst xmlns:a="http://schemas.openxmlformats.org/drawingml/2006/main">
               <a:ext uri="{FF2B5EF4-FFF2-40B4-BE49-F238E27FC236}">
-                <a16:creationId xmlns:a16="http://schemas.microsoft.com/office/drawing/2014/main" id="{484ED3AC-00A5-454C-B34F-4347CAB1F8E5}"/>
+                <a16:creationId xmlns:a16="http://schemas.microsoft.com/office/drawing/2014/main" id="{01B26FB3-2094-497D-9896-06A32A9A88C6}"/>
               </a:ext>
             </a:extLst>
           </p:cNvPr>
@@ -4421,7 +5103,7 @@
           <p:cNvPr id="14" name="diagram-30">
             <a:extLst xmlns:a="http://schemas.openxmlformats.org/drawingml/2006/main">
               <a:ext uri="{FF2B5EF4-FFF2-40B4-BE49-F238E27FC236}">
-                <a16:creationId xmlns:a16="http://schemas.microsoft.com/office/drawing/2014/main" id="{015F4AC8-D11A-4B03-A4CE-61E8519CCE82}"/>
+                <a16:creationId xmlns:a16="http://schemas.microsoft.com/office/drawing/2014/main" id="{FEE2D77F-AC6E-4276-A343-A5E203BAC10F}"/>
               </a:ext>
             </a:extLst>
           </p:cNvPr>
@@ -4453,7 +5135,7 @@
           <p:cNvPr id="15" name="diagram-31">
             <a:extLst xmlns:a="http://schemas.openxmlformats.org/drawingml/2006/main">
               <a:ext uri="{FF2B5EF4-FFF2-40B4-BE49-F238E27FC236}">
-                <a16:creationId xmlns:a16="http://schemas.microsoft.com/office/drawing/2014/main" id="{6A68464A-D26E-4A51-B3DB-0B88B91808D9}"/>
+                <a16:creationId xmlns:a16="http://schemas.microsoft.com/office/drawing/2014/main" id="{8621805D-32B9-4CA7-9195-824BC4E1FD52}"/>
               </a:ext>
             </a:extLst>
           </p:cNvPr>
@@ -4485,7 +5167,7 @@
           <p:cNvPr id="16" name="diagram-32">
             <a:extLst xmlns:a="http://schemas.openxmlformats.org/drawingml/2006/main">
               <a:ext uri="{FF2B5EF4-FFF2-40B4-BE49-F238E27FC236}">
-                <a16:creationId xmlns:a16="http://schemas.microsoft.com/office/drawing/2014/main" id="{C020F307-5D1D-46C1-8973-463F6D11CCB2}"/>
+                <a16:creationId xmlns:a16="http://schemas.microsoft.com/office/drawing/2014/main" id="{FE4307E6-451B-4718-81CB-CED8ADF3A043}"/>
               </a:ext>
             </a:extLst>
           </p:cNvPr>
@@ -4517,7 +5199,7 @@
           <p:cNvPr id="17" name="diagram-33">
             <a:extLst xmlns:a="http://schemas.openxmlformats.org/drawingml/2006/main">
               <a:ext uri="{FF2B5EF4-FFF2-40B4-BE49-F238E27FC236}">
-                <a16:creationId xmlns:a16="http://schemas.microsoft.com/office/drawing/2014/main" id="{5C2EB877-D303-4D42-B198-1B1B53A874FD}"/>
+                <a16:creationId xmlns:a16="http://schemas.microsoft.com/office/drawing/2014/main" id="{914E92C4-D6A0-4087-B11A-724BD324206E}"/>
               </a:ext>
             </a:extLst>
           </p:cNvPr>
@@ -4549,7 +5231,7 @@
           <p:cNvPr id="18" name="diagram-34">
             <a:extLst xmlns:a="http://schemas.openxmlformats.org/drawingml/2006/main">
               <a:ext uri="{FF2B5EF4-FFF2-40B4-BE49-F238E27FC236}">
-                <a16:creationId xmlns:a16="http://schemas.microsoft.com/office/drawing/2014/main" id="{7E90C15C-2098-48E4-BBBE-759731BEBD79}"/>
+                <a16:creationId xmlns:a16="http://schemas.microsoft.com/office/drawing/2014/main" id="{1B672432-6815-45E8-8297-445AE4CF2891}"/>
               </a:ext>
             </a:extLst>
           </p:cNvPr>
@@ -4581,7 +5263,7 @@
           <p:cNvPr id="19" name="diagram-35">
             <a:extLst xmlns:a="http://schemas.openxmlformats.org/drawingml/2006/main">
               <a:ext uri="{FF2B5EF4-FFF2-40B4-BE49-F238E27FC236}">
-                <a16:creationId xmlns:a16="http://schemas.microsoft.com/office/drawing/2014/main" id="{6282C1B6-CB57-43CF-AD91-001FA105533D}"/>
+                <a16:creationId xmlns:a16="http://schemas.microsoft.com/office/drawing/2014/main" id="{91D71F92-997B-49CE-B955-724646057178}"/>
               </a:ext>
             </a:extLst>
           </p:cNvPr>
@@ -4613,7 +5295,7 @@
           <p:cNvPr id="20" name="diagram-36">
             <a:extLst xmlns:a="http://schemas.openxmlformats.org/drawingml/2006/main">
               <a:ext uri="{FF2B5EF4-FFF2-40B4-BE49-F238E27FC236}">
-                <a16:creationId xmlns:a16="http://schemas.microsoft.com/office/drawing/2014/main" id="{B3BB5753-401B-455D-B6C8-0554A485DB90}"/>
+                <a16:creationId xmlns:a16="http://schemas.microsoft.com/office/drawing/2014/main" id="{A4EFEFB3-1F6B-45B0-A896-B1CD4813D0CE}"/>
               </a:ext>
             </a:extLst>
           </p:cNvPr>
@@ -4645,7 +5327,7 @@
           <p:cNvPr id="21" name="diagram-37">
             <a:extLst xmlns:a="http://schemas.openxmlformats.org/drawingml/2006/main">
               <a:ext uri="{FF2B5EF4-FFF2-40B4-BE49-F238E27FC236}">
-                <a16:creationId xmlns:a16="http://schemas.microsoft.com/office/drawing/2014/main" id="{90C707BB-5F58-46B0-9160-826FC3086D6E}"/>
+                <a16:creationId xmlns:a16="http://schemas.microsoft.com/office/drawing/2014/main" id="{9DBBAEBC-5D25-48EF-BF90-D97354D9CC2E}"/>
               </a:ext>
             </a:extLst>
           </p:cNvPr>
@@ -4677,7 +5359,7 @@
           <p:cNvPr id="22" name="diagram-38">
             <a:extLst xmlns:a="http://schemas.openxmlformats.org/drawingml/2006/main">
               <a:ext uri="{FF2B5EF4-FFF2-40B4-BE49-F238E27FC236}">
-                <a16:creationId xmlns:a16="http://schemas.microsoft.com/office/drawing/2014/main" id="{37A6012F-B06A-42FF-9118-C916601F6A09}"/>
+                <a16:creationId xmlns:a16="http://schemas.microsoft.com/office/drawing/2014/main" id="{37D555DE-AEF1-4076-808F-007DF9C25663}"/>
               </a:ext>
             </a:extLst>
           </p:cNvPr>
@@ -4709,7 +5391,7 @@
           <p:cNvPr id="23" name="diagram-39">
             <a:extLst xmlns:a="http://schemas.openxmlformats.org/drawingml/2006/main">
               <a:ext uri="{FF2B5EF4-FFF2-40B4-BE49-F238E27FC236}">
-                <a16:creationId xmlns:a16="http://schemas.microsoft.com/office/drawing/2014/main" id="{FA352146-985E-44B9-A398-8CEDDE071716}"/>
+                <a16:creationId xmlns:a16="http://schemas.microsoft.com/office/drawing/2014/main" id="{DBA2BE89-1BB9-4B49-9806-F9791D922D8E}"/>
               </a:ext>
             </a:extLst>
           </p:cNvPr>
@@ -4741,7 +5423,7 @@
           <p:cNvPr id="24" name="diagram-40">
             <a:extLst xmlns:a="http://schemas.openxmlformats.org/drawingml/2006/main">
               <a:ext uri="{FF2B5EF4-FFF2-40B4-BE49-F238E27FC236}">
-                <a16:creationId xmlns:a16="http://schemas.microsoft.com/office/drawing/2014/main" id="{29605494-7305-4122-B30F-46CDCCD781AC}"/>
+                <a16:creationId xmlns:a16="http://schemas.microsoft.com/office/drawing/2014/main" id="{CE47638A-9E9B-4E2F-B6E1-D3E575D98839}"/>
               </a:ext>
             </a:extLst>
           </p:cNvPr>
@@ -4773,7 +5455,7 @@
           <p:cNvPr id="25" name="diagram-41">
             <a:extLst xmlns:a="http://schemas.openxmlformats.org/drawingml/2006/main">
               <a:ext uri="{FF2B5EF4-FFF2-40B4-BE49-F238E27FC236}">
-                <a16:creationId xmlns:a16="http://schemas.microsoft.com/office/drawing/2014/main" id="{A0B5DBC1-0103-4BAB-AE87-480073ACB4EE}"/>
+                <a16:creationId xmlns:a16="http://schemas.microsoft.com/office/drawing/2014/main" id="{21C7B6D4-BB65-47F4-AE09-2CCF0EE66C23}"/>
               </a:ext>
             </a:extLst>
           </p:cNvPr>
@@ -4805,7 +5487,7 @@
           <p:cNvPr id="26" name="diagram-42">
             <a:extLst xmlns:a="http://schemas.openxmlformats.org/drawingml/2006/main">
               <a:ext uri="{FF2B5EF4-FFF2-40B4-BE49-F238E27FC236}">
-                <a16:creationId xmlns:a16="http://schemas.microsoft.com/office/drawing/2014/main" id="{A6D9965D-DAA6-4EB5-8DEE-EA8549BF994A}"/>
+                <a16:creationId xmlns:a16="http://schemas.microsoft.com/office/drawing/2014/main" id="{BAEB39F8-294A-4FA1-9119-F2C622E19340}"/>
               </a:ext>
             </a:extLst>
           </p:cNvPr>
@@ -4837,7 +5519,7 @@
           <p:cNvPr id="27" name="diagram-43">
             <a:extLst xmlns:a="http://schemas.openxmlformats.org/drawingml/2006/main">
               <a:ext uri="{FF2B5EF4-FFF2-40B4-BE49-F238E27FC236}">
-                <a16:creationId xmlns:a16="http://schemas.microsoft.com/office/drawing/2014/main" id="{4C2B4CE3-5A2F-43D9-8F67-5948D1415FA3}"/>
+                <a16:creationId xmlns:a16="http://schemas.microsoft.com/office/drawing/2014/main" id="{DC0749E3-E905-44C0-9FA0-464D0E43C25A}"/>
               </a:ext>
             </a:extLst>
           </p:cNvPr>
@@ -4869,7 +5551,7 @@
           <p:cNvPr id="28" name="diagram-44">
             <a:extLst xmlns:a="http://schemas.openxmlformats.org/drawingml/2006/main">
               <a:ext uri="{FF2B5EF4-FFF2-40B4-BE49-F238E27FC236}">
-                <a16:creationId xmlns:a16="http://schemas.microsoft.com/office/drawing/2014/main" id="{ED1065A5-6B07-414B-9EFE-28274F57EB16}"/>
+                <a16:creationId xmlns:a16="http://schemas.microsoft.com/office/drawing/2014/main" id="{2F41CCAF-2CE1-49A8-BD68-9B9B2F6B6900}"/>
               </a:ext>
             </a:extLst>
           </p:cNvPr>
@@ -4901,7 +5583,7 @@
           <p:cNvPr id="29" name="diagram-45">
             <a:extLst xmlns:a="http://schemas.openxmlformats.org/drawingml/2006/main">
               <a:ext uri="{FF2B5EF4-FFF2-40B4-BE49-F238E27FC236}">
-                <a16:creationId xmlns:a16="http://schemas.microsoft.com/office/drawing/2014/main" id="{F6CBD09D-B836-4576-AC70-661C89981FAF}"/>
+                <a16:creationId xmlns:a16="http://schemas.microsoft.com/office/drawing/2014/main" id="{B4D94611-7DB5-407E-9A97-8CC52E493411}"/>
               </a:ext>
             </a:extLst>
           </p:cNvPr>
@@ -4933,7 +5615,7 @@
           <p:cNvPr id="30" name="diagram-46">
             <a:extLst xmlns:a="http://schemas.openxmlformats.org/drawingml/2006/main">
               <a:ext uri="{FF2B5EF4-FFF2-40B4-BE49-F238E27FC236}">
-                <a16:creationId xmlns:a16="http://schemas.microsoft.com/office/drawing/2014/main" id="{8A172EA8-BE3B-4813-985C-EF0014894369}"/>
+                <a16:creationId xmlns:a16="http://schemas.microsoft.com/office/drawing/2014/main" id="{ABF38801-AC9D-4A78-80FD-1CABB89CB578}"/>
               </a:ext>
             </a:extLst>
           </p:cNvPr>
@@ -4965,7 +5647,7 @@
           <p:cNvPr id="31" name="diagram-47">
             <a:extLst xmlns:a="http://schemas.openxmlformats.org/drawingml/2006/main">
               <a:ext uri="{FF2B5EF4-FFF2-40B4-BE49-F238E27FC236}">
-                <a16:creationId xmlns:a16="http://schemas.microsoft.com/office/drawing/2014/main" id="{93BFB6E0-4333-44EA-AE07-AAE38C291C45}"/>
+                <a16:creationId xmlns:a16="http://schemas.microsoft.com/office/drawing/2014/main" id="{706BAB7B-47FF-49A9-9CAB-1DE0020C24DE}"/>
               </a:ext>
             </a:extLst>
           </p:cNvPr>
@@ -4997,7 +5679,7 @@
           <p:cNvPr id="32" name="diagram-48">
             <a:extLst xmlns:a="http://schemas.openxmlformats.org/drawingml/2006/main">
               <a:ext uri="{FF2B5EF4-FFF2-40B4-BE49-F238E27FC236}">
-                <a16:creationId xmlns:a16="http://schemas.microsoft.com/office/drawing/2014/main" id="{D2EB64F8-ACD2-4C07-B51D-2AB10C5063D9}"/>
+                <a16:creationId xmlns:a16="http://schemas.microsoft.com/office/drawing/2014/main" id="{02EB8DAF-AA98-4A49-9D1C-871A2BAAD271}"/>
               </a:ext>
             </a:extLst>
           </p:cNvPr>
@@ -5029,7 +5711,7 @@
           <p:cNvPr id="33" name="diagram-49">
             <a:extLst xmlns:a="http://schemas.openxmlformats.org/drawingml/2006/main">
               <a:ext uri="{FF2B5EF4-FFF2-40B4-BE49-F238E27FC236}">
-                <a16:creationId xmlns:a16="http://schemas.microsoft.com/office/drawing/2014/main" id="{F5990E57-C8EF-499C-946A-5B65494566D7}"/>
+                <a16:creationId xmlns:a16="http://schemas.microsoft.com/office/drawing/2014/main" id="{9AED4D80-B1F7-4225-9F66-7FCDB80F9956}"/>
               </a:ext>
             </a:extLst>
           </p:cNvPr>
@@ -5061,7 +5743,7 @@
           <p:cNvPr id="34" name="diagram-50">
             <a:extLst xmlns:a="http://schemas.openxmlformats.org/drawingml/2006/main">
               <a:ext uri="{FF2B5EF4-FFF2-40B4-BE49-F238E27FC236}">
-                <a16:creationId xmlns:a16="http://schemas.microsoft.com/office/drawing/2014/main" id="{49400B1F-526D-4251-A4BB-EF6FE18CCE14}"/>
+                <a16:creationId xmlns:a16="http://schemas.microsoft.com/office/drawing/2014/main" id="{6248FA94-7A25-4C2B-AFBB-E4F8FBA2BDB2}"/>
               </a:ext>
             </a:extLst>
           </p:cNvPr>
@@ -5093,7 +5775,7 @@
           <p:cNvPr id="35" name="diagram-51">
             <a:extLst xmlns:a="http://schemas.openxmlformats.org/drawingml/2006/main">
               <a:ext uri="{FF2B5EF4-FFF2-40B4-BE49-F238E27FC236}">
-                <a16:creationId xmlns:a16="http://schemas.microsoft.com/office/drawing/2014/main" id="{EBF1E7D7-7C05-4623-A37B-EBA17FA72994}"/>
+                <a16:creationId xmlns:a16="http://schemas.microsoft.com/office/drawing/2014/main" id="{F5AA583F-9447-4DC9-B7C5-78E16EEA689A}"/>
               </a:ext>
             </a:extLst>
           </p:cNvPr>
@@ -5125,7 +5807,7 @@
           <p:cNvPr id="36" name="diagram-52">
             <a:extLst xmlns:a="http://schemas.openxmlformats.org/drawingml/2006/main">
               <a:ext uri="{FF2B5EF4-FFF2-40B4-BE49-F238E27FC236}">
-                <a16:creationId xmlns:a16="http://schemas.microsoft.com/office/drawing/2014/main" id="{E8DBBA2B-C287-4737-A88C-70AD379888FC}"/>
+                <a16:creationId xmlns:a16="http://schemas.microsoft.com/office/drawing/2014/main" id="{E5260456-0A32-412D-8188-A915FEAA5FBB}"/>
               </a:ext>
             </a:extLst>
           </p:cNvPr>
@@ -5157,7 +5839,7 @@
           <p:cNvPr id="37" name="diagram-53">
             <a:extLst xmlns:a="http://schemas.openxmlformats.org/drawingml/2006/main">
               <a:ext uri="{FF2B5EF4-FFF2-40B4-BE49-F238E27FC236}">
-                <a16:creationId xmlns:a16="http://schemas.microsoft.com/office/drawing/2014/main" id="{80105A92-6A29-400D-A617-27463E5341BB}"/>
+                <a16:creationId xmlns:a16="http://schemas.microsoft.com/office/drawing/2014/main" id="{5CE7D506-0FD7-47AD-81D0-6B5DEDEF535E}"/>
               </a:ext>
             </a:extLst>
           </p:cNvPr>
@@ -5189,7 +5871,7 @@
           <p:cNvPr id="38" name="diagram-54">
             <a:extLst xmlns:a="http://schemas.openxmlformats.org/drawingml/2006/main">
               <a:ext uri="{FF2B5EF4-FFF2-40B4-BE49-F238E27FC236}">
-                <a16:creationId xmlns:a16="http://schemas.microsoft.com/office/drawing/2014/main" id="{4F48FADD-39FF-4A0A-8819-D72414D13857}"/>
+                <a16:creationId xmlns:a16="http://schemas.microsoft.com/office/drawing/2014/main" id="{FEB849C7-6CD7-4CD8-9FED-4EB6721A5579}"/>
               </a:ext>
             </a:extLst>
           </p:cNvPr>
@@ -5221,7 +5903,7 @@
           <p:cNvPr id="39" name="diagram-55">
             <a:extLst xmlns:a="http://schemas.openxmlformats.org/drawingml/2006/main">
               <a:ext uri="{FF2B5EF4-FFF2-40B4-BE49-F238E27FC236}">
-                <a16:creationId xmlns:a16="http://schemas.microsoft.com/office/drawing/2014/main" id="{2A8B00FF-F520-4620-9F78-53BF61867641}"/>
+                <a16:creationId xmlns:a16="http://schemas.microsoft.com/office/drawing/2014/main" id="{AA002A25-3459-4F64-94EC-2703F3713DD3}"/>
               </a:ext>
             </a:extLst>
           </p:cNvPr>
@@ -5253,7 +5935,7 @@
           <p:cNvPr id="40" name="diagram-56">
             <a:extLst xmlns:a="http://schemas.openxmlformats.org/drawingml/2006/main">
               <a:ext uri="{FF2B5EF4-FFF2-40B4-BE49-F238E27FC236}">
-                <a16:creationId xmlns:a16="http://schemas.microsoft.com/office/drawing/2014/main" id="{CB1DC41A-CB37-43E4-BF89-951C1D718C10}"/>
+                <a16:creationId xmlns:a16="http://schemas.microsoft.com/office/drawing/2014/main" id="{0036B6B2-CE16-46FA-998B-CDB5B11EB0E2}"/>
               </a:ext>
             </a:extLst>
           </p:cNvPr>
@@ -5285,7 +5967,7 @@
           <p:cNvPr id="41" name="diagram-57">
             <a:extLst xmlns:a="http://schemas.openxmlformats.org/drawingml/2006/main">
               <a:ext uri="{FF2B5EF4-FFF2-40B4-BE49-F238E27FC236}">
-                <a16:creationId xmlns:a16="http://schemas.microsoft.com/office/drawing/2014/main" id="{DF8346D2-04B1-45AB-BD22-8B3572A3022D}"/>
+                <a16:creationId xmlns:a16="http://schemas.microsoft.com/office/drawing/2014/main" id="{2183B446-4CC5-43AF-A04B-2D82A9B3BC53}"/>
               </a:ext>
             </a:extLst>
           </p:cNvPr>
@@ -5317,7 +5999,7 @@
           <p:cNvPr id="42" name="diagram-58">
             <a:extLst xmlns:a="http://schemas.openxmlformats.org/drawingml/2006/main">
               <a:ext uri="{FF2B5EF4-FFF2-40B4-BE49-F238E27FC236}">
-                <a16:creationId xmlns:a16="http://schemas.microsoft.com/office/drawing/2014/main" id="{92DAB821-3FC8-4A91-BEC4-4E0D538F8BCA}"/>
+                <a16:creationId xmlns:a16="http://schemas.microsoft.com/office/drawing/2014/main" id="{77344C2F-2C70-4806-9724-34A2E502DFCF}"/>
               </a:ext>
             </a:extLst>
           </p:cNvPr>
@@ -5349,7 +6031,7 @@
           <p:cNvPr id="43" name="diagram-59">
             <a:extLst xmlns:a="http://schemas.openxmlformats.org/drawingml/2006/main">
               <a:ext uri="{FF2B5EF4-FFF2-40B4-BE49-F238E27FC236}">
-                <a16:creationId xmlns:a16="http://schemas.microsoft.com/office/drawing/2014/main" id="{6145EEF5-4790-4F86-BCBF-8094C6819067}"/>
+                <a16:creationId xmlns:a16="http://schemas.microsoft.com/office/drawing/2014/main" id="{426F2CBB-03CF-458C-B2D8-A0B1E3EE31DF}"/>
               </a:ext>
             </a:extLst>
           </p:cNvPr>
@@ -5381,7 +6063,7 @@
           <p:cNvPr id="44" name="diagram-60">
             <a:extLst xmlns:a="http://schemas.openxmlformats.org/drawingml/2006/main">
               <a:ext uri="{FF2B5EF4-FFF2-40B4-BE49-F238E27FC236}">
-                <a16:creationId xmlns:a16="http://schemas.microsoft.com/office/drawing/2014/main" id="{F9ED0869-9A04-47AC-9395-F2206EB05C76}"/>
+                <a16:creationId xmlns:a16="http://schemas.microsoft.com/office/drawing/2014/main" id="{481B52DB-8C6A-44D5-AE04-3AAEC36CA2C0}"/>
               </a:ext>
             </a:extLst>
           </p:cNvPr>
@@ -5413,7 +6095,7 @@
           <p:cNvPr id="45" name="diagram-61">
             <a:extLst xmlns:a="http://schemas.openxmlformats.org/drawingml/2006/main">
               <a:ext uri="{FF2B5EF4-FFF2-40B4-BE49-F238E27FC236}">
-                <a16:creationId xmlns:a16="http://schemas.microsoft.com/office/drawing/2014/main" id="{CE4C5DA9-022E-4C44-93E5-FA6A0BB8BC7E}"/>
+                <a16:creationId xmlns:a16="http://schemas.microsoft.com/office/drawing/2014/main" id="{A50F1563-4E5D-4F67-80D7-B0FB25BC90C0}"/>
               </a:ext>
             </a:extLst>
           </p:cNvPr>
@@ -5445,7 +6127,7 @@
           <p:cNvPr id="46" name="diagram-62">
             <a:extLst xmlns:a="http://schemas.openxmlformats.org/drawingml/2006/main">
               <a:ext uri="{FF2B5EF4-FFF2-40B4-BE49-F238E27FC236}">
-                <a16:creationId xmlns:a16="http://schemas.microsoft.com/office/drawing/2014/main" id="{35CD91E4-66EC-469E-8FC4-1ECF04F164CE}"/>
+                <a16:creationId xmlns:a16="http://schemas.microsoft.com/office/drawing/2014/main" id="{2DF0E320-A7DF-4F8B-9C3B-7A20CBABAF2C}"/>
               </a:ext>
             </a:extLst>
           </p:cNvPr>
@@ -5477,7 +6159,7 @@
           <p:cNvPr id="47" name="diagram-63">
             <a:extLst xmlns:a="http://schemas.openxmlformats.org/drawingml/2006/main">
               <a:ext uri="{FF2B5EF4-FFF2-40B4-BE49-F238E27FC236}">
-                <a16:creationId xmlns:a16="http://schemas.microsoft.com/office/drawing/2014/main" id="{8BC0302D-0EB5-4196-8163-B7906F989D52}"/>
+                <a16:creationId xmlns:a16="http://schemas.microsoft.com/office/drawing/2014/main" id="{0BE8CB26-7254-495E-89A3-0065B7287915}"/>
               </a:ext>
             </a:extLst>
           </p:cNvPr>
@@ -5509,7 +6191,7 @@
           <p:cNvPr id="48" name="diagram-64">
             <a:extLst xmlns:a="http://schemas.openxmlformats.org/drawingml/2006/main">
               <a:ext uri="{FF2B5EF4-FFF2-40B4-BE49-F238E27FC236}">
-                <a16:creationId xmlns:a16="http://schemas.microsoft.com/office/drawing/2014/main" id="{34BBFDC4-395B-4DE2-B280-7EB04DB1408C}"/>
+                <a16:creationId xmlns:a16="http://schemas.microsoft.com/office/drawing/2014/main" id="{FDAC6399-253E-4417-9574-4D3A3AEBFC1D}"/>
               </a:ext>
             </a:extLst>
           </p:cNvPr>
@@ -5541,7 +6223,7 @@
           <p:cNvPr id="49" name="diagram-65">
             <a:extLst xmlns:a="http://schemas.openxmlformats.org/drawingml/2006/main">
               <a:ext uri="{FF2B5EF4-FFF2-40B4-BE49-F238E27FC236}">
-                <a16:creationId xmlns:a16="http://schemas.microsoft.com/office/drawing/2014/main" id="{B7E913A1-1ECF-4833-B183-C7588E3A9959}"/>
+                <a16:creationId xmlns:a16="http://schemas.microsoft.com/office/drawing/2014/main" id="{1B7CD15E-CBD6-427E-A83F-C6FA3E84C00B}"/>
               </a:ext>
             </a:extLst>
           </p:cNvPr>
@@ -5573,7 +6255,7 @@
           <p:cNvPr id="50" name="diagram-66">
             <a:extLst xmlns:a="http://schemas.openxmlformats.org/drawingml/2006/main">
               <a:ext uri="{FF2B5EF4-FFF2-40B4-BE49-F238E27FC236}">
-                <a16:creationId xmlns:a16="http://schemas.microsoft.com/office/drawing/2014/main" id="{D724C093-EF60-42A1-89E4-1914F0468527}"/>
+                <a16:creationId xmlns:a16="http://schemas.microsoft.com/office/drawing/2014/main" id="{AB6B851E-811C-4483-B7BA-CFC6EB32B8D1}"/>
               </a:ext>
             </a:extLst>
           </p:cNvPr>
@@ -5605,7 +6287,7 @@
           <p:cNvPr id="51" name="diagram-67">
             <a:extLst xmlns:a="http://schemas.openxmlformats.org/drawingml/2006/main">
               <a:ext uri="{FF2B5EF4-FFF2-40B4-BE49-F238E27FC236}">
-                <a16:creationId xmlns:a16="http://schemas.microsoft.com/office/drawing/2014/main" id="{10857C2C-A064-4BC3-82CF-D6DC43CAE1EA}"/>
+                <a16:creationId xmlns:a16="http://schemas.microsoft.com/office/drawing/2014/main" id="{7186A3C6-E7F6-45AA-BE2F-6CAF8836497E}"/>
               </a:ext>
             </a:extLst>
           </p:cNvPr>
@@ -5637,7 +6319,7 @@
           <p:cNvPr id="52" name="diagram-68">
             <a:extLst xmlns:a="http://schemas.openxmlformats.org/drawingml/2006/main">
               <a:ext uri="{FF2B5EF4-FFF2-40B4-BE49-F238E27FC236}">
-                <a16:creationId xmlns:a16="http://schemas.microsoft.com/office/drawing/2014/main" id="{0B344CC3-48CD-4ED3-8F32-3789192BB39B}"/>
+                <a16:creationId xmlns:a16="http://schemas.microsoft.com/office/drawing/2014/main" id="{4A5D6380-E829-4C7E-BCE5-201949A38136}"/>
               </a:ext>
             </a:extLst>
           </p:cNvPr>
@@ -5669,7 +6351,7 @@
           <p:cNvPr id="53" name="diagram-69">
             <a:extLst xmlns:a="http://schemas.openxmlformats.org/drawingml/2006/main">
               <a:ext uri="{FF2B5EF4-FFF2-40B4-BE49-F238E27FC236}">
-                <a16:creationId xmlns:a16="http://schemas.microsoft.com/office/drawing/2014/main" id="{60391135-6D80-4188-B7E2-6F759BEEF95F}"/>
+                <a16:creationId xmlns:a16="http://schemas.microsoft.com/office/drawing/2014/main" id="{85D434BA-923C-4709-8B5D-1E11967394C4}"/>
               </a:ext>
             </a:extLst>
           </p:cNvPr>
@@ -5701,7 +6383,7 @@
           <p:cNvPr id="54" name="diagram-70">
             <a:extLst xmlns:a="http://schemas.openxmlformats.org/drawingml/2006/main">
               <a:ext uri="{FF2B5EF4-FFF2-40B4-BE49-F238E27FC236}">
-                <a16:creationId xmlns:a16="http://schemas.microsoft.com/office/drawing/2014/main" id="{08F0F2AB-985C-4627-9F33-A9FB4AF8E7AC}"/>
+                <a16:creationId xmlns:a16="http://schemas.microsoft.com/office/drawing/2014/main" id="{7BB03785-E2AE-42A3-BD1D-591657AF1A10}"/>
               </a:ext>
             </a:extLst>
           </p:cNvPr>
@@ -5733,7 +6415,7 @@
           <p:cNvPr id="55" name="diagram-71">
             <a:extLst xmlns:a="http://schemas.openxmlformats.org/drawingml/2006/main">
               <a:ext uri="{FF2B5EF4-FFF2-40B4-BE49-F238E27FC236}">
-                <a16:creationId xmlns:a16="http://schemas.microsoft.com/office/drawing/2014/main" id="{E32DAD9A-E4A4-42C8-8F4C-C7BFEF5B1497}"/>
+                <a16:creationId xmlns:a16="http://schemas.microsoft.com/office/drawing/2014/main" id="{30F0F25E-3F69-4E55-8F53-E6621DA548C2}"/>
               </a:ext>
             </a:extLst>
           </p:cNvPr>
@@ -5765,7 +6447,7 @@
           <p:cNvPr id="56" name="diagram-72">
             <a:extLst xmlns:a="http://schemas.openxmlformats.org/drawingml/2006/main">
               <a:ext uri="{FF2B5EF4-FFF2-40B4-BE49-F238E27FC236}">
-                <a16:creationId xmlns:a16="http://schemas.microsoft.com/office/drawing/2014/main" id="{467DC351-7BD7-43F0-94C1-DDA5169D355C}"/>
+                <a16:creationId xmlns:a16="http://schemas.microsoft.com/office/drawing/2014/main" id="{2E13DC16-E203-4D5F-BF34-074E02C93B33}"/>
               </a:ext>
             </a:extLst>
           </p:cNvPr>
@@ -5797,7 +6479,7 @@
           <p:cNvPr id="57" name="diagram-73">
             <a:extLst xmlns:a="http://schemas.openxmlformats.org/drawingml/2006/main">
               <a:ext uri="{FF2B5EF4-FFF2-40B4-BE49-F238E27FC236}">
-                <a16:creationId xmlns:a16="http://schemas.microsoft.com/office/drawing/2014/main" id="{7D19AA66-A3F1-4BA3-8414-598A533C64A1}"/>
+                <a16:creationId xmlns:a16="http://schemas.microsoft.com/office/drawing/2014/main" id="{729D2EA4-B75F-4C66-8B5D-895D524C4728}"/>
               </a:ext>
             </a:extLst>
           </p:cNvPr>
@@ -5829,7 +6511,7 @@
           <p:cNvPr id="58" name="diagram-74">
             <a:extLst xmlns:a="http://schemas.openxmlformats.org/drawingml/2006/main">
               <a:ext uri="{FF2B5EF4-FFF2-40B4-BE49-F238E27FC236}">
-                <a16:creationId xmlns:a16="http://schemas.microsoft.com/office/drawing/2014/main" id="{908FE7BA-09CC-4281-8423-863D7E4113B6}"/>
+                <a16:creationId xmlns:a16="http://schemas.microsoft.com/office/drawing/2014/main" id="{38FDF339-1152-46B8-9C1D-67B3AD62DF1B}"/>
               </a:ext>
             </a:extLst>
           </p:cNvPr>
@@ -5861,7 +6543,7 @@
           <p:cNvPr id="59" name="diagram-75">
             <a:extLst xmlns:a="http://schemas.openxmlformats.org/drawingml/2006/main">
               <a:ext uri="{FF2B5EF4-FFF2-40B4-BE49-F238E27FC236}">
-                <a16:creationId xmlns:a16="http://schemas.microsoft.com/office/drawing/2014/main" id="{E431D4E4-B2C0-44C0-9BE6-1F418AAEE2DD}"/>
+                <a16:creationId xmlns:a16="http://schemas.microsoft.com/office/drawing/2014/main" id="{9C5F0A20-A168-4DFA-8659-B94CFAAB15DB}"/>
               </a:ext>
             </a:extLst>
           </p:cNvPr>
@@ -5893,7 +6575,7 @@
           <p:cNvPr id="60" name="diagram-76">
             <a:extLst xmlns:a="http://schemas.openxmlformats.org/drawingml/2006/main">
               <a:ext uri="{FF2B5EF4-FFF2-40B4-BE49-F238E27FC236}">
-                <a16:creationId xmlns:a16="http://schemas.microsoft.com/office/drawing/2014/main" id="{CBC5279A-B601-42CC-AE18-37EE33A15E41}"/>
+                <a16:creationId xmlns:a16="http://schemas.microsoft.com/office/drawing/2014/main" id="{2F41CA7E-15C2-434D-8036-2D7423EF28B9}"/>
               </a:ext>
             </a:extLst>
           </p:cNvPr>
@@ -5925,7 +6607,7 @@
           <p:cNvPr id="61" name="flow-77">
             <a:extLst xmlns:a="http://schemas.openxmlformats.org/drawingml/2006/main">
               <a:ext uri="{FF2B5EF4-FFF2-40B4-BE49-F238E27FC236}">
-                <a16:creationId xmlns:a16="http://schemas.microsoft.com/office/drawing/2014/main" id="{60619431-9020-4818-8A57-047ACF6B6937}"/>
+                <a16:creationId xmlns:a16="http://schemas.microsoft.com/office/drawing/2014/main" id="{B477AC5D-DAD5-46E4-8325-42BE577C39AB}"/>
               </a:ext>
             </a:extLst>
           </p:cNvPr>
@@ -5955,7 +6637,7 @@
           <p:cNvPr id="62" name="text-78">
             <a:extLst xmlns:a="http://schemas.openxmlformats.org/drawingml/2006/main">
               <a:ext uri="{FF2B5EF4-FFF2-40B4-BE49-F238E27FC236}">
-                <a16:creationId xmlns:a16="http://schemas.microsoft.com/office/drawing/2014/main" id="{1B7C7B67-6B62-4D95-9781-FAF31549CC21}"/>
+                <a16:creationId xmlns:a16="http://schemas.microsoft.com/office/drawing/2014/main" id="{025C4EB5-AF48-4616-895A-4C198AE7A23B}"/>
               </a:ext>
             </a:extLst>
           </p:cNvPr>
@@ -6012,7 +6694,7 @@
           <p:cNvPr id="63" name="text-79">
             <a:extLst xmlns:a="http://schemas.openxmlformats.org/drawingml/2006/main">
               <a:ext uri="{FF2B5EF4-FFF2-40B4-BE49-F238E27FC236}">
-                <a16:creationId xmlns:a16="http://schemas.microsoft.com/office/drawing/2014/main" id="{283111AB-15C3-4705-87AE-6A6E21A4C64A}"/>
+                <a16:creationId xmlns:a16="http://schemas.microsoft.com/office/drawing/2014/main" id="{7946AB2C-998F-4326-B7F1-658FFE8377CB}"/>
               </a:ext>
             </a:extLst>
           </p:cNvPr>
@@ -6067,7 +6749,7 @@
     </p:spTree>
     <p:extLst>
       <p:ext uri="{BB962C8B-B14F-4D97-AF65-F5344CB8AC3E}">
-        <p14:creationId xmlns:p14="http://schemas.microsoft.com/office/powerpoint/2010/main" val="440950421"/>
+        <p14:creationId xmlns:p14="http://schemas.microsoft.com/office/powerpoint/2010/main" val="1752680392"/>
       </p:ext>
     </p:extLst>
   </p:cSld>
@@ -6098,7 +6780,7 @@
           <p:cNvPr id="308" name="text-80">
             <a:extLst xmlns:a="http://schemas.openxmlformats.org/drawingml/2006/main">
               <a:ext uri="{FF2B5EF4-FFF2-40B4-BE49-F238E27FC236}">
-                <a16:creationId xmlns:a16="http://schemas.microsoft.com/office/drawing/2014/main" id="{BA4A567B-ECEE-4EDE-AF09-5FD4CC4033B4}"/>
+                <a16:creationId xmlns:a16="http://schemas.microsoft.com/office/drawing/2014/main" id="{2BC58CBB-9564-4752-8AF2-C22863673140}"/>
               </a:ext>
             </a:extLst>
           </p:cNvPr>
@@ -6155,7 +6837,7 @@
           <p:cNvPr id="2" name="text-81">
             <a:extLst xmlns:a="http://schemas.openxmlformats.org/drawingml/2006/main">
               <a:ext uri="{FF2B5EF4-FFF2-40B4-BE49-F238E27FC236}">
-                <a16:creationId xmlns:a16="http://schemas.microsoft.com/office/drawing/2014/main" id="{D131B1DF-4C38-4ADB-A187-B07A39D3ECD5}"/>
+                <a16:creationId xmlns:a16="http://schemas.microsoft.com/office/drawing/2014/main" id="{8416FC19-07F4-4B1D-A958-6ADF8CAE42C0}"/>
               </a:ext>
             </a:extLst>
           </p:cNvPr>
@@ -6212,7 +6894,7 @@
           <p:cNvPr id="3" name="text-82">
             <a:extLst xmlns:a="http://schemas.openxmlformats.org/drawingml/2006/main">
               <a:ext uri="{FF2B5EF4-FFF2-40B4-BE49-F238E27FC236}">
-                <a16:creationId xmlns:a16="http://schemas.microsoft.com/office/drawing/2014/main" id="{26E5B825-BCED-4E2E-B7C6-6FF0786ED61F}"/>
+                <a16:creationId xmlns:a16="http://schemas.microsoft.com/office/drawing/2014/main" id="{CA3E7674-57F9-4C8A-9618-A54016CF6ABD}"/>
               </a:ext>
             </a:extLst>
           </p:cNvPr>
@@ -6269,7 +6951,7 @@
           <p:cNvPr id="4" name="text-83">
             <a:extLst xmlns:a="http://schemas.openxmlformats.org/drawingml/2006/main">
               <a:ext uri="{FF2B5EF4-FFF2-40B4-BE49-F238E27FC236}">
-                <a16:creationId xmlns:a16="http://schemas.microsoft.com/office/drawing/2014/main" id="{807211D6-999D-425D-B0ED-050472048AE2}"/>
+                <a16:creationId xmlns:a16="http://schemas.microsoft.com/office/drawing/2014/main" id="{B86F7AF7-C29B-45D6-8348-6B92633D5466}"/>
               </a:ext>
             </a:extLst>
           </p:cNvPr>
@@ -6326,7 +7008,7 @@
           <p:cNvPr id="5" name="text-84">
             <a:extLst xmlns:a="http://schemas.openxmlformats.org/drawingml/2006/main">
               <a:ext uri="{FF2B5EF4-FFF2-40B4-BE49-F238E27FC236}">
-                <a16:creationId xmlns:a16="http://schemas.microsoft.com/office/drawing/2014/main" id="{290345A0-B609-4528-B69F-04A170C1B454}"/>
+                <a16:creationId xmlns:a16="http://schemas.microsoft.com/office/drawing/2014/main" id="{9B0F65B6-A815-4967-9FBC-54D384614DB7}"/>
               </a:ext>
             </a:extLst>
           </p:cNvPr>
@@ -6383,7 +7065,7 @@
           <p:cNvPr id="6" name="diagram-85">
             <a:extLst xmlns:a="http://schemas.openxmlformats.org/drawingml/2006/main">
               <a:ext uri="{FF2B5EF4-FFF2-40B4-BE49-F238E27FC236}">
-                <a16:creationId xmlns:a16="http://schemas.microsoft.com/office/drawing/2014/main" id="{7A346B6E-E976-46C3-A2E3-B870660F5289}"/>
+                <a16:creationId xmlns:a16="http://schemas.microsoft.com/office/drawing/2014/main" id="{F221BF2C-E545-42B4-8F3D-FD60AE01C6CB}"/>
               </a:ext>
             </a:extLst>
           </p:cNvPr>
@@ -6415,7 +7097,7 @@
           <p:cNvPr id="7" name="diagram-86">
             <a:extLst xmlns:a="http://schemas.openxmlformats.org/drawingml/2006/main">
               <a:ext uri="{FF2B5EF4-FFF2-40B4-BE49-F238E27FC236}">
-                <a16:creationId xmlns:a16="http://schemas.microsoft.com/office/drawing/2014/main" id="{6B5595DF-C14D-4EEB-9FBF-825AA6195B18}"/>
+                <a16:creationId xmlns:a16="http://schemas.microsoft.com/office/drawing/2014/main" id="{848DF289-528D-45F4-8A09-B7DF3F6263D8}"/>
               </a:ext>
             </a:extLst>
           </p:cNvPr>
@@ -6447,7 +7129,7 @@
           <p:cNvPr id="8" name="diagram-87">
             <a:extLst xmlns:a="http://schemas.openxmlformats.org/drawingml/2006/main">
               <a:ext uri="{FF2B5EF4-FFF2-40B4-BE49-F238E27FC236}">
-                <a16:creationId xmlns:a16="http://schemas.microsoft.com/office/drawing/2014/main" id="{E9D38E12-80A4-4359-82CB-75036B54CDCA}"/>
+                <a16:creationId xmlns:a16="http://schemas.microsoft.com/office/drawing/2014/main" id="{475BD159-68E0-4DBD-87B6-8E905EB45BD6}"/>
               </a:ext>
             </a:extLst>
           </p:cNvPr>
@@ -6479,7 +7161,7 @@
           <p:cNvPr id="9" name="diagram-88">
             <a:extLst xmlns:a="http://schemas.openxmlformats.org/drawingml/2006/main">
               <a:ext uri="{FF2B5EF4-FFF2-40B4-BE49-F238E27FC236}">
-                <a16:creationId xmlns:a16="http://schemas.microsoft.com/office/drawing/2014/main" id="{B0550C2D-D5FB-4DAA-82E4-00F8EA15AE91}"/>
+                <a16:creationId xmlns:a16="http://schemas.microsoft.com/office/drawing/2014/main" id="{4DAD5A19-8EC3-4FFA-B804-45D6B9A902AC}"/>
               </a:ext>
             </a:extLst>
           </p:cNvPr>
@@ -6511,7 +7193,7 @@
           <p:cNvPr id="10" name="diagram-89">
             <a:extLst xmlns:a="http://schemas.openxmlformats.org/drawingml/2006/main">
               <a:ext uri="{FF2B5EF4-FFF2-40B4-BE49-F238E27FC236}">
-                <a16:creationId xmlns:a16="http://schemas.microsoft.com/office/drawing/2014/main" id="{89AE6D5D-FE9B-4CC6-957C-EBAD5AE44602}"/>
+                <a16:creationId xmlns:a16="http://schemas.microsoft.com/office/drawing/2014/main" id="{F6F96329-03DD-471A-8E3C-A345DE6A210D}"/>
               </a:ext>
             </a:extLst>
           </p:cNvPr>
@@ -6543,7 +7225,7 @@
           <p:cNvPr id="11" name="diagram-90">
             <a:extLst xmlns:a="http://schemas.openxmlformats.org/drawingml/2006/main">
               <a:ext uri="{FF2B5EF4-FFF2-40B4-BE49-F238E27FC236}">
-                <a16:creationId xmlns:a16="http://schemas.microsoft.com/office/drawing/2014/main" id="{5A11969E-33C7-424B-9E07-18208D94BA23}"/>
+                <a16:creationId xmlns:a16="http://schemas.microsoft.com/office/drawing/2014/main" id="{E49286E5-4BB4-4080-8D38-712D776C79EA}"/>
               </a:ext>
             </a:extLst>
           </p:cNvPr>
@@ -6575,7 +7257,7 @@
           <p:cNvPr id="12" name="diagram-91">
             <a:extLst xmlns:a="http://schemas.openxmlformats.org/drawingml/2006/main">
               <a:ext uri="{FF2B5EF4-FFF2-40B4-BE49-F238E27FC236}">
-                <a16:creationId xmlns:a16="http://schemas.microsoft.com/office/drawing/2014/main" id="{10754F99-3FA4-4B12-8FAD-B436245113C2}"/>
+                <a16:creationId xmlns:a16="http://schemas.microsoft.com/office/drawing/2014/main" id="{90B146D2-F6CF-4874-9B7D-766358FF7016}"/>
               </a:ext>
             </a:extLst>
           </p:cNvPr>
@@ -6607,7 +7289,7 @@
           <p:cNvPr id="13" name="diagram-92">
             <a:extLst xmlns:a="http://schemas.openxmlformats.org/drawingml/2006/main">
               <a:ext uri="{FF2B5EF4-FFF2-40B4-BE49-F238E27FC236}">
-                <a16:creationId xmlns:a16="http://schemas.microsoft.com/office/drawing/2014/main" id="{07BA1649-16A4-4DC9-86A5-E49868A37E24}"/>
+                <a16:creationId xmlns:a16="http://schemas.microsoft.com/office/drawing/2014/main" id="{7C8B6E65-2E17-4D52-A0A1-144492F1EE53}"/>
               </a:ext>
             </a:extLst>
           </p:cNvPr>
@@ -6639,7 +7321,7 @@
           <p:cNvPr id="14" name="diagram-93">
             <a:extLst xmlns:a="http://schemas.openxmlformats.org/drawingml/2006/main">
               <a:ext uri="{FF2B5EF4-FFF2-40B4-BE49-F238E27FC236}">
-                <a16:creationId xmlns:a16="http://schemas.microsoft.com/office/drawing/2014/main" id="{C9F96799-362E-4608-AF3F-942F51DD6116}"/>
+                <a16:creationId xmlns:a16="http://schemas.microsoft.com/office/drawing/2014/main" id="{771F2EEC-8838-47D3-BE5C-98F772B8D5F8}"/>
               </a:ext>
             </a:extLst>
           </p:cNvPr>
@@ -6671,7 +7353,7 @@
           <p:cNvPr id="15" name="diagram-94">
             <a:extLst xmlns:a="http://schemas.openxmlformats.org/drawingml/2006/main">
               <a:ext uri="{FF2B5EF4-FFF2-40B4-BE49-F238E27FC236}">
-                <a16:creationId xmlns:a16="http://schemas.microsoft.com/office/drawing/2014/main" id="{1FC06836-A21D-48C6-9CA1-4811F86CA326}"/>
+                <a16:creationId xmlns:a16="http://schemas.microsoft.com/office/drawing/2014/main" id="{C0909EBC-E0DC-491B-A97F-463D8C7E56BB}"/>
               </a:ext>
             </a:extLst>
           </p:cNvPr>
@@ -6703,7 +7385,7 @@
           <p:cNvPr id="16" name="diagram-95">
             <a:extLst xmlns:a="http://schemas.openxmlformats.org/drawingml/2006/main">
               <a:ext uri="{FF2B5EF4-FFF2-40B4-BE49-F238E27FC236}">
-                <a16:creationId xmlns:a16="http://schemas.microsoft.com/office/drawing/2014/main" id="{3E59CB32-085E-4EBC-B1CA-2B0E1FA71245}"/>
+                <a16:creationId xmlns:a16="http://schemas.microsoft.com/office/drawing/2014/main" id="{D83AA5B6-7AEE-4007-9D29-8C2BDB94F781}"/>
               </a:ext>
             </a:extLst>
           </p:cNvPr>
@@ -6735,7 +7417,7 @@
           <p:cNvPr id="17" name="diagram-96">
             <a:extLst xmlns:a="http://schemas.openxmlformats.org/drawingml/2006/main">
               <a:ext uri="{FF2B5EF4-FFF2-40B4-BE49-F238E27FC236}">
-                <a16:creationId xmlns:a16="http://schemas.microsoft.com/office/drawing/2014/main" id="{C201D0F7-8556-413C-8F17-51BBA9CABE9D}"/>
+                <a16:creationId xmlns:a16="http://schemas.microsoft.com/office/drawing/2014/main" id="{981B469B-EB5E-49E3-9301-E0B942463E72}"/>
               </a:ext>
             </a:extLst>
           </p:cNvPr>
@@ -6767,7 +7449,7 @@
           <p:cNvPr id="18" name="diagram-97">
             <a:extLst xmlns:a="http://schemas.openxmlformats.org/drawingml/2006/main">
               <a:ext uri="{FF2B5EF4-FFF2-40B4-BE49-F238E27FC236}">
-                <a16:creationId xmlns:a16="http://schemas.microsoft.com/office/drawing/2014/main" id="{4DF76148-1F9B-4421-9292-93376135F077}"/>
+                <a16:creationId xmlns:a16="http://schemas.microsoft.com/office/drawing/2014/main" id="{3CAB873E-A1F4-46DB-8CEE-0F5DDD3B0F90}"/>
               </a:ext>
             </a:extLst>
           </p:cNvPr>
@@ -6799,7 +7481,7 @@
           <p:cNvPr id="19" name="diagram-98">
             <a:extLst xmlns:a="http://schemas.openxmlformats.org/drawingml/2006/main">
               <a:ext uri="{FF2B5EF4-FFF2-40B4-BE49-F238E27FC236}">
-                <a16:creationId xmlns:a16="http://schemas.microsoft.com/office/drawing/2014/main" id="{CB102D66-EE7D-4E89-B2E9-719A0DEC7666}"/>
+                <a16:creationId xmlns:a16="http://schemas.microsoft.com/office/drawing/2014/main" id="{76F789CE-D41C-4D43-95A2-FED47A4E8C32}"/>
               </a:ext>
             </a:extLst>
           </p:cNvPr>
@@ -6831,7 +7513,7 @@
           <p:cNvPr id="20" name="diagram-99">
             <a:extLst xmlns:a="http://schemas.openxmlformats.org/drawingml/2006/main">
               <a:ext uri="{FF2B5EF4-FFF2-40B4-BE49-F238E27FC236}">
-                <a16:creationId xmlns:a16="http://schemas.microsoft.com/office/drawing/2014/main" id="{4875103A-50A3-4F6D-8151-3C9F0C56EE10}"/>
+                <a16:creationId xmlns:a16="http://schemas.microsoft.com/office/drawing/2014/main" id="{13DDE020-94D9-47FE-A2CF-C42BCC90566A}"/>
               </a:ext>
             </a:extLst>
           </p:cNvPr>
@@ -6863,7 +7545,7 @@
           <p:cNvPr id="21" name="diagram-100">
             <a:extLst xmlns:a="http://schemas.openxmlformats.org/drawingml/2006/main">
               <a:ext uri="{FF2B5EF4-FFF2-40B4-BE49-F238E27FC236}">
-                <a16:creationId xmlns:a16="http://schemas.microsoft.com/office/drawing/2014/main" id="{0646FE85-1B1D-4309-B565-2C36511C3E65}"/>
+                <a16:creationId xmlns:a16="http://schemas.microsoft.com/office/drawing/2014/main" id="{EBCD69F7-59D4-43F2-9194-917415D23BA0}"/>
               </a:ext>
             </a:extLst>
           </p:cNvPr>
@@ -6895,7 +7577,7 @@
           <p:cNvPr id="22" name="diagram-101">
             <a:extLst xmlns:a="http://schemas.openxmlformats.org/drawingml/2006/main">
               <a:ext uri="{FF2B5EF4-FFF2-40B4-BE49-F238E27FC236}">
-                <a16:creationId xmlns:a16="http://schemas.microsoft.com/office/drawing/2014/main" id="{079B27C1-FADC-41E0-AB9D-2451FA1AEF84}"/>
+                <a16:creationId xmlns:a16="http://schemas.microsoft.com/office/drawing/2014/main" id="{922EEA03-9191-4177-8F81-1E0A798FE1B9}"/>
               </a:ext>
             </a:extLst>
           </p:cNvPr>
@@ -6927,7 +7609,7 @@
           <p:cNvPr id="23" name="diagram-102">
             <a:extLst xmlns:a="http://schemas.openxmlformats.org/drawingml/2006/main">
               <a:ext uri="{FF2B5EF4-FFF2-40B4-BE49-F238E27FC236}">
-                <a16:creationId xmlns:a16="http://schemas.microsoft.com/office/drawing/2014/main" id="{17810184-413F-4451-ABD3-279C734B16EC}"/>
+                <a16:creationId xmlns:a16="http://schemas.microsoft.com/office/drawing/2014/main" id="{782AE5B2-61BD-4207-BCB5-2F5F59168ECC}"/>
               </a:ext>
             </a:extLst>
           </p:cNvPr>
@@ -6959,7 +7641,7 @@
           <p:cNvPr id="24" name="diagram-103">
             <a:extLst xmlns:a="http://schemas.openxmlformats.org/drawingml/2006/main">
               <a:ext uri="{FF2B5EF4-FFF2-40B4-BE49-F238E27FC236}">
-                <a16:creationId xmlns:a16="http://schemas.microsoft.com/office/drawing/2014/main" id="{1F55EACA-8C38-4A74-A72C-F2AB7BA3C887}"/>
+                <a16:creationId xmlns:a16="http://schemas.microsoft.com/office/drawing/2014/main" id="{E7A297B9-7FAB-44F3-A890-6A3C1199B279}"/>
               </a:ext>
             </a:extLst>
           </p:cNvPr>
@@ -6991,7 +7673,7 @@
           <p:cNvPr id="25" name="diagram-104">
             <a:extLst xmlns:a="http://schemas.openxmlformats.org/drawingml/2006/main">
               <a:ext uri="{FF2B5EF4-FFF2-40B4-BE49-F238E27FC236}">
-                <a16:creationId xmlns:a16="http://schemas.microsoft.com/office/drawing/2014/main" id="{FF5692D7-38B5-426E-B027-61C876009C75}"/>
+                <a16:creationId xmlns:a16="http://schemas.microsoft.com/office/drawing/2014/main" id="{3802C125-C239-4694-AFB6-F73009A13F0F}"/>
               </a:ext>
             </a:extLst>
           </p:cNvPr>
@@ -7023,7 +7705,7 @@
           <p:cNvPr id="26" name="diagram-105">
             <a:extLst xmlns:a="http://schemas.openxmlformats.org/drawingml/2006/main">
               <a:ext uri="{FF2B5EF4-FFF2-40B4-BE49-F238E27FC236}">
-                <a16:creationId xmlns:a16="http://schemas.microsoft.com/office/drawing/2014/main" id="{C8778524-74CE-4120-BF9D-6CA078C74F85}"/>
+                <a16:creationId xmlns:a16="http://schemas.microsoft.com/office/drawing/2014/main" id="{D05AFE12-B4F2-48E2-8DD3-E6B55C250C5B}"/>
               </a:ext>
             </a:extLst>
           </p:cNvPr>
@@ -7055,7 +7737,7 @@
           <p:cNvPr id="27" name="diagram-106">
             <a:extLst xmlns:a="http://schemas.openxmlformats.org/drawingml/2006/main">
               <a:ext uri="{FF2B5EF4-FFF2-40B4-BE49-F238E27FC236}">
-                <a16:creationId xmlns:a16="http://schemas.microsoft.com/office/drawing/2014/main" id="{5BD6A3D1-D78D-44CD-B9EC-907A125FEA89}"/>
+                <a16:creationId xmlns:a16="http://schemas.microsoft.com/office/drawing/2014/main" id="{4925A569-3EB9-4ACC-89F1-B395A5B1364A}"/>
               </a:ext>
             </a:extLst>
           </p:cNvPr>
@@ -7087,7 +7769,7 @@
           <p:cNvPr id="28" name="diagram-107">
             <a:extLst xmlns:a="http://schemas.openxmlformats.org/drawingml/2006/main">
               <a:ext uri="{FF2B5EF4-FFF2-40B4-BE49-F238E27FC236}">
-                <a16:creationId xmlns:a16="http://schemas.microsoft.com/office/drawing/2014/main" id="{8D31BAEC-1FE3-4786-B9C4-FB59BECEBC50}"/>
+                <a16:creationId xmlns:a16="http://schemas.microsoft.com/office/drawing/2014/main" id="{1C645843-EC48-40AA-A1FC-967C655EFCD5}"/>
               </a:ext>
             </a:extLst>
           </p:cNvPr>
@@ -7119,7 +7801,7 @@
           <p:cNvPr id="29" name="diagram-108">
             <a:extLst xmlns:a="http://schemas.openxmlformats.org/drawingml/2006/main">
               <a:ext uri="{FF2B5EF4-FFF2-40B4-BE49-F238E27FC236}">
-                <a16:creationId xmlns:a16="http://schemas.microsoft.com/office/drawing/2014/main" id="{8CDF4D2A-693B-4168-87BA-C76DF9359F94}"/>
+                <a16:creationId xmlns:a16="http://schemas.microsoft.com/office/drawing/2014/main" id="{640F6CB7-3A18-4A74-BC79-AF4A116F24F3}"/>
               </a:ext>
             </a:extLst>
           </p:cNvPr>
@@ -7151,7 +7833,7 @@
           <p:cNvPr id="30" name="diagram-109">
             <a:extLst xmlns:a="http://schemas.openxmlformats.org/drawingml/2006/main">
               <a:ext uri="{FF2B5EF4-FFF2-40B4-BE49-F238E27FC236}">
-                <a16:creationId xmlns:a16="http://schemas.microsoft.com/office/drawing/2014/main" id="{67A5FCDD-B63C-45A8-A4D7-A5407484AE73}"/>
+                <a16:creationId xmlns:a16="http://schemas.microsoft.com/office/drawing/2014/main" id="{538B6E5F-F46C-494D-B3D8-E8F33A45F6AF}"/>
               </a:ext>
             </a:extLst>
           </p:cNvPr>
@@ -7183,7 +7865,7 @@
           <p:cNvPr id="31" name="diagram-110">
             <a:extLst xmlns:a="http://schemas.openxmlformats.org/drawingml/2006/main">
               <a:ext uri="{FF2B5EF4-FFF2-40B4-BE49-F238E27FC236}">
-                <a16:creationId xmlns:a16="http://schemas.microsoft.com/office/drawing/2014/main" id="{19F04AB0-6142-4352-9F54-33FE247A53CF}"/>
+                <a16:creationId xmlns:a16="http://schemas.microsoft.com/office/drawing/2014/main" id="{55EB3849-BF43-40BB-BAB1-4F368D2B71FE}"/>
               </a:ext>
             </a:extLst>
           </p:cNvPr>
@@ -7215,7 +7897,7 @@
           <p:cNvPr id="32" name="diagram-111">
             <a:extLst xmlns:a="http://schemas.openxmlformats.org/drawingml/2006/main">
               <a:ext uri="{FF2B5EF4-FFF2-40B4-BE49-F238E27FC236}">
-                <a16:creationId xmlns:a16="http://schemas.microsoft.com/office/drawing/2014/main" id="{E5F1DE6A-81F9-41F0-B9F6-F8BE6285A4C6}"/>
+                <a16:creationId xmlns:a16="http://schemas.microsoft.com/office/drawing/2014/main" id="{36470378-E707-4969-A3FE-20C709D88B8A}"/>
               </a:ext>
             </a:extLst>
           </p:cNvPr>
@@ -7247,7 +7929,7 @@
           <p:cNvPr id="33" name="diagram-112">
             <a:extLst xmlns:a="http://schemas.openxmlformats.org/drawingml/2006/main">
               <a:ext uri="{FF2B5EF4-FFF2-40B4-BE49-F238E27FC236}">
-                <a16:creationId xmlns:a16="http://schemas.microsoft.com/office/drawing/2014/main" id="{C3E9F9AA-8327-4198-BF31-1C3784533EAB}"/>
+                <a16:creationId xmlns:a16="http://schemas.microsoft.com/office/drawing/2014/main" id="{E54259D0-B6CD-4027-A0E2-472CEE3858E2}"/>
               </a:ext>
             </a:extLst>
           </p:cNvPr>
@@ -7279,7 +7961,7 @@
           <p:cNvPr id="34" name="diagram-113">
             <a:extLst xmlns:a="http://schemas.openxmlformats.org/drawingml/2006/main">
               <a:ext uri="{FF2B5EF4-FFF2-40B4-BE49-F238E27FC236}">
-                <a16:creationId xmlns:a16="http://schemas.microsoft.com/office/drawing/2014/main" id="{88371710-78F9-4BA4-B421-80CD0D1B69E6}"/>
+                <a16:creationId xmlns:a16="http://schemas.microsoft.com/office/drawing/2014/main" id="{C49A0908-98EB-445F-83AA-72E06C4B995F}"/>
               </a:ext>
             </a:extLst>
           </p:cNvPr>
@@ -7311,7 +7993,7 @@
           <p:cNvPr id="35" name="diagram-114">
             <a:extLst xmlns:a="http://schemas.openxmlformats.org/drawingml/2006/main">
               <a:ext uri="{FF2B5EF4-FFF2-40B4-BE49-F238E27FC236}">
-                <a16:creationId xmlns:a16="http://schemas.microsoft.com/office/drawing/2014/main" id="{2AFB6536-404C-411E-9EFE-634C3E2190AC}"/>
+                <a16:creationId xmlns:a16="http://schemas.microsoft.com/office/drawing/2014/main" id="{8D5FB7BA-9703-4DEF-B2DA-DEB3724A3C46}"/>
               </a:ext>
             </a:extLst>
           </p:cNvPr>
@@ -7343,7 +8025,7 @@
           <p:cNvPr id="36" name="diagram-115">
             <a:extLst xmlns:a="http://schemas.openxmlformats.org/drawingml/2006/main">
               <a:ext uri="{FF2B5EF4-FFF2-40B4-BE49-F238E27FC236}">
-                <a16:creationId xmlns:a16="http://schemas.microsoft.com/office/drawing/2014/main" id="{0CD396AB-264E-4C66-9924-EF5C1BA74D3E}"/>
+                <a16:creationId xmlns:a16="http://schemas.microsoft.com/office/drawing/2014/main" id="{AFB880D9-1079-4054-947D-D06BC2C82755}"/>
               </a:ext>
             </a:extLst>
           </p:cNvPr>
@@ -7375,7 +8057,7 @@
           <p:cNvPr id="37" name="diagram-116">
             <a:extLst xmlns:a="http://schemas.openxmlformats.org/drawingml/2006/main">
               <a:ext uri="{FF2B5EF4-FFF2-40B4-BE49-F238E27FC236}">
-                <a16:creationId xmlns:a16="http://schemas.microsoft.com/office/drawing/2014/main" id="{A06ADA21-A87E-411D-926F-B24A298F72B9}"/>
+                <a16:creationId xmlns:a16="http://schemas.microsoft.com/office/drawing/2014/main" id="{BB5B837A-8855-4CDE-A060-CFE5E0CDE9A9}"/>
               </a:ext>
             </a:extLst>
           </p:cNvPr>
@@ -7407,7 +8089,7 @@
           <p:cNvPr id="38" name="diagram-117">
             <a:extLst xmlns:a="http://schemas.openxmlformats.org/drawingml/2006/main">
               <a:ext uri="{FF2B5EF4-FFF2-40B4-BE49-F238E27FC236}">
-                <a16:creationId xmlns:a16="http://schemas.microsoft.com/office/drawing/2014/main" id="{ACA9E58F-093D-4F9A-852C-B32A2A73DD81}"/>
+                <a16:creationId xmlns:a16="http://schemas.microsoft.com/office/drawing/2014/main" id="{0A0D8729-72D6-46AE-ABB0-7F8F110CE8B5}"/>
               </a:ext>
             </a:extLst>
           </p:cNvPr>
@@ -7439,7 +8121,7 @@
           <p:cNvPr id="39" name="diagram-118">
             <a:extLst xmlns:a="http://schemas.openxmlformats.org/drawingml/2006/main">
               <a:ext uri="{FF2B5EF4-FFF2-40B4-BE49-F238E27FC236}">
-                <a16:creationId xmlns:a16="http://schemas.microsoft.com/office/drawing/2014/main" id="{B73C5A44-AFBB-479C-97FB-4F9CC0924B2D}"/>
+                <a16:creationId xmlns:a16="http://schemas.microsoft.com/office/drawing/2014/main" id="{16B41E7E-92C9-42B2-9651-A7E081C10AD6}"/>
               </a:ext>
             </a:extLst>
           </p:cNvPr>
@@ -7471,7 +8153,7 @@
           <p:cNvPr id="40" name="diagram-119">
             <a:extLst xmlns:a="http://schemas.openxmlformats.org/drawingml/2006/main">
               <a:ext uri="{FF2B5EF4-FFF2-40B4-BE49-F238E27FC236}">
-                <a16:creationId xmlns:a16="http://schemas.microsoft.com/office/drawing/2014/main" id="{0DBDF96D-6605-42F9-B186-E089E6FD799F}"/>
+                <a16:creationId xmlns:a16="http://schemas.microsoft.com/office/drawing/2014/main" id="{F628F18D-2F9C-4197-A156-4F612CC0FC80}"/>
               </a:ext>
             </a:extLst>
           </p:cNvPr>
@@ -7503,7 +8185,7 @@
           <p:cNvPr id="41" name="diagram-120">
             <a:extLst xmlns:a="http://schemas.openxmlformats.org/drawingml/2006/main">
               <a:ext uri="{FF2B5EF4-FFF2-40B4-BE49-F238E27FC236}">
-                <a16:creationId xmlns:a16="http://schemas.microsoft.com/office/drawing/2014/main" id="{3225BFAD-31DD-4582-A0A4-D23781D66ECD}"/>
+                <a16:creationId xmlns:a16="http://schemas.microsoft.com/office/drawing/2014/main" id="{F6BF2751-5C0E-452E-9837-2A5717EDB290}"/>
               </a:ext>
             </a:extLst>
           </p:cNvPr>
@@ -7535,7 +8217,7 @@
           <p:cNvPr id="42" name="text-121">
             <a:extLst xmlns:a="http://schemas.openxmlformats.org/drawingml/2006/main">
               <a:ext uri="{FF2B5EF4-FFF2-40B4-BE49-F238E27FC236}">
-                <a16:creationId xmlns:a16="http://schemas.microsoft.com/office/drawing/2014/main" id="{422A2224-AD96-497E-8E0D-C397D2FB17A5}"/>
+                <a16:creationId xmlns:a16="http://schemas.microsoft.com/office/drawing/2014/main" id="{221BB82A-1ECC-4277-AB85-22C28D3A01DE}"/>
               </a:ext>
             </a:extLst>
           </p:cNvPr>
@@ -7592,7 +8274,7 @@
           <p:cNvPr id="43" name="text-122">
             <a:extLst xmlns:a="http://schemas.openxmlformats.org/drawingml/2006/main">
               <a:ext uri="{FF2B5EF4-FFF2-40B4-BE49-F238E27FC236}">
-                <a16:creationId xmlns:a16="http://schemas.microsoft.com/office/drawing/2014/main" id="{75F02ADF-BD30-46B7-8647-B2ADF3D75792}"/>
+                <a16:creationId xmlns:a16="http://schemas.microsoft.com/office/drawing/2014/main" id="{BF46D232-E5B0-4FEF-874F-AE854B351BA8}"/>
               </a:ext>
             </a:extLst>
           </p:cNvPr>
@@ -7649,7 +8331,7 @@
           <p:cNvPr id="44" name="diagram-123">
             <a:extLst xmlns:a="http://schemas.openxmlformats.org/drawingml/2006/main">
               <a:ext uri="{FF2B5EF4-FFF2-40B4-BE49-F238E27FC236}">
-                <a16:creationId xmlns:a16="http://schemas.microsoft.com/office/drawing/2014/main" id="{95AE19AC-6F63-4587-92AC-728D4A33393A}"/>
+                <a16:creationId xmlns:a16="http://schemas.microsoft.com/office/drawing/2014/main" id="{36FAA789-C9EE-4886-9D91-A039A7A81851}"/>
               </a:ext>
             </a:extLst>
           </p:cNvPr>
@@ -7681,7 +8363,7 @@
           <p:cNvPr id="45" name="diagram-124">
             <a:extLst xmlns:a="http://schemas.openxmlformats.org/drawingml/2006/main">
               <a:ext uri="{FF2B5EF4-FFF2-40B4-BE49-F238E27FC236}">
-                <a16:creationId xmlns:a16="http://schemas.microsoft.com/office/drawing/2014/main" id="{8E2062C3-8AE8-4574-B449-31D8DA29ABF5}"/>
+                <a16:creationId xmlns:a16="http://schemas.microsoft.com/office/drawing/2014/main" id="{EA354ADE-75C6-45D7-9558-FE43D75E0140}"/>
               </a:ext>
             </a:extLst>
           </p:cNvPr>
@@ -7713,7 +8395,7 @@
           <p:cNvPr id="46" name="diagram-125">
             <a:extLst xmlns:a="http://schemas.openxmlformats.org/drawingml/2006/main">
               <a:ext uri="{FF2B5EF4-FFF2-40B4-BE49-F238E27FC236}">
-                <a16:creationId xmlns:a16="http://schemas.microsoft.com/office/drawing/2014/main" id="{F83B9D5F-CCBD-4EB6-8FE5-F44A3ED9645B}"/>
+                <a16:creationId xmlns:a16="http://schemas.microsoft.com/office/drawing/2014/main" id="{432BB227-4655-4847-A723-CA7A30673EFB}"/>
               </a:ext>
             </a:extLst>
           </p:cNvPr>
@@ -7745,7 +8427,7 @@
           <p:cNvPr id="47" name="diagram-126">
             <a:extLst xmlns:a="http://schemas.openxmlformats.org/drawingml/2006/main">
               <a:ext uri="{FF2B5EF4-FFF2-40B4-BE49-F238E27FC236}">
-                <a16:creationId xmlns:a16="http://schemas.microsoft.com/office/drawing/2014/main" id="{A2F2FDB7-F408-42EF-A439-E51BC1B04D08}"/>
+                <a16:creationId xmlns:a16="http://schemas.microsoft.com/office/drawing/2014/main" id="{C4F360BB-7192-4480-86F7-99529EE2BCC9}"/>
               </a:ext>
             </a:extLst>
           </p:cNvPr>
@@ -7777,7 +8459,7 @@
           <p:cNvPr id="48" name="diagram-127">
             <a:extLst xmlns:a="http://schemas.openxmlformats.org/drawingml/2006/main">
               <a:ext uri="{FF2B5EF4-FFF2-40B4-BE49-F238E27FC236}">
-                <a16:creationId xmlns:a16="http://schemas.microsoft.com/office/drawing/2014/main" id="{C2D8DBEE-EFDF-4921-8DAE-52AF4EFD5131}"/>
+                <a16:creationId xmlns:a16="http://schemas.microsoft.com/office/drawing/2014/main" id="{4B538873-09A0-499A-8B20-6235FFA50A73}"/>
               </a:ext>
             </a:extLst>
           </p:cNvPr>
@@ -7809,7 +8491,7 @@
           <p:cNvPr id="49" name="diagram-128">
             <a:extLst xmlns:a="http://schemas.openxmlformats.org/drawingml/2006/main">
               <a:ext uri="{FF2B5EF4-FFF2-40B4-BE49-F238E27FC236}">
-                <a16:creationId xmlns:a16="http://schemas.microsoft.com/office/drawing/2014/main" id="{9896CCD0-4202-47F0-A5FA-4073E595317E}"/>
+                <a16:creationId xmlns:a16="http://schemas.microsoft.com/office/drawing/2014/main" id="{EB5B6D6C-3F8C-4F35-8D12-874B69C9C4BC}"/>
               </a:ext>
             </a:extLst>
           </p:cNvPr>
@@ -7841,7 +8523,7 @@
           <p:cNvPr id="50" name="diagram-129">
             <a:extLst xmlns:a="http://schemas.openxmlformats.org/drawingml/2006/main">
               <a:ext uri="{FF2B5EF4-FFF2-40B4-BE49-F238E27FC236}">
-                <a16:creationId xmlns:a16="http://schemas.microsoft.com/office/drawing/2014/main" id="{BC8CE754-C74E-4E59-A672-015D411426A6}"/>
+                <a16:creationId xmlns:a16="http://schemas.microsoft.com/office/drawing/2014/main" id="{4F540C00-F533-4D8E-9196-D39718E652B2}"/>
               </a:ext>
             </a:extLst>
           </p:cNvPr>
@@ -7873,7 +8555,7 @@
           <p:cNvPr id="51" name="diagram-130">
             <a:extLst xmlns:a="http://schemas.openxmlformats.org/drawingml/2006/main">
               <a:ext uri="{FF2B5EF4-FFF2-40B4-BE49-F238E27FC236}">
-                <a16:creationId xmlns:a16="http://schemas.microsoft.com/office/drawing/2014/main" id="{C901F530-F683-445C-BE32-A3347E25369F}"/>
+                <a16:creationId xmlns:a16="http://schemas.microsoft.com/office/drawing/2014/main" id="{3F35D0CB-C701-42A7-9635-FD12C6240D71}"/>
               </a:ext>
             </a:extLst>
           </p:cNvPr>
@@ -7905,7 +8587,7 @@
           <p:cNvPr id="52" name="diagram-131">
             <a:extLst xmlns:a="http://schemas.openxmlformats.org/drawingml/2006/main">
               <a:ext uri="{FF2B5EF4-FFF2-40B4-BE49-F238E27FC236}">
-                <a16:creationId xmlns:a16="http://schemas.microsoft.com/office/drawing/2014/main" id="{88268C28-E6B8-4156-8611-9A0685432101}"/>
+                <a16:creationId xmlns:a16="http://schemas.microsoft.com/office/drawing/2014/main" id="{CA0B8F77-A6FD-4397-BC78-B70B6E49D6C1}"/>
               </a:ext>
             </a:extLst>
           </p:cNvPr>
@@ -7937,7 +8619,7 @@
           <p:cNvPr id="53" name="diagram-132">
             <a:extLst xmlns:a="http://schemas.openxmlformats.org/drawingml/2006/main">
               <a:ext uri="{FF2B5EF4-FFF2-40B4-BE49-F238E27FC236}">
-                <a16:creationId xmlns:a16="http://schemas.microsoft.com/office/drawing/2014/main" id="{E59679A3-A885-4629-9DDF-A4C6528B32FF}"/>
+                <a16:creationId xmlns:a16="http://schemas.microsoft.com/office/drawing/2014/main" id="{B314053B-DA46-451A-BA10-59B7E15B0DDC}"/>
               </a:ext>
             </a:extLst>
           </p:cNvPr>
@@ -7969,7 +8651,7 @@
           <p:cNvPr id="54" name="diagram-133">
             <a:extLst xmlns:a="http://schemas.openxmlformats.org/drawingml/2006/main">
               <a:ext uri="{FF2B5EF4-FFF2-40B4-BE49-F238E27FC236}">
-                <a16:creationId xmlns:a16="http://schemas.microsoft.com/office/drawing/2014/main" id="{2F6E45D5-FC3D-4BA5-AD94-0293B56F0361}"/>
+                <a16:creationId xmlns:a16="http://schemas.microsoft.com/office/drawing/2014/main" id="{7EDBC505-D219-419F-BA07-E5521C1B9220}"/>
               </a:ext>
             </a:extLst>
           </p:cNvPr>
@@ -8001,7 +8683,7 @@
           <p:cNvPr id="55" name="diagram-134">
             <a:extLst xmlns:a="http://schemas.openxmlformats.org/drawingml/2006/main">
               <a:ext uri="{FF2B5EF4-FFF2-40B4-BE49-F238E27FC236}">
-                <a16:creationId xmlns:a16="http://schemas.microsoft.com/office/drawing/2014/main" id="{08AB4CB3-D942-4F2E-B87D-1C460C2D492F}"/>
+                <a16:creationId xmlns:a16="http://schemas.microsoft.com/office/drawing/2014/main" id="{9A87508A-AE4A-461D-9174-63D313C8199F}"/>
               </a:ext>
             </a:extLst>
           </p:cNvPr>
@@ -8033,7 +8715,7 @@
           <p:cNvPr id="56" name="diagram-135">
             <a:extLst xmlns:a="http://schemas.openxmlformats.org/drawingml/2006/main">
               <a:ext uri="{FF2B5EF4-FFF2-40B4-BE49-F238E27FC236}">
-                <a16:creationId xmlns:a16="http://schemas.microsoft.com/office/drawing/2014/main" id="{62393CCE-98A1-4506-8750-7F03EE1192BB}"/>
+                <a16:creationId xmlns:a16="http://schemas.microsoft.com/office/drawing/2014/main" id="{08C4268A-0B7F-45E7-9BF9-2337888F5926}"/>
               </a:ext>
             </a:extLst>
           </p:cNvPr>
@@ -8065,7 +8747,7 @@
           <p:cNvPr id="57" name="diagram-136">
             <a:extLst xmlns:a="http://schemas.openxmlformats.org/drawingml/2006/main">
               <a:ext uri="{FF2B5EF4-FFF2-40B4-BE49-F238E27FC236}">
-                <a16:creationId xmlns:a16="http://schemas.microsoft.com/office/drawing/2014/main" id="{B73CC200-B7B4-462E-9646-AE890E06B404}"/>
+                <a16:creationId xmlns:a16="http://schemas.microsoft.com/office/drawing/2014/main" id="{53BAC801-F0BB-4AC1-BFC2-977010E139E1}"/>
               </a:ext>
             </a:extLst>
           </p:cNvPr>
@@ -8097,7 +8779,7 @@
           <p:cNvPr id="58" name="diagram-137">
             <a:extLst xmlns:a="http://schemas.openxmlformats.org/drawingml/2006/main">
               <a:ext uri="{FF2B5EF4-FFF2-40B4-BE49-F238E27FC236}">
-                <a16:creationId xmlns:a16="http://schemas.microsoft.com/office/drawing/2014/main" id="{053BE230-F1D2-4596-8438-9E74ED512A72}"/>
+                <a16:creationId xmlns:a16="http://schemas.microsoft.com/office/drawing/2014/main" id="{58BA4C03-8A69-4FFA-8F32-182DD7873D00}"/>
               </a:ext>
             </a:extLst>
           </p:cNvPr>
@@ -8129,7 +8811,7 @@
           <p:cNvPr id="59" name="diagram-138">
             <a:extLst xmlns:a="http://schemas.openxmlformats.org/drawingml/2006/main">
               <a:ext uri="{FF2B5EF4-FFF2-40B4-BE49-F238E27FC236}">
-                <a16:creationId xmlns:a16="http://schemas.microsoft.com/office/drawing/2014/main" id="{D98EDE75-A3DC-4576-B9B3-087C599F51FB}"/>
+                <a16:creationId xmlns:a16="http://schemas.microsoft.com/office/drawing/2014/main" id="{D29D9C6A-FD25-4D24-9F06-0994A8A84A8F}"/>
               </a:ext>
             </a:extLst>
           </p:cNvPr>
@@ -8161,7 +8843,7 @@
           <p:cNvPr id="60" name="diagram-139">
             <a:extLst xmlns:a="http://schemas.openxmlformats.org/drawingml/2006/main">
               <a:ext uri="{FF2B5EF4-FFF2-40B4-BE49-F238E27FC236}">
-                <a16:creationId xmlns:a16="http://schemas.microsoft.com/office/drawing/2014/main" id="{2DA84331-0765-4BBE-91A1-49657C29C18B}"/>
+                <a16:creationId xmlns:a16="http://schemas.microsoft.com/office/drawing/2014/main" id="{0DC7F9BB-BE3D-41CF-91B1-1A0F9EAE88D8}"/>
               </a:ext>
             </a:extLst>
           </p:cNvPr>
@@ -8193,7 +8875,7 @@
           <p:cNvPr id="61" name="diagram-140">
             <a:extLst xmlns:a="http://schemas.openxmlformats.org/drawingml/2006/main">
               <a:ext uri="{FF2B5EF4-FFF2-40B4-BE49-F238E27FC236}">
-                <a16:creationId xmlns:a16="http://schemas.microsoft.com/office/drawing/2014/main" id="{A6229BE4-00FF-4E63-849C-0F026707C6BC}"/>
+                <a16:creationId xmlns:a16="http://schemas.microsoft.com/office/drawing/2014/main" id="{30E7F47C-01D9-4B29-8356-4EC8C47E5215}"/>
               </a:ext>
             </a:extLst>
           </p:cNvPr>
@@ -8225,7 +8907,7 @@
           <p:cNvPr id="62" name="diagram-141">
             <a:extLst xmlns:a="http://schemas.openxmlformats.org/drawingml/2006/main">
               <a:ext uri="{FF2B5EF4-FFF2-40B4-BE49-F238E27FC236}">
-                <a16:creationId xmlns:a16="http://schemas.microsoft.com/office/drawing/2014/main" id="{C0B00F17-B910-423D-81F5-F1461B23B643}"/>
+                <a16:creationId xmlns:a16="http://schemas.microsoft.com/office/drawing/2014/main" id="{C2576CDE-3936-43CC-9F8F-BE6363E14E9C}"/>
               </a:ext>
             </a:extLst>
           </p:cNvPr>
@@ -8257,7 +8939,7 @@
           <p:cNvPr id="63" name="diagram-142">
             <a:extLst xmlns:a="http://schemas.openxmlformats.org/drawingml/2006/main">
               <a:ext uri="{FF2B5EF4-FFF2-40B4-BE49-F238E27FC236}">
-                <a16:creationId xmlns:a16="http://schemas.microsoft.com/office/drawing/2014/main" id="{C2EAF385-C1DC-47A7-9634-CE7715F96690}"/>
+                <a16:creationId xmlns:a16="http://schemas.microsoft.com/office/drawing/2014/main" id="{E9D9E8A0-5DDF-43D2-B475-514BE5618FF8}"/>
               </a:ext>
             </a:extLst>
           </p:cNvPr>
@@ -8289,7 +8971,7 @@
           <p:cNvPr id="64" name="diagram-143">
             <a:extLst xmlns:a="http://schemas.openxmlformats.org/drawingml/2006/main">
               <a:ext uri="{FF2B5EF4-FFF2-40B4-BE49-F238E27FC236}">
-                <a16:creationId xmlns:a16="http://schemas.microsoft.com/office/drawing/2014/main" id="{3575F701-96AD-4258-98AC-F25045E86699}"/>
+                <a16:creationId xmlns:a16="http://schemas.microsoft.com/office/drawing/2014/main" id="{5F25CDFF-4BB6-4E22-B02F-E699282CA2E9}"/>
               </a:ext>
             </a:extLst>
           </p:cNvPr>
@@ -8321,7 +9003,7 @@
           <p:cNvPr id="65" name="diagram-144">
             <a:extLst xmlns:a="http://schemas.openxmlformats.org/drawingml/2006/main">
               <a:ext uri="{FF2B5EF4-FFF2-40B4-BE49-F238E27FC236}">
-                <a16:creationId xmlns:a16="http://schemas.microsoft.com/office/drawing/2014/main" id="{1A186DB4-2E71-4877-9E55-AFEC7EE5E42A}"/>
+                <a16:creationId xmlns:a16="http://schemas.microsoft.com/office/drawing/2014/main" id="{2EEAD6A6-5F1B-4B49-95F3-5B7C55CF6490}"/>
               </a:ext>
             </a:extLst>
           </p:cNvPr>
@@ -8353,7 +9035,7 @@
           <p:cNvPr id="66" name="diagram-145">
             <a:extLst xmlns:a="http://schemas.openxmlformats.org/drawingml/2006/main">
               <a:ext uri="{FF2B5EF4-FFF2-40B4-BE49-F238E27FC236}">
-                <a16:creationId xmlns:a16="http://schemas.microsoft.com/office/drawing/2014/main" id="{850881B8-5DAF-4845-8261-A7170E35033A}"/>
+                <a16:creationId xmlns:a16="http://schemas.microsoft.com/office/drawing/2014/main" id="{CC90D1FC-72A3-4067-831E-1EF3A1345DC0}"/>
               </a:ext>
             </a:extLst>
           </p:cNvPr>
@@ -8385,7 +9067,7 @@
           <p:cNvPr id="67" name="diagram-146">
             <a:extLst xmlns:a="http://schemas.openxmlformats.org/drawingml/2006/main">
               <a:ext uri="{FF2B5EF4-FFF2-40B4-BE49-F238E27FC236}">
-                <a16:creationId xmlns:a16="http://schemas.microsoft.com/office/drawing/2014/main" id="{74F2F301-C618-40FB-A0E5-D9EA9635800C}"/>
+                <a16:creationId xmlns:a16="http://schemas.microsoft.com/office/drawing/2014/main" id="{BF0D035B-FC2F-4C11-929D-8873C8B20905}"/>
               </a:ext>
             </a:extLst>
           </p:cNvPr>
@@ -8417,7 +9099,7 @@
           <p:cNvPr id="68" name="diagram-147">
             <a:extLst xmlns:a="http://schemas.openxmlformats.org/drawingml/2006/main">
               <a:ext uri="{FF2B5EF4-FFF2-40B4-BE49-F238E27FC236}">
-                <a16:creationId xmlns:a16="http://schemas.microsoft.com/office/drawing/2014/main" id="{B4150D0B-5597-45EE-9AD4-A260151C13E7}"/>
+                <a16:creationId xmlns:a16="http://schemas.microsoft.com/office/drawing/2014/main" id="{F89DB590-E1DD-4E5D-AB00-D03A2221314C}"/>
               </a:ext>
             </a:extLst>
           </p:cNvPr>
@@ -8449,7 +9131,7 @@
           <p:cNvPr id="69" name="diagram-148">
             <a:extLst xmlns:a="http://schemas.openxmlformats.org/drawingml/2006/main">
               <a:ext uri="{FF2B5EF4-FFF2-40B4-BE49-F238E27FC236}">
-                <a16:creationId xmlns:a16="http://schemas.microsoft.com/office/drawing/2014/main" id="{3C373DBE-4EB8-414D-8C7E-73B43B1E8382}"/>
+                <a16:creationId xmlns:a16="http://schemas.microsoft.com/office/drawing/2014/main" id="{5B297AB3-F1C3-4B73-A1BD-134D2BE508B5}"/>
               </a:ext>
             </a:extLst>
           </p:cNvPr>
@@ -8481,7 +9163,7 @@
           <p:cNvPr id="70" name="diagram-149">
             <a:extLst xmlns:a="http://schemas.openxmlformats.org/drawingml/2006/main">
               <a:ext uri="{FF2B5EF4-FFF2-40B4-BE49-F238E27FC236}">
-                <a16:creationId xmlns:a16="http://schemas.microsoft.com/office/drawing/2014/main" id="{F04C4754-88D0-48B4-9E0F-1ED63AB7EBE1}"/>
+                <a16:creationId xmlns:a16="http://schemas.microsoft.com/office/drawing/2014/main" id="{50798474-B2D9-454C-AD72-0E6D82170D53}"/>
               </a:ext>
             </a:extLst>
           </p:cNvPr>
@@ -8513,7 +9195,7 @@
           <p:cNvPr id="71" name="diagram-150">
             <a:extLst xmlns:a="http://schemas.openxmlformats.org/drawingml/2006/main">
               <a:ext uri="{FF2B5EF4-FFF2-40B4-BE49-F238E27FC236}">
-                <a16:creationId xmlns:a16="http://schemas.microsoft.com/office/drawing/2014/main" id="{14ED1EED-C236-4581-A95F-226199B233F4}"/>
+                <a16:creationId xmlns:a16="http://schemas.microsoft.com/office/drawing/2014/main" id="{2EF28E0B-E83F-4B04-8EBC-ED4FC0F015E7}"/>
               </a:ext>
             </a:extLst>
           </p:cNvPr>
@@ -8545,7 +9227,7 @@
           <p:cNvPr id="72" name="diagram-151">
             <a:extLst xmlns:a="http://schemas.openxmlformats.org/drawingml/2006/main">
               <a:ext uri="{FF2B5EF4-FFF2-40B4-BE49-F238E27FC236}">
-                <a16:creationId xmlns:a16="http://schemas.microsoft.com/office/drawing/2014/main" id="{95EE3994-98C5-4A67-B955-953CEBD3C285}"/>
+                <a16:creationId xmlns:a16="http://schemas.microsoft.com/office/drawing/2014/main" id="{8455EA78-0F07-43F2-B45F-4C503E19F7E3}"/>
               </a:ext>
             </a:extLst>
           </p:cNvPr>
@@ -8577,7 +9259,7 @@
           <p:cNvPr id="73" name="diagram-152">
             <a:extLst xmlns:a="http://schemas.openxmlformats.org/drawingml/2006/main">
               <a:ext uri="{FF2B5EF4-FFF2-40B4-BE49-F238E27FC236}">
-                <a16:creationId xmlns:a16="http://schemas.microsoft.com/office/drawing/2014/main" id="{2023C497-C125-4F15-9B83-3A68960D6C6D}"/>
+                <a16:creationId xmlns:a16="http://schemas.microsoft.com/office/drawing/2014/main" id="{80ABA3E8-B194-490D-BAD8-F3AA1D19D41E}"/>
               </a:ext>
             </a:extLst>
           </p:cNvPr>
@@ -8609,7 +9291,7 @@
           <p:cNvPr id="74" name="diagram-153">
             <a:extLst xmlns:a="http://schemas.openxmlformats.org/drawingml/2006/main">
               <a:ext uri="{FF2B5EF4-FFF2-40B4-BE49-F238E27FC236}">
-                <a16:creationId xmlns:a16="http://schemas.microsoft.com/office/drawing/2014/main" id="{75A89089-921F-45D2-97F7-D791745EDB8D}"/>
+                <a16:creationId xmlns:a16="http://schemas.microsoft.com/office/drawing/2014/main" id="{13ACD228-495E-456B-85A4-679CF4ED8B7A}"/>
               </a:ext>
             </a:extLst>
           </p:cNvPr>
@@ -8641,7 +9323,7 @@
           <p:cNvPr id="75" name="diagram-154">
             <a:extLst xmlns:a="http://schemas.openxmlformats.org/drawingml/2006/main">
               <a:ext uri="{FF2B5EF4-FFF2-40B4-BE49-F238E27FC236}">
-                <a16:creationId xmlns:a16="http://schemas.microsoft.com/office/drawing/2014/main" id="{697467A2-118F-47E2-9952-BE8F09850380}"/>
+                <a16:creationId xmlns:a16="http://schemas.microsoft.com/office/drawing/2014/main" id="{9D87DF17-E6FD-4D60-938C-E37BA5066102}"/>
               </a:ext>
             </a:extLst>
           </p:cNvPr>
@@ -8673,7 +9355,7 @@
           <p:cNvPr id="76" name="diagram-155">
             <a:extLst xmlns:a="http://schemas.openxmlformats.org/drawingml/2006/main">
               <a:ext uri="{FF2B5EF4-FFF2-40B4-BE49-F238E27FC236}">
-                <a16:creationId xmlns:a16="http://schemas.microsoft.com/office/drawing/2014/main" id="{3B921C2A-5F95-4B12-9F93-D628D415865A}"/>
+                <a16:creationId xmlns:a16="http://schemas.microsoft.com/office/drawing/2014/main" id="{60781174-4271-49C7-9EB2-076A339C0EDB}"/>
               </a:ext>
             </a:extLst>
           </p:cNvPr>
@@ -8705,7 +9387,7 @@
           <p:cNvPr id="77" name="diagram-156">
             <a:extLst xmlns:a="http://schemas.openxmlformats.org/drawingml/2006/main">
               <a:ext uri="{FF2B5EF4-FFF2-40B4-BE49-F238E27FC236}">
-                <a16:creationId xmlns:a16="http://schemas.microsoft.com/office/drawing/2014/main" id="{91B57919-F895-49FC-B832-2B4E5BD1377D}"/>
+                <a16:creationId xmlns:a16="http://schemas.microsoft.com/office/drawing/2014/main" id="{2333E996-9814-4F0B-8FFD-9782D8F0EB13}"/>
               </a:ext>
             </a:extLst>
           </p:cNvPr>
@@ -8737,7 +9419,7 @@
           <p:cNvPr id="78" name="diagram-157">
             <a:extLst xmlns:a="http://schemas.openxmlformats.org/drawingml/2006/main">
               <a:ext uri="{FF2B5EF4-FFF2-40B4-BE49-F238E27FC236}">
-                <a16:creationId xmlns:a16="http://schemas.microsoft.com/office/drawing/2014/main" id="{C253B9E9-C7E0-4479-9B93-2E061CA33E05}"/>
+                <a16:creationId xmlns:a16="http://schemas.microsoft.com/office/drawing/2014/main" id="{E4727171-2C22-4671-8E96-0F5DFA8B5646}"/>
               </a:ext>
             </a:extLst>
           </p:cNvPr>
@@ -8769,7 +9451,7 @@
           <p:cNvPr id="79" name="diagram-158">
             <a:extLst xmlns:a="http://schemas.openxmlformats.org/drawingml/2006/main">
               <a:ext uri="{FF2B5EF4-FFF2-40B4-BE49-F238E27FC236}">
-                <a16:creationId xmlns:a16="http://schemas.microsoft.com/office/drawing/2014/main" id="{51476EEF-67DC-4E36-9D68-33CE8508B2BF}"/>
+                <a16:creationId xmlns:a16="http://schemas.microsoft.com/office/drawing/2014/main" id="{4322EACC-80B7-49FD-B453-20C0F81FDFF7}"/>
               </a:ext>
             </a:extLst>
           </p:cNvPr>
@@ -8801,7 +9483,7 @@
           <p:cNvPr id="80" name="diagram-159">
             <a:extLst xmlns:a="http://schemas.openxmlformats.org/drawingml/2006/main">
               <a:ext uri="{FF2B5EF4-FFF2-40B4-BE49-F238E27FC236}">
-                <a16:creationId xmlns:a16="http://schemas.microsoft.com/office/drawing/2014/main" id="{43CA3552-8BC9-47E1-8D98-0A4723C0792F}"/>
+                <a16:creationId xmlns:a16="http://schemas.microsoft.com/office/drawing/2014/main" id="{6A04A4C6-84CD-433D-BC78-77626A0AE035}"/>
               </a:ext>
             </a:extLst>
           </p:cNvPr>
@@ -8833,7 +9515,7 @@
           <p:cNvPr id="81" name="diagram-160">
             <a:extLst xmlns:a="http://schemas.openxmlformats.org/drawingml/2006/main">
               <a:ext uri="{FF2B5EF4-FFF2-40B4-BE49-F238E27FC236}">
-                <a16:creationId xmlns:a16="http://schemas.microsoft.com/office/drawing/2014/main" id="{C3ECA693-B75B-4014-B0DC-B7C594630D8B}"/>
+                <a16:creationId xmlns:a16="http://schemas.microsoft.com/office/drawing/2014/main" id="{870B2F28-DC87-4BF3-B6D9-CF53A600D4BA}"/>
               </a:ext>
             </a:extLst>
           </p:cNvPr>
@@ -8865,7 +9547,7 @@
           <p:cNvPr id="82" name="diagram-161">
             <a:extLst xmlns:a="http://schemas.openxmlformats.org/drawingml/2006/main">
               <a:ext uri="{FF2B5EF4-FFF2-40B4-BE49-F238E27FC236}">
-                <a16:creationId xmlns:a16="http://schemas.microsoft.com/office/drawing/2014/main" id="{37ECC3B6-2BD6-4F19-ACCB-52078A7B082C}"/>
+                <a16:creationId xmlns:a16="http://schemas.microsoft.com/office/drawing/2014/main" id="{4A0EBD2D-F410-49F6-848E-18782CC0DF69}"/>
               </a:ext>
             </a:extLst>
           </p:cNvPr>
@@ -8897,7 +9579,7 @@
           <p:cNvPr id="83" name="diagram-162">
             <a:extLst xmlns:a="http://schemas.openxmlformats.org/drawingml/2006/main">
               <a:ext uri="{FF2B5EF4-FFF2-40B4-BE49-F238E27FC236}">
-                <a16:creationId xmlns:a16="http://schemas.microsoft.com/office/drawing/2014/main" id="{10A9A3BC-1AD1-442E-97B4-40883D7C0A4D}"/>
+                <a16:creationId xmlns:a16="http://schemas.microsoft.com/office/drawing/2014/main" id="{BA042D06-970B-41AD-9445-4344FBC59155}"/>
               </a:ext>
             </a:extLst>
           </p:cNvPr>
@@ -8929,7 +9611,7 @@
           <p:cNvPr id="84" name="diagram-163">
             <a:extLst xmlns:a="http://schemas.openxmlformats.org/drawingml/2006/main">
               <a:ext uri="{FF2B5EF4-FFF2-40B4-BE49-F238E27FC236}">
-                <a16:creationId xmlns:a16="http://schemas.microsoft.com/office/drawing/2014/main" id="{896EF50A-BA72-458A-AE75-557A2B082CD3}"/>
+                <a16:creationId xmlns:a16="http://schemas.microsoft.com/office/drawing/2014/main" id="{51ED9EC6-567C-44C9-B4BF-B4B62AEFB1A2}"/>
               </a:ext>
             </a:extLst>
           </p:cNvPr>
@@ -8961,7 +9643,7 @@
           <p:cNvPr id="85" name="diagram-164">
             <a:extLst xmlns:a="http://schemas.openxmlformats.org/drawingml/2006/main">
               <a:ext uri="{FF2B5EF4-FFF2-40B4-BE49-F238E27FC236}">
-                <a16:creationId xmlns:a16="http://schemas.microsoft.com/office/drawing/2014/main" id="{CA4C6A7F-DDA7-4687-B34B-7A10D9E9A5CC}"/>
+                <a16:creationId xmlns:a16="http://schemas.microsoft.com/office/drawing/2014/main" id="{C124EFB0-5EDD-4F79-93C6-F7CF2F3C01DD}"/>
               </a:ext>
             </a:extLst>
           </p:cNvPr>
@@ -8993,7 +9675,7 @@
           <p:cNvPr id="86" name="diagram-165">
             <a:extLst xmlns:a="http://schemas.openxmlformats.org/drawingml/2006/main">
               <a:ext uri="{FF2B5EF4-FFF2-40B4-BE49-F238E27FC236}">
-                <a16:creationId xmlns:a16="http://schemas.microsoft.com/office/drawing/2014/main" id="{9B58F12D-C3E8-4473-ABA2-A68ABC2C8D2F}"/>
+                <a16:creationId xmlns:a16="http://schemas.microsoft.com/office/drawing/2014/main" id="{3863F3C2-51BD-420F-8D14-6E36B837F4E3}"/>
               </a:ext>
             </a:extLst>
           </p:cNvPr>
@@ -9025,7 +9707,7 @@
           <p:cNvPr id="87" name="diagram-166">
             <a:extLst xmlns:a="http://schemas.openxmlformats.org/drawingml/2006/main">
               <a:ext uri="{FF2B5EF4-FFF2-40B4-BE49-F238E27FC236}">
-                <a16:creationId xmlns:a16="http://schemas.microsoft.com/office/drawing/2014/main" id="{8E949026-1F78-4B70-B03E-A81289B93522}"/>
+                <a16:creationId xmlns:a16="http://schemas.microsoft.com/office/drawing/2014/main" id="{9DE00161-DDFF-4DBB-AD01-52750C5DF957}"/>
               </a:ext>
             </a:extLst>
           </p:cNvPr>
@@ -9057,7 +9739,7 @@
           <p:cNvPr id="88" name="diagram-167">
             <a:extLst xmlns:a="http://schemas.openxmlformats.org/drawingml/2006/main">
               <a:ext uri="{FF2B5EF4-FFF2-40B4-BE49-F238E27FC236}">
-                <a16:creationId xmlns:a16="http://schemas.microsoft.com/office/drawing/2014/main" id="{1CD90A8D-4918-4E53-A29C-0D245EEB0FEC}"/>
+                <a16:creationId xmlns:a16="http://schemas.microsoft.com/office/drawing/2014/main" id="{396211BE-6B0F-46B6-AA45-96C611D96C1F}"/>
               </a:ext>
             </a:extLst>
           </p:cNvPr>
@@ -9089,7 +9771,7 @@
           <p:cNvPr id="89" name="diagram-168">
             <a:extLst xmlns:a="http://schemas.openxmlformats.org/drawingml/2006/main">
               <a:ext uri="{FF2B5EF4-FFF2-40B4-BE49-F238E27FC236}">
-                <a16:creationId xmlns:a16="http://schemas.microsoft.com/office/drawing/2014/main" id="{08E9E570-7E26-45A2-B3B3-DEA339294BE4}"/>
+                <a16:creationId xmlns:a16="http://schemas.microsoft.com/office/drawing/2014/main" id="{8D008D9D-4FA0-416F-ABC2-33172EACBC42}"/>
               </a:ext>
             </a:extLst>
           </p:cNvPr>
@@ -9121,7 +9803,7 @@
           <p:cNvPr id="90" name="diagram-169">
             <a:extLst xmlns:a="http://schemas.openxmlformats.org/drawingml/2006/main">
               <a:ext uri="{FF2B5EF4-FFF2-40B4-BE49-F238E27FC236}">
-                <a16:creationId xmlns:a16="http://schemas.microsoft.com/office/drawing/2014/main" id="{3EC39128-F463-46B4-8868-457DA3251F36}"/>
+                <a16:creationId xmlns:a16="http://schemas.microsoft.com/office/drawing/2014/main" id="{2E9B448C-DA4E-4453-A29F-3B9D7E94CC55}"/>
               </a:ext>
             </a:extLst>
           </p:cNvPr>
@@ -9153,7 +9835,7 @@
           <p:cNvPr id="91" name="diagram-170">
             <a:extLst xmlns:a="http://schemas.openxmlformats.org/drawingml/2006/main">
               <a:ext uri="{FF2B5EF4-FFF2-40B4-BE49-F238E27FC236}">
-                <a16:creationId xmlns:a16="http://schemas.microsoft.com/office/drawing/2014/main" id="{0F757FA7-4773-46F3-9675-B51CB28A290E}"/>
+                <a16:creationId xmlns:a16="http://schemas.microsoft.com/office/drawing/2014/main" id="{BEB4E5A8-0A47-43CB-920C-D8E31C735C8D}"/>
               </a:ext>
             </a:extLst>
           </p:cNvPr>
@@ -9185,7 +9867,7 @@
           <p:cNvPr id="92" name="diagram-171">
             <a:extLst xmlns:a="http://schemas.openxmlformats.org/drawingml/2006/main">
               <a:ext uri="{FF2B5EF4-FFF2-40B4-BE49-F238E27FC236}">
-                <a16:creationId xmlns:a16="http://schemas.microsoft.com/office/drawing/2014/main" id="{8ACA568C-5502-4260-AA90-104CF163BC1A}"/>
+                <a16:creationId xmlns:a16="http://schemas.microsoft.com/office/drawing/2014/main" id="{E0B97BE5-4FF7-402E-B38B-35FDB30F44E9}"/>
               </a:ext>
             </a:extLst>
           </p:cNvPr>
@@ -9217,7 +9899,7 @@
           <p:cNvPr id="93" name="diagram-172">
             <a:extLst xmlns:a="http://schemas.openxmlformats.org/drawingml/2006/main">
               <a:ext uri="{FF2B5EF4-FFF2-40B4-BE49-F238E27FC236}">
-                <a16:creationId xmlns:a16="http://schemas.microsoft.com/office/drawing/2014/main" id="{3B0A1143-D022-4163-8A12-E2B373C89368}"/>
+                <a16:creationId xmlns:a16="http://schemas.microsoft.com/office/drawing/2014/main" id="{48CBF74F-FE97-49E0-BEDC-10487C1FD407}"/>
               </a:ext>
             </a:extLst>
           </p:cNvPr>
@@ -9249,7 +9931,7 @@
           <p:cNvPr id="94" name="diagram-173">
             <a:extLst xmlns:a="http://schemas.openxmlformats.org/drawingml/2006/main">
               <a:ext uri="{FF2B5EF4-FFF2-40B4-BE49-F238E27FC236}">
-                <a16:creationId xmlns:a16="http://schemas.microsoft.com/office/drawing/2014/main" id="{7451696A-522C-407A-B14A-A4E2E463569A}"/>
+                <a16:creationId xmlns:a16="http://schemas.microsoft.com/office/drawing/2014/main" id="{0685193C-EAC7-438B-B3AA-5E3BC5420334}"/>
               </a:ext>
             </a:extLst>
           </p:cNvPr>
@@ -9281,7 +9963,7 @@
           <p:cNvPr id="95" name="diagram-174">
             <a:extLst xmlns:a="http://schemas.openxmlformats.org/drawingml/2006/main">
               <a:ext uri="{FF2B5EF4-FFF2-40B4-BE49-F238E27FC236}">
-                <a16:creationId xmlns:a16="http://schemas.microsoft.com/office/drawing/2014/main" id="{F1FA9AAF-E371-4260-B523-2E297A27A77C}"/>
+                <a16:creationId xmlns:a16="http://schemas.microsoft.com/office/drawing/2014/main" id="{E068DDFC-3CF3-46CB-ABD1-88A1C832AD9E}"/>
               </a:ext>
             </a:extLst>
           </p:cNvPr>
@@ -9313,7 +9995,7 @@
           <p:cNvPr id="96" name="diagram-175">
             <a:extLst xmlns:a="http://schemas.openxmlformats.org/drawingml/2006/main">
               <a:ext uri="{FF2B5EF4-FFF2-40B4-BE49-F238E27FC236}">
-                <a16:creationId xmlns:a16="http://schemas.microsoft.com/office/drawing/2014/main" id="{67D22EF5-DB0B-4F71-B5FD-2D57FC96F3B7}"/>
+                <a16:creationId xmlns:a16="http://schemas.microsoft.com/office/drawing/2014/main" id="{A84F2E38-577D-44EE-A167-EA30A1C9E1E5}"/>
               </a:ext>
             </a:extLst>
           </p:cNvPr>
@@ -9345,7 +10027,7 @@
           <p:cNvPr id="97" name="diagram-176">
             <a:extLst xmlns:a="http://schemas.openxmlformats.org/drawingml/2006/main">
               <a:ext uri="{FF2B5EF4-FFF2-40B4-BE49-F238E27FC236}">
-                <a16:creationId xmlns:a16="http://schemas.microsoft.com/office/drawing/2014/main" id="{DDA75BEF-4DBF-4A41-970A-2340F981D38B}"/>
+                <a16:creationId xmlns:a16="http://schemas.microsoft.com/office/drawing/2014/main" id="{C1E75A12-17BE-4128-8839-6314C3881AE2}"/>
               </a:ext>
             </a:extLst>
           </p:cNvPr>
@@ -9377,7 +10059,7 @@
           <p:cNvPr id="98" name="diagram-177">
             <a:extLst xmlns:a="http://schemas.openxmlformats.org/drawingml/2006/main">
               <a:ext uri="{FF2B5EF4-FFF2-40B4-BE49-F238E27FC236}">
-                <a16:creationId xmlns:a16="http://schemas.microsoft.com/office/drawing/2014/main" id="{BA623996-936D-40A5-8BF4-A3E7C186B933}"/>
+                <a16:creationId xmlns:a16="http://schemas.microsoft.com/office/drawing/2014/main" id="{9F665AC7-3A41-47B8-BAF0-744E4DC29072}"/>
               </a:ext>
             </a:extLst>
           </p:cNvPr>
@@ -9409,7 +10091,7 @@
           <p:cNvPr id="99" name="diagram-178">
             <a:extLst xmlns:a="http://schemas.openxmlformats.org/drawingml/2006/main">
               <a:ext uri="{FF2B5EF4-FFF2-40B4-BE49-F238E27FC236}">
-                <a16:creationId xmlns:a16="http://schemas.microsoft.com/office/drawing/2014/main" id="{200767B9-3EF0-4331-BCC2-1C65892FDE97}"/>
+                <a16:creationId xmlns:a16="http://schemas.microsoft.com/office/drawing/2014/main" id="{98E4B8A0-3551-429D-8CDD-0499495997C6}"/>
               </a:ext>
             </a:extLst>
           </p:cNvPr>
@@ -9441,7 +10123,7 @@
           <p:cNvPr id="100" name="diagram-179">
             <a:extLst xmlns:a="http://schemas.openxmlformats.org/drawingml/2006/main">
               <a:ext uri="{FF2B5EF4-FFF2-40B4-BE49-F238E27FC236}">
-                <a16:creationId xmlns:a16="http://schemas.microsoft.com/office/drawing/2014/main" id="{B8EAF29D-F98B-43EA-8D8C-E309205BF9B7}"/>
+                <a16:creationId xmlns:a16="http://schemas.microsoft.com/office/drawing/2014/main" id="{E33FBE8D-32A2-4DE6-9EDF-9DB79B2F065E}"/>
               </a:ext>
             </a:extLst>
           </p:cNvPr>
@@ -9473,7 +10155,7 @@
           <p:cNvPr id="101" name="diagram-180">
             <a:extLst xmlns:a="http://schemas.openxmlformats.org/drawingml/2006/main">
               <a:ext uri="{FF2B5EF4-FFF2-40B4-BE49-F238E27FC236}">
-                <a16:creationId xmlns:a16="http://schemas.microsoft.com/office/drawing/2014/main" id="{E98241E0-2908-4F09-B819-7CAB5FCF22E4}"/>
+                <a16:creationId xmlns:a16="http://schemas.microsoft.com/office/drawing/2014/main" id="{D2D66ADA-2847-40DE-ABB0-B6FE5F10BC2C}"/>
               </a:ext>
             </a:extLst>
           </p:cNvPr>
@@ -9505,7 +10187,7 @@
           <p:cNvPr id="102" name="diagram-181">
             <a:extLst xmlns:a="http://schemas.openxmlformats.org/drawingml/2006/main">
               <a:ext uri="{FF2B5EF4-FFF2-40B4-BE49-F238E27FC236}">
-                <a16:creationId xmlns:a16="http://schemas.microsoft.com/office/drawing/2014/main" id="{A2BAE2AF-B339-4346-B77A-8E112865D66B}"/>
+                <a16:creationId xmlns:a16="http://schemas.microsoft.com/office/drawing/2014/main" id="{126DE029-6F28-44BA-A8C8-338ED0FAED89}"/>
               </a:ext>
             </a:extLst>
           </p:cNvPr>
@@ -9537,7 +10219,7 @@
           <p:cNvPr id="103" name="diagram-182">
             <a:extLst xmlns:a="http://schemas.openxmlformats.org/drawingml/2006/main">
               <a:ext uri="{FF2B5EF4-FFF2-40B4-BE49-F238E27FC236}">
-                <a16:creationId xmlns:a16="http://schemas.microsoft.com/office/drawing/2014/main" id="{B59A1476-6A74-4A7F-985A-079DDC4DFBCC}"/>
+                <a16:creationId xmlns:a16="http://schemas.microsoft.com/office/drawing/2014/main" id="{A75130C8-F739-4C27-B58A-8B9E1EE81AD3}"/>
               </a:ext>
             </a:extLst>
           </p:cNvPr>
@@ -9569,7 +10251,7 @@
           <p:cNvPr id="104" name="diagram-183">
             <a:extLst xmlns:a="http://schemas.openxmlformats.org/drawingml/2006/main">
               <a:ext uri="{FF2B5EF4-FFF2-40B4-BE49-F238E27FC236}">
-                <a16:creationId xmlns:a16="http://schemas.microsoft.com/office/drawing/2014/main" id="{7167BB74-7C3A-453D-88AC-95F031CE01A3}"/>
+                <a16:creationId xmlns:a16="http://schemas.microsoft.com/office/drawing/2014/main" id="{E22E00D4-418E-43E8-A15C-2339E37198CE}"/>
               </a:ext>
             </a:extLst>
           </p:cNvPr>
@@ -9601,7 +10283,7 @@
           <p:cNvPr id="105" name="diagram-184">
             <a:extLst xmlns:a="http://schemas.openxmlformats.org/drawingml/2006/main">
               <a:ext uri="{FF2B5EF4-FFF2-40B4-BE49-F238E27FC236}">
-                <a16:creationId xmlns:a16="http://schemas.microsoft.com/office/drawing/2014/main" id="{A08F37E1-0488-46E2-B3A9-E28BEEF393F8}"/>
+                <a16:creationId xmlns:a16="http://schemas.microsoft.com/office/drawing/2014/main" id="{D6A895E7-1179-4AAC-B509-C314D2155C63}"/>
               </a:ext>
             </a:extLst>
           </p:cNvPr>
@@ -9633,7 +10315,7 @@
           <p:cNvPr id="106" name="diagram-185">
             <a:extLst xmlns:a="http://schemas.openxmlformats.org/drawingml/2006/main">
               <a:ext uri="{FF2B5EF4-FFF2-40B4-BE49-F238E27FC236}">
-                <a16:creationId xmlns:a16="http://schemas.microsoft.com/office/drawing/2014/main" id="{D9569F19-0484-46CA-AC32-7233D7AC3C98}"/>
+                <a16:creationId xmlns:a16="http://schemas.microsoft.com/office/drawing/2014/main" id="{F72CFC75-BE38-4065-A5BE-B5129B0D8005}"/>
               </a:ext>
             </a:extLst>
           </p:cNvPr>
@@ -9665,7 +10347,7 @@
           <p:cNvPr id="107" name="diagram-186">
             <a:extLst xmlns:a="http://schemas.openxmlformats.org/drawingml/2006/main">
               <a:ext uri="{FF2B5EF4-FFF2-40B4-BE49-F238E27FC236}">
-                <a16:creationId xmlns:a16="http://schemas.microsoft.com/office/drawing/2014/main" id="{873875A0-4D4B-4EC8-A9F6-CBFCAC4FF41A}"/>
+                <a16:creationId xmlns:a16="http://schemas.microsoft.com/office/drawing/2014/main" id="{3AD45927-D44A-4E8D-B462-EEA787A9709F}"/>
               </a:ext>
             </a:extLst>
           </p:cNvPr>
@@ -9697,7 +10379,7 @@
           <p:cNvPr id="108" name="diagram-187">
             <a:extLst xmlns:a="http://schemas.openxmlformats.org/drawingml/2006/main">
               <a:ext uri="{FF2B5EF4-FFF2-40B4-BE49-F238E27FC236}">
-                <a16:creationId xmlns:a16="http://schemas.microsoft.com/office/drawing/2014/main" id="{9FBD5116-9B08-4EBA-A618-8A4CDB9E27A6}"/>
+                <a16:creationId xmlns:a16="http://schemas.microsoft.com/office/drawing/2014/main" id="{0B79B9F9-65BC-449B-A2E6-6CE5347198D5}"/>
               </a:ext>
             </a:extLst>
           </p:cNvPr>
@@ -9729,7 +10411,7 @@
           <p:cNvPr id="109" name="diagram-188">
             <a:extLst xmlns:a="http://schemas.openxmlformats.org/drawingml/2006/main">
               <a:ext uri="{FF2B5EF4-FFF2-40B4-BE49-F238E27FC236}">
-                <a16:creationId xmlns:a16="http://schemas.microsoft.com/office/drawing/2014/main" id="{5D1D5E98-EDF1-47D9-89D5-96BB61558D25}"/>
+                <a16:creationId xmlns:a16="http://schemas.microsoft.com/office/drawing/2014/main" id="{47176414-8324-44D3-9907-D47571219D61}"/>
               </a:ext>
             </a:extLst>
           </p:cNvPr>
@@ -9761,7 +10443,7 @@
           <p:cNvPr id="110" name="diagram-189">
             <a:extLst xmlns:a="http://schemas.openxmlformats.org/drawingml/2006/main">
               <a:ext uri="{FF2B5EF4-FFF2-40B4-BE49-F238E27FC236}">
-                <a16:creationId xmlns:a16="http://schemas.microsoft.com/office/drawing/2014/main" id="{5E25C6EB-3C1F-46DD-AE4D-6451299C42EF}"/>
+                <a16:creationId xmlns:a16="http://schemas.microsoft.com/office/drawing/2014/main" id="{EDA5ECDF-7E4F-4055-B885-5A9EFEA8C34F}"/>
               </a:ext>
             </a:extLst>
           </p:cNvPr>
@@ -9793,7 +10475,7 @@
           <p:cNvPr id="111" name="diagram-190">
             <a:extLst xmlns:a="http://schemas.openxmlformats.org/drawingml/2006/main">
               <a:ext uri="{FF2B5EF4-FFF2-40B4-BE49-F238E27FC236}">
-                <a16:creationId xmlns:a16="http://schemas.microsoft.com/office/drawing/2014/main" id="{D990A704-D70F-42F7-9AFB-C075D3CBEB14}"/>
+                <a16:creationId xmlns:a16="http://schemas.microsoft.com/office/drawing/2014/main" id="{3455FD99-F06D-4F3B-8446-AF612C37AEFE}"/>
               </a:ext>
             </a:extLst>
           </p:cNvPr>
@@ -9825,7 +10507,7 @@
           <p:cNvPr id="112" name="diagram-191">
             <a:extLst xmlns:a="http://schemas.openxmlformats.org/drawingml/2006/main">
               <a:ext uri="{FF2B5EF4-FFF2-40B4-BE49-F238E27FC236}">
-                <a16:creationId xmlns:a16="http://schemas.microsoft.com/office/drawing/2014/main" id="{75769980-3B22-4193-BCB1-B6938A5816DC}"/>
+                <a16:creationId xmlns:a16="http://schemas.microsoft.com/office/drawing/2014/main" id="{C3399328-13F4-40AF-99AE-0FDD521A5B81}"/>
               </a:ext>
             </a:extLst>
           </p:cNvPr>
@@ -9857,7 +10539,7 @@
           <p:cNvPr id="113" name="diagram-192">
             <a:extLst xmlns:a="http://schemas.openxmlformats.org/drawingml/2006/main">
               <a:ext uri="{FF2B5EF4-FFF2-40B4-BE49-F238E27FC236}">
-                <a16:creationId xmlns:a16="http://schemas.microsoft.com/office/drawing/2014/main" id="{8226D7B9-6C53-4AD4-B1BC-680D0118CD7D}"/>
+                <a16:creationId xmlns:a16="http://schemas.microsoft.com/office/drawing/2014/main" id="{2DA847D4-DC52-407A-90BF-E577D78AB952}"/>
               </a:ext>
             </a:extLst>
           </p:cNvPr>
@@ -9889,7 +10571,7 @@
           <p:cNvPr id="114" name="diagram-193">
             <a:extLst xmlns:a="http://schemas.openxmlformats.org/drawingml/2006/main">
               <a:ext uri="{FF2B5EF4-FFF2-40B4-BE49-F238E27FC236}">
-                <a16:creationId xmlns:a16="http://schemas.microsoft.com/office/drawing/2014/main" id="{A47076CD-D9CE-41D1-AACE-ED4279D54D77}"/>
+                <a16:creationId xmlns:a16="http://schemas.microsoft.com/office/drawing/2014/main" id="{76CB52A3-DBC8-4CFD-BF5C-85CFC3DE46B2}"/>
               </a:ext>
             </a:extLst>
           </p:cNvPr>
@@ -9921,7 +10603,7 @@
           <p:cNvPr id="115" name="diagram-194">
             <a:extLst xmlns:a="http://schemas.openxmlformats.org/drawingml/2006/main">
               <a:ext uri="{FF2B5EF4-FFF2-40B4-BE49-F238E27FC236}">
-                <a16:creationId xmlns:a16="http://schemas.microsoft.com/office/drawing/2014/main" id="{050D03CD-9EF7-430E-87E0-9E55B33BE2BC}"/>
+                <a16:creationId xmlns:a16="http://schemas.microsoft.com/office/drawing/2014/main" id="{E2ABF293-6ABE-411E-B0DF-C78581D9F1A1}"/>
               </a:ext>
             </a:extLst>
           </p:cNvPr>
@@ -9953,7 +10635,7 @@
           <p:cNvPr id="116" name="diagram-195">
             <a:extLst xmlns:a="http://schemas.openxmlformats.org/drawingml/2006/main">
               <a:ext uri="{FF2B5EF4-FFF2-40B4-BE49-F238E27FC236}">
-                <a16:creationId xmlns:a16="http://schemas.microsoft.com/office/drawing/2014/main" id="{D2E9BCC0-05D5-4660-B4CF-83AC9CB2F584}"/>
+                <a16:creationId xmlns:a16="http://schemas.microsoft.com/office/drawing/2014/main" id="{1E951005-437C-4A76-B182-34F4E0800405}"/>
               </a:ext>
             </a:extLst>
           </p:cNvPr>
@@ -9985,7 +10667,7 @@
           <p:cNvPr id="117" name="diagram-196">
             <a:extLst xmlns:a="http://schemas.openxmlformats.org/drawingml/2006/main">
               <a:ext uri="{FF2B5EF4-FFF2-40B4-BE49-F238E27FC236}">
-                <a16:creationId xmlns:a16="http://schemas.microsoft.com/office/drawing/2014/main" id="{4FE4A2B1-841F-4578-B484-C67B8B7E17D0}"/>
+                <a16:creationId xmlns:a16="http://schemas.microsoft.com/office/drawing/2014/main" id="{FE5FD986-347F-423E-9F75-CA854E36848E}"/>
               </a:ext>
             </a:extLst>
           </p:cNvPr>
@@ -10017,7 +10699,7 @@
           <p:cNvPr id="118" name="diagram-197">
             <a:extLst xmlns:a="http://schemas.openxmlformats.org/drawingml/2006/main">
               <a:ext uri="{FF2B5EF4-FFF2-40B4-BE49-F238E27FC236}">
-                <a16:creationId xmlns:a16="http://schemas.microsoft.com/office/drawing/2014/main" id="{7B28CA5E-7A2F-4E40-AE89-AA536031C826}"/>
+                <a16:creationId xmlns:a16="http://schemas.microsoft.com/office/drawing/2014/main" id="{8F7B91B0-A5AF-4FA2-A717-024A24490696}"/>
               </a:ext>
             </a:extLst>
           </p:cNvPr>
@@ -10049,7 +10731,7 @@
           <p:cNvPr id="119" name="diagram-198">
             <a:extLst xmlns:a="http://schemas.openxmlformats.org/drawingml/2006/main">
               <a:ext uri="{FF2B5EF4-FFF2-40B4-BE49-F238E27FC236}">
-                <a16:creationId xmlns:a16="http://schemas.microsoft.com/office/drawing/2014/main" id="{8F1A784F-ACFF-40D7-B165-25CCDC0B74C9}"/>
+                <a16:creationId xmlns:a16="http://schemas.microsoft.com/office/drawing/2014/main" id="{82A20739-1266-4C1B-9F7F-1D0D3436A947}"/>
               </a:ext>
             </a:extLst>
           </p:cNvPr>
@@ -10081,7 +10763,7 @@
           <p:cNvPr id="120" name="diagram-199">
             <a:extLst xmlns:a="http://schemas.openxmlformats.org/drawingml/2006/main">
               <a:ext uri="{FF2B5EF4-FFF2-40B4-BE49-F238E27FC236}">
-                <a16:creationId xmlns:a16="http://schemas.microsoft.com/office/drawing/2014/main" id="{3DA727C2-7C4C-432C-82D9-9E0ED1B8DF7F}"/>
+                <a16:creationId xmlns:a16="http://schemas.microsoft.com/office/drawing/2014/main" id="{24CA81C8-1A19-4005-AE7B-A39FF3369D01}"/>
               </a:ext>
             </a:extLst>
           </p:cNvPr>
@@ -10113,7 +10795,7 @@
           <p:cNvPr id="121" name="diagram-200">
             <a:extLst xmlns:a="http://schemas.openxmlformats.org/drawingml/2006/main">
               <a:ext uri="{FF2B5EF4-FFF2-40B4-BE49-F238E27FC236}">
-                <a16:creationId xmlns:a16="http://schemas.microsoft.com/office/drawing/2014/main" id="{025FE2B6-F2B4-49A6-A6C8-19CF185BA4B6}"/>
+                <a16:creationId xmlns:a16="http://schemas.microsoft.com/office/drawing/2014/main" id="{1FD22511-5209-4AB2-A598-588215867F37}"/>
               </a:ext>
             </a:extLst>
           </p:cNvPr>
@@ -10145,7 +10827,7 @@
           <p:cNvPr id="122" name="diagram-201">
             <a:extLst xmlns:a="http://schemas.openxmlformats.org/drawingml/2006/main">
               <a:ext uri="{FF2B5EF4-FFF2-40B4-BE49-F238E27FC236}">
-                <a16:creationId xmlns:a16="http://schemas.microsoft.com/office/drawing/2014/main" id="{33409645-80EF-4A22-B790-99DD332F4744}"/>
+                <a16:creationId xmlns:a16="http://schemas.microsoft.com/office/drawing/2014/main" id="{E1725781-BC1B-4617-9BC4-44FA4B6E6DFF}"/>
               </a:ext>
             </a:extLst>
           </p:cNvPr>
@@ -10177,7 +10859,7 @@
           <p:cNvPr id="123" name="diagram-202">
             <a:extLst xmlns:a="http://schemas.openxmlformats.org/drawingml/2006/main">
               <a:ext uri="{FF2B5EF4-FFF2-40B4-BE49-F238E27FC236}">
-                <a16:creationId xmlns:a16="http://schemas.microsoft.com/office/drawing/2014/main" id="{16808E62-A3A5-402A-AA22-33660A6C0248}"/>
+                <a16:creationId xmlns:a16="http://schemas.microsoft.com/office/drawing/2014/main" id="{32DD0F87-9782-41DC-AFF2-C48B631E61C9}"/>
               </a:ext>
             </a:extLst>
           </p:cNvPr>
@@ -10209,7 +10891,7 @@
           <p:cNvPr id="124" name="diagram-203">
             <a:extLst xmlns:a="http://schemas.openxmlformats.org/drawingml/2006/main">
               <a:ext uri="{FF2B5EF4-FFF2-40B4-BE49-F238E27FC236}">
-                <a16:creationId xmlns:a16="http://schemas.microsoft.com/office/drawing/2014/main" id="{DCB50B79-C596-4C6B-B6A2-0370BF33D4B7}"/>
+                <a16:creationId xmlns:a16="http://schemas.microsoft.com/office/drawing/2014/main" id="{973245B9-82F5-4CBB-83CC-BB8F34D3731A}"/>
               </a:ext>
             </a:extLst>
           </p:cNvPr>
@@ -10241,7 +10923,7 @@
           <p:cNvPr id="125" name="diagram-204">
             <a:extLst xmlns:a="http://schemas.openxmlformats.org/drawingml/2006/main">
               <a:ext uri="{FF2B5EF4-FFF2-40B4-BE49-F238E27FC236}">
-                <a16:creationId xmlns:a16="http://schemas.microsoft.com/office/drawing/2014/main" id="{F14ED397-AD61-46B3-90B4-B7F5F40557B9}"/>
+                <a16:creationId xmlns:a16="http://schemas.microsoft.com/office/drawing/2014/main" id="{FB7E6F94-7687-4F26-803A-381E55F824F9}"/>
               </a:ext>
             </a:extLst>
           </p:cNvPr>
@@ -10273,7 +10955,7 @@
           <p:cNvPr id="126" name="diagram-205">
             <a:extLst xmlns:a="http://schemas.openxmlformats.org/drawingml/2006/main">
               <a:ext uri="{FF2B5EF4-FFF2-40B4-BE49-F238E27FC236}">
-                <a16:creationId xmlns:a16="http://schemas.microsoft.com/office/drawing/2014/main" id="{FA0032D4-4528-4037-BF48-493CFFD7F5D0}"/>
+                <a16:creationId xmlns:a16="http://schemas.microsoft.com/office/drawing/2014/main" id="{4F23389F-6EA1-4943-B3F8-EFC8561B8E19}"/>
               </a:ext>
             </a:extLst>
           </p:cNvPr>
@@ -10305,7 +10987,7 @@
           <p:cNvPr id="127" name="diagram-206">
             <a:extLst xmlns:a="http://schemas.openxmlformats.org/drawingml/2006/main">
               <a:ext uri="{FF2B5EF4-FFF2-40B4-BE49-F238E27FC236}">
-                <a16:creationId xmlns:a16="http://schemas.microsoft.com/office/drawing/2014/main" id="{3CE12FFA-8B76-4C00-B360-000805809DA5}"/>
+                <a16:creationId xmlns:a16="http://schemas.microsoft.com/office/drawing/2014/main" id="{ED08A7D5-6CC5-4969-B1A9-8B09F9BC3FE4}"/>
               </a:ext>
             </a:extLst>
           </p:cNvPr>
@@ -10337,7 +11019,7 @@
           <p:cNvPr id="128" name="diagram-207">
             <a:extLst xmlns:a="http://schemas.openxmlformats.org/drawingml/2006/main">
               <a:ext uri="{FF2B5EF4-FFF2-40B4-BE49-F238E27FC236}">
-                <a16:creationId xmlns:a16="http://schemas.microsoft.com/office/drawing/2014/main" id="{68B58142-2C2C-4213-BFB6-7CFAEB6D98F0}"/>
+                <a16:creationId xmlns:a16="http://schemas.microsoft.com/office/drawing/2014/main" id="{5910F363-AE10-41A0-941F-A444CBC132EF}"/>
               </a:ext>
             </a:extLst>
           </p:cNvPr>
@@ -10369,7 +11051,7 @@
           <p:cNvPr id="129" name="diagram-208">
             <a:extLst xmlns:a="http://schemas.openxmlformats.org/drawingml/2006/main">
               <a:ext uri="{FF2B5EF4-FFF2-40B4-BE49-F238E27FC236}">
-                <a16:creationId xmlns:a16="http://schemas.microsoft.com/office/drawing/2014/main" id="{F589840A-A70D-460E-BCC4-8C174EFB8C31}"/>
+                <a16:creationId xmlns:a16="http://schemas.microsoft.com/office/drawing/2014/main" id="{9F710E69-D3BB-44EF-8D1C-B75143A0D132}"/>
               </a:ext>
             </a:extLst>
           </p:cNvPr>
@@ -10401,7 +11083,7 @@
           <p:cNvPr id="130" name="diagram-209">
             <a:extLst xmlns:a="http://schemas.openxmlformats.org/drawingml/2006/main">
               <a:ext uri="{FF2B5EF4-FFF2-40B4-BE49-F238E27FC236}">
-                <a16:creationId xmlns:a16="http://schemas.microsoft.com/office/drawing/2014/main" id="{AFD73291-46B9-4AF1-BD54-4822995D6F25}"/>
+                <a16:creationId xmlns:a16="http://schemas.microsoft.com/office/drawing/2014/main" id="{BAC942A3-015B-44E9-A40A-8D32E43C6785}"/>
               </a:ext>
             </a:extLst>
           </p:cNvPr>
@@ -10433,7 +11115,7 @@
           <p:cNvPr id="131" name="diagram-210">
             <a:extLst xmlns:a="http://schemas.openxmlformats.org/drawingml/2006/main">
               <a:ext uri="{FF2B5EF4-FFF2-40B4-BE49-F238E27FC236}">
-                <a16:creationId xmlns:a16="http://schemas.microsoft.com/office/drawing/2014/main" id="{16E32842-CBFE-4C6B-AF72-E71564593B19}"/>
+                <a16:creationId xmlns:a16="http://schemas.microsoft.com/office/drawing/2014/main" id="{BD2C7259-6A20-4E0B-8BEF-9B009FEB70DD}"/>
               </a:ext>
             </a:extLst>
           </p:cNvPr>
@@ -10465,7 +11147,7 @@
           <p:cNvPr id="132" name="diagram-211">
             <a:extLst xmlns:a="http://schemas.openxmlformats.org/drawingml/2006/main">
               <a:ext uri="{FF2B5EF4-FFF2-40B4-BE49-F238E27FC236}">
-                <a16:creationId xmlns:a16="http://schemas.microsoft.com/office/drawing/2014/main" id="{2CD87724-5215-470D-ABFF-C31AFB254B46}"/>
+                <a16:creationId xmlns:a16="http://schemas.microsoft.com/office/drawing/2014/main" id="{EF0E0F2B-2560-4468-A713-17EADEE6CA49}"/>
               </a:ext>
             </a:extLst>
           </p:cNvPr>
@@ -10497,7 +11179,7 @@
           <p:cNvPr id="133" name="diagram-212">
             <a:extLst xmlns:a="http://schemas.openxmlformats.org/drawingml/2006/main">
               <a:ext uri="{FF2B5EF4-FFF2-40B4-BE49-F238E27FC236}">
-                <a16:creationId xmlns:a16="http://schemas.microsoft.com/office/drawing/2014/main" id="{3006EFB8-DEEF-4A20-AC4C-6AA0F809F67C}"/>
+                <a16:creationId xmlns:a16="http://schemas.microsoft.com/office/drawing/2014/main" id="{185CDA60-F282-4527-BE6B-3638A61FA501}"/>
               </a:ext>
             </a:extLst>
           </p:cNvPr>
@@ -10529,7 +11211,7 @@
           <p:cNvPr id="134" name="diagram-213">
             <a:extLst xmlns:a="http://schemas.openxmlformats.org/drawingml/2006/main">
               <a:ext uri="{FF2B5EF4-FFF2-40B4-BE49-F238E27FC236}">
-                <a16:creationId xmlns:a16="http://schemas.microsoft.com/office/drawing/2014/main" id="{50D384C0-3461-4B99-BA3B-FA527344B060}"/>
+                <a16:creationId xmlns:a16="http://schemas.microsoft.com/office/drawing/2014/main" id="{C492231E-FDBE-460E-84FA-B45410F69B10}"/>
               </a:ext>
             </a:extLst>
           </p:cNvPr>
@@ -10561,7 +11243,7 @@
           <p:cNvPr id="135" name="diagram-214">
             <a:extLst xmlns:a="http://schemas.openxmlformats.org/drawingml/2006/main">
               <a:ext uri="{FF2B5EF4-FFF2-40B4-BE49-F238E27FC236}">
-                <a16:creationId xmlns:a16="http://schemas.microsoft.com/office/drawing/2014/main" id="{130400EC-9D23-4989-8101-C8D7B00C3BED}"/>
+                <a16:creationId xmlns:a16="http://schemas.microsoft.com/office/drawing/2014/main" id="{BC87BB39-9BBB-4904-8E31-10C975EC74E1}"/>
               </a:ext>
             </a:extLst>
           </p:cNvPr>
@@ -10593,7 +11275,7 @@
           <p:cNvPr id="136" name="diagram-215">
             <a:extLst xmlns:a="http://schemas.openxmlformats.org/drawingml/2006/main">
               <a:ext uri="{FF2B5EF4-FFF2-40B4-BE49-F238E27FC236}">
-                <a16:creationId xmlns:a16="http://schemas.microsoft.com/office/drawing/2014/main" id="{5A5FF398-BF54-43E9-B683-37493787E75C}"/>
+                <a16:creationId xmlns:a16="http://schemas.microsoft.com/office/drawing/2014/main" id="{F35AD2E7-AB01-4319-963A-B3817839D5AE}"/>
               </a:ext>
             </a:extLst>
           </p:cNvPr>
@@ -10625,7 +11307,7 @@
           <p:cNvPr id="137" name="diagram-216">
             <a:extLst xmlns:a="http://schemas.openxmlformats.org/drawingml/2006/main">
               <a:ext uri="{FF2B5EF4-FFF2-40B4-BE49-F238E27FC236}">
-                <a16:creationId xmlns:a16="http://schemas.microsoft.com/office/drawing/2014/main" id="{09F44E15-F4B0-4120-8F86-9BABA5F9B6BD}"/>
+                <a16:creationId xmlns:a16="http://schemas.microsoft.com/office/drawing/2014/main" id="{EAA9B896-3F2B-487C-9C18-F22C89B7123F}"/>
               </a:ext>
             </a:extLst>
           </p:cNvPr>
@@ -10657,7 +11339,7 @@
           <p:cNvPr id="138" name="diagram-217">
             <a:extLst xmlns:a="http://schemas.openxmlformats.org/drawingml/2006/main">
               <a:ext uri="{FF2B5EF4-FFF2-40B4-BE49-F238E27FC236}">
-                <a16:creationId xmlns:a16="http://schemas.microsoft.com/office/drawing/2014/main" id="{3A17805E-B116-4FC0-AEF5-8BEF8E935249}"/>
+                <a16:creationId xmlns:a16="http://schemas.microsoft.com/office/drawing/2014/main" id="{FAD2CB51-DC73-471D-9194-2648F9328773}"/>
               </a:ext>
             </a:extLst>
           </p:cNvPr>
@@ -10689,7 +11371,7 @@
           <p:cNvPr id="139" name="diagram-218">
             <a:extLst xmlns:a="http://schemas.openxmlformats.org/drawingml/2006/main">
               <a:ext uri="{FF2B5EF4-FFF2-40B4-BE49-F238E27FC236}">
-                <a16:creationId xmlns:a16="http://schemas.microsoft.com/office/drawing/2014/main" id="{BF960C93-6AD4-4DA2-9335-092B0B2D986B}"/>
+                <a16:creationId xmlns:a16="http://schemas.microsoft.com/office/drawing/2014/main" id="{A409D46B-101D-4D13-AD7A-9B4CE88E715A}"/>
               </a:ext>
             </a:extLst>
           </p:cNvPr>
@@ -10721,7 +11403,7 @@
           <p:cNvPr id="140" name="diagram-219">
             <a:extLst xmlns:a="http://schemas.openxmlformats.org/drawingml/2006/main">
               <a:ext uri="{FF2B5EF4-FFF2-40B4-BE49-F238E27FC236}">
-                <a16:creationId xmlns:a16="http://schemas.microsoft.com/office/drawing/2014/main" id="{9FCD4B61-E465-4EF4-9C72-130A0449BF4B}"/>
+                <a16:creationId xmlns:a16="http://schemas.microsoft.com/office/drawing/2014/main" id="{E997CA3A-69BF-4B34-A153-A9644C127C77}"/>
               </a:ext>
             </a:extLst>
           </p:cNvPr>
@@ -10753,7 +11435,7 @@
           <p:cNvPr id="141" name="diagram-220">
             <a:extLst xmlns:a="http://schemas.openxmlformats.org/drawingml/2006/main">
               <a:ext uri="{FF2B5EF4-FFF2-40B4-BE49-F238E27FC236}">
-                <a16:creationId xmlns:a16="http://schemas.microsoft.com/office/drawing/2014/main" id="{E9D3B55C-0A7E-4993-8132-F28C10817318}"/>
+                <a16:creationId xmlns:a16="http://schemas.microsoft.com/office/drawing/2014/main" id="{D14439A6-1A6A-4232-9CF3-CA2FCB7342AE}"/>
               </a:ext>
             </a:extLst>
           </p:cNvPr>
@@ -10785,7 +11467,7 @@
           <p:cNvPr id="142" name="diagram-221">
             <a:extLst xmlns:a="http://schemas.openxmlformats.org/drawingml/2006/main">
               <a:ext uri="{FF2B5EF4-FFF2-40B4-BE49-F238E27FC236}">
-                <a16:creationId xmlns:a16="http://schemas.microsoft.com/office/drawing/2014/main" id="{BD6D6F37-2B7A-4799-82A6-8CF6833CED0E}"/>
+                <a16:creationId xmlns:a16="http://schemas.microsoft.com/office/drawing/2014/main" id="{D1D7EDBE-C7DC-4B6F-AA68-A989154AF7D0}"/>
               </a:ext>
             </a:extLst>
           </p:cNvPr>
@@ -10817,7 +11499,7 @@
           <p:cNvPr id="143" name="diagram-222">
             <a:extLst xmlns:a="http://schemas.openxmlformats.org/drawingml/2006/main">
               <a:ext uri="{FF2B5EF4-FFF2-40B4-BE49-F238E27FC236}">
-                <a16:creationId xmlns:a16="http://schemas.microsoft.com/office/drawing/2014/main" id="{7873F949-0E42-4DA4-8654-34EE1EBDD404}"/>
+                <a16:creationId xmlns:a16="http://schemas.microsoft.com/office/drawing/2014/main" id="{FCBBC164-46C6-4FCC-BD7F-55FF74D181D6}"/>
               </a:ext>
             </a:extLst>
           </p:cNvPr>
@@ -10849,7 +11531,7 @@
           <p:cNvPr id="144" name="diagram-223">
             <a:extLst xmlns:a="http://schemas.openxmlformats.org/drawingml/2006/main">
               <a:ext uri="{FF2B5EF4-FFF2-40B4-BE49-F238E27FC236}">
-                <a16:creationId xmlns:a16="http://schemas.microsoft.com/office/drawing/2014/main" id="{46A80DCC-DB5D-44DF-A905-6D721322D178}"/>
+                <a16:creationId xmlns:a16="http://schemas.microsoft.com/office/drawing/2014/main" id="{59D119CE-6A5A-4806-A64E-D11812EB3E46}"/>
               </a:ext>
             </a:extLst>
           </p:cNvPr>
@@ -10881,7 +11563,7 @@
           <p:cNvPr id="145" name="diagram-224">
             <a:extLst xmlns:a="http://schemas.openxmlformats.org/drawingml/2006/main">
               <a:ext uri="{FF2B5EF4-FFF2-40B4-BE49-F238E27FC236}">
-                <a16:creationId xmlns:a16="http://schemas.microsoft.com/office/drawing/2014/main" id="{06C50989-0890-4884-AA78-78AAC9B4E7F7}"/>
+                <a16:creationId xmlns:a16="http://schemas.microsoft.com/office/drawing/2014/main" id="{18B5E05B-70EA-4C87-B6E1-3150F2555C06}"/>
               </a:ext>
             </a:extLst>
           </p:cNvPr>
@@ -10913,7 +11595,7 @@
           <p:cNvPr id="146" name="diagram-225">
             <a:extLst xmlns:a="http://schemas.openxmlformats.org/drawingml/2006/main">
               <a:ext uri="{FF2B5EF4-FFF2-40B4-BE49-F238E27FC236}">
-                <a16:creationId xmlns:a16="http://schemas.microsoft.com/office/drawing/2014/main" id="{B5A6C39C-0D7D-475E-B471-52E2C3D01B3B}"/>
+                <a16:creationId xmlns:a16="http://schemas.microsoft.com/office/drawing/2014/main" id="{7A010B78-B951-45DD-8A38-4B74ACD11610}"/>
               </a:ext>
             </a:extLst>
           </p:cNvPr>
@@ -10945,7 +11627,7 @@
           <p:cNvPr id="147" name="diagram-226">
             <a:extLst xmlns:a="http://schemas.openxmlformats.org/drawingml/2006/main">
               <a:ext uri="{FF2B5EF4-FFF2-40B4-BE49-F238E27FC236}">
-                <a16:creationId xmlns:a16="http://schemas.microsoft.com/office/drawing/2014/main" id="{14108AA0-70D2-4AA8-B88A-31671C92492D}"/>
+                <a16:creationId xmlns:a16="http://schemas.microsoft.com/office/drawing/2014/main" id="{759B90AD-0524-4135-90A4-BEEC5EB99D56}"/>
               </a:ext>
             </a:extLst>
           </p:cNvPr>
@@ -10977,7 +11659,7 @@
           <p:cNvPr id="148" name="diagram-227">
             <a:extLst xmlns:a="http://schemas.openxmlformats.org/drawingml/2006/main">
               <a:ext uri="{FF2B5EF4-FFF2-40B4-BE49-F238E27FC236}">
-                <a16:creationId xmlns:a16="http://schemas.microsoft.com/office/drawing/2014/main" id="{84FB3A9E-427B-48D6-948F-63B2D0F6DCF7}"/>
+                <a16:creationId xmlns:a16="http://schemas.microsoft.com/office/drawing/2014/main" id="{4953BB70-1AFE-429C-9DCF-A55F8160359F}"/>
               </a:ext>
             </a:extLst>
           </p:cNvPr>
@@ -11009,7 +11691,7 @@
           <p:cNvPr id="149" name="diagram-228">
             <a:extLst xmlns:a="http://schemas.openxmlformats.org/drawingml/2006/main">
               <a:ext uri="{FF2B5EF4-FFF2-40B4-BE49-F238E27FC236}">
-                <a16:creationId xmlns:a16="http://schemas.microsoft.com/office/drawing/2014/main" id="{A15D0547-49FF-4297-BB6E-C1A9A4F188BE}"/>
+                <a16:creationId xmlns:a16="http://schemas.microsoft.com/office/drawing/2014/main" id="{C772EC78-7B3E-4BD8-925E-23E973D3134E}"/>
               </a:ext>
             </a:extLst>
           </p:cNvPr>
@@ -11041,7 +11723,7 @@
           <p:cNvPr id="150" name="diagram-229">
             <a:extLst xmlns:a="http://schemas.openxmlformats.org/drawingml/2006/main">
               <a:ext uri="{FF2B5EF4-FFF2-40B4-BE49-F238E27FC236}">
-                <a16:creationId xmlns:a16="http://schemas.microsoft.com/office/drawing/2014/main" id="{E8804532-5671-4491-B26F-47506805F53F}"/>
+                <a16:creationId xmlns:a16="http://schemas.microsoft.com/office/drawing/2014/main" id="{3035501F-D8D3-470B-852E-1C8240DDADF9}"/>
               </a:ext>
             </a:extLst>
           </p:cNvPr>
@@ -11073,7 +11755,7 @@
           <p:cNvPr id="151" name="diagram-230">
             <a:extLst xmlns:a="http://schemas.openxmlformats.org/drawingml/2006/main">
               <a:ext uri="{FF2B5EF4-FFF2-40B4-BE49-F238E27FC236}">
-                <a16:creationId xmlns:a16="http://schemas.microsoft.com/office/drawing/2014/main" id="{952D7E39-1C92-4879-A33E-28C16D207A9E}"/>
+                <a16:creationId xmlns:a16="http://schemas.microsoft.com/office/drawing/2014/main" id="{00C5EC11-0DC2-4250-A195-389BF27FB24F}"/>
               </a:ext>
             </a:extLst>
           </p:cNvPr>
@@ -11105,7 +11787,7 @@
           <p:cNvPr id="152" name="diagram-231">
             <a:extLst xmlns:a="http://schemas.openxmlformats.org/drawingml/2006/main">
               <a:ext uri="{FF2B5EF4-FFF2-40B4-BE49-F238E27FC236}">
-                <a16:creationId xmlns:a16="http://schemas.microsoft.com/office/drawing/2014/main" id="{C56E5709-29DE-4A14-B76E-44B1D1142B93}"/>
+                <a16:creationId xmlns:a16="http://schemas.microsoft.com/office/drawing/2014/main" id="{8DAE9E12-0F38-4229-ACD3-9CE1213FB437}"/>
               </a:ext>
             </a:extLst>
           </p:cNvPr>
@@ -11137,7 +11819,7 @@
           <p:cNvPr id="153" name="diagram-232">
             <a:extLst xmlns:a="http://schemas.openxmlformats.org/drawingml/2006/main">
               <a:ext uri="{FF2B5EF4-FFF2-40B4-BE49-F238E27FC236}">
-                <a16:creationId xmlns:a16="http://schemas.microsoft.com/office/drawing/2014/main" id="{566A7497-1F58-402A-8C1D-EF79E31E7195}"/>
+                <a16:creationId xmlns:a16="http://schemas.microsoft.com/office/drawing/2014/main" id="{EDA359F6-BE38-4AD9-8013-EDAE5693E088}"/>
               </a:ext>
             </a:extLst>
           </p:cNvPr>
@@ -11169,7 +11851,7 @@
           <p:cNvPr id="154" name="diagram-233">
             <a:extLst xmlns:a="http://schemas.openxmlformats.org/drawingml/2006/main">
               <a:ext uri="{FF2B5EF4-FFF2-40B4-BE49-F238E27FC236}">
-                <a16:creationId xmlns:a16="http://schemas.microsoft.com/office/drawing/2014/main" id="{53068353-B077-4A49-B090-50980034BC56}"/>
+                <a16:creationId xmlns:a16="http://schemas.microsoft.com/office/drawing/2014/main" id="{24DD2472-A6B5-4CBF-8CE4-EE2FE743149C}"/>
               </a:ext>
             </a:extLst>
           </p:cNvPr>
@@ -11201,7 +11883,7 @@
           <p:cNvPr id="155" name="diagram-234">
             <a:extLst xmlns:a="http://schemas.openxmlformats.org/drawingml/2006/main">
               <a:ext uri="{FF2B5EF4-FFF2-40B4-BE49-F238E27FC236}">
-                <a16:creationId xmlns:a16="http://schemas.microsoft.com/office/drawing/2014/main" id="{DC33EC7E-8C25-468A-9CE4-368D0BB1B32D}"/>
+                <a16:creationId xmlns:a16="http://schemas.microsoft.com/office/drawing/2014/main" id="{23728FE4-FADF-4A7A-83AE-AA887A9EF3C2}"/>
               </a:ext>
             </a:extLst>
           </p:cNvPr>
@@ -11233,7 +11915,7 @@
           <p:cNvPr id="156" name="diagram-235">
             <a:extLst xmlns:a="http://schemas.openxmlformats.org/drawingml/2006/main">
               <a:ext uri="{FF2B5EF4-FFF2-40B4-BE49-F238E27FC236}">
-                <a16:creationId xmlns:a16="http://schemas.microsoft.com/office/drawing/2014/main" id="{3832F687-2ECC-4F4C-A273-4EEAC91D6A24}"/>
+                <a16:creationId xmlns:a16="http://schemas.microsoft.com/office/drawing/2014/main" id="{8590380D-A169-42D1-AB68-4E5F4A79AB40}"/>
               </a:ext>
             </a:extLst>
           </p:cNvPr>
@@ -11265,7 +11947,7 @@
           <p:cNvPr id="157" name="diagram-236">
             <a:extLst xmlns:a="http://schemas.openxmlformats.org/drawingml/2006/main">
               <a:ext uri="{FF2B5EF4-FFF2-40B4-BE49-F238E27FC236}">
-                <a16:creationId xmlns:a16="http://schemas.microsoft.com/office/drawing/2014/main" id="{B77C9110-DCF0-4068-8079-30BF27F1CDB3}"/>
+                <a16:creationId xmlns:a16="http://schemas.microsoft.com/office/drawing/2014/main" id="{30330322-3C86-4BA0-ADBD-FCC3C4F7742A}"/>
               </a:ext>
             </a:extLst>
           </p:cNvPr>
@@ -11297,7 +11979,7 @@
           <p:cNvPr id="158" name="diagram-237">
             <a:extLst xmlns:a="http://schemas.openxmlformats.org/drawingml/2006/main">
               <a:ext uri="{FF2B5EF4-FFF2-40B4-BE49-F238E27FC236}">
-                <a16:creationId xmlns:a16="http://schemas.microsoft.com/office/drawing/2014/main" id="{D642B4AB-F686-48E8-A0A6-4ED6852A6FA3}"/>
+                <a16:creationId xmlns:a16="http://schemas.microsoft.com/office/drawing/2014/main" id="{2DB057B5-AEC5-444D-92D7-BAB02A8185E2}"/>
               </a:ext>
             </a:extLst>
           </p:cNvPr>
@@ -11329,7 +12011,7 @@
           <p:cNvPr id="159" name="diagram-238">
             <a:extLst xmlns:a="http://schemas.openxmlformats.org/drawingml/2006/main">
               <a:ext uri="{FF2B5EF4-FFF2-40B4-BE49-F238E27FC236}">
-                <a16:creationId xmlns:a16="http://schemas.microsoft.com/office/drawing/2014/main" id="{AD3232D4-5BC6-4954-920F-6839046211F7}"/>
+                <a16:creationId xmlns:a16="http://schemas.microsoft.com/office/drawing/2014/main" id="{CC53E695-527A-4EBE-B412-F587C3E0F9ED}"/>
               </a:ext>
             </a:extLst>
           </p:cNvPr>
@@ -11361,7 +12043,7 @@
           <p:cNvPr id="160" name="diagram-239">
             <a:extLst xmlns:a="http://schemas.openxmlformats.org/drawingml/2006/main">
               <a:ext uri="{FF2B5EF4-FFF2-40B4-BE49-F238E27FC236}">
-                <a16:creationId xmlns:a16="http://schemas.microsoft.com/office/drawing/2014/main" id="{22FBB1C1-5F0A-4B05-8483-A1D818C7B8CA}"/>
+                <a16:creationId xmlns:a16="http://schemas.microsoft.com/office/drawing/2014/main" id="{D4BF1747-F6B6-4254-9812-22722CAFF16B}"/>
               </a:ext>
             </a:extLst>
           </p:cNvPr>
@@ -11393,7 +12075,7 @@
           <p:cNvPr id="161" name="diagram-240">
             <a:extLst xmlns:a="http://schemas.openxmlformats.org/drawingml/2006/main">
               <a:ext uri="{FF2B5EF4-FFF2-40B4-BE49-F238E27FC236}">
-                <a16:creationId xmlns:a16="http://schemas.microsoft.com/office/drawing/2014/main" id="{2FD057B3-68EF-4597-92D7-5AC33DDC1699}"/>
+                <a16:creationId xmlns:a16="http://schemas.microsoft.com/office/drawing/2014/main" id="{69056E69-1023-4105-9757-775D3015B236}"/>
               </a:ext>
             </a:extLst>
           </p:cNvPr>
@@ -11425,7 +12107,7 @@
           <p:cNvPr id="162" name="diagram-241">
             <a:extLst xmlns:a="http://schemas.openxmlformats.org/drawingml/2006/main">
               <a:ext uri="{FF2B5EF4-FFF2-40B4-BE49-F238E27FC236}">
-                <a16:creationId xmlns:a16="http://schemas.microsoft.com/office/drawing/2014/main" id="{4C743630-0D5E-4978-B6D4-BB19108D9BB2}"/>
+                <a16:creationId xmlns:a16="http://schemas.microsoft.com/office/drawing/2014/main" id="{BEBB8418-FA3A-4964-8C76-B035BFF3013B}"/>
               </a:ext>
             </a:extLst>
           </p:cNvPr>
@@ -11457,7 +12139,7 @@
           <p:cNvPr id="163" name="diagram-242">
             <a:extLst xmlns:a="http://schemas.openxmlformats.org/drawingml/2006/main">
               <a:ext uri="{FF2B5EF4-FFF2-40B4-BE49-F238E27FC236}">
-                <a16:creationId xmlns:a16="http://schemas.microsoft.com/office/drawing/2014/main" id="{52006808-6BD0-43CE-8151-4892F9603107}"/>
+                <a16:creationId xmlns:a16="http://schemas.microsoft.com/office/drawing/2014/main" id="{4BB0521A-CD61-4F81-A145-ED48AA2C275C}"/>
               </a:ext>
             </a:extLst>
           </p:cNvPr>
@@ -11489,7 +12171,7 @@
           <p:cNvPr id="164" name="diagram-243">
             <a:extLst xmlns:a="http://schemas.openxmlformats.org/drawingml/2006/main">
               <a:ext uri="{FF2B5EF4-FFF2-40B4-BE49-F238E27FC236}">
-                <a16:creationId xmlns:a16="http://schemas.microsoft.com/office/drawing/2014/main" id="{8ADC2A24-A7EA-4329-9565-70FDBB72D241}"/>
+                <a16:creationId xmlns:a16="http://schemas.microsoft.com/office/drawing/2014/main" id="{4A21F03D-24CD-4DB2-BDC6-179C4A1FBAEE}"/>
               </a:ext>
             </a:extLst>
           </p:cNvPr>
@@ -11521,7 +12203,7 @@
           <p:cNvPr id="165" name="diagram-244">
             <a:extLst xmlns:a="http://schemas.openxmlformats.org/drawingml/2006/main">
               <a:ext uri="{FF2B5EF4-FFF2-40B4-BE49-F238E27FC236}">
-                <a16:creationId xmlns:a16="http://schemas.microsoft.com/office/drawing/2014/main" id="{4EF848DE-74D7-40F1-993A-8B80808DA614}"/>
+                <a16:creationId xmlns:a16="http://schemas.microsoft.com/office/drawing/2014/main" id="{9813C6D0-70D0-484C-A201-5EDDCC22F8CA}"/>
               </a:ext>
             </a:extLst>
           </p:cNvPr>
@@ -11553,7 +12235,7 @@
           <p:cNvPr id="166" name="diagram-245">
             <a:extLst xmlns:a="http://schemas.openxmlformats.org/drawingml/2006/main">
               <a:ext uri="{FF2B5EF4-FFF2-40B4-BE49-F238E27FC236}">
-                <a16:creationId xmlns:a16="http://schemas.microsoft.com/office/drawing/2014/main" id="{324C124C-D912-438F-91FD-8EA7937F56C8}"/>
+                <a16:creationId xmlns:a16="http://schemas.microsoft.com/office/drawing/2014/main" id="{B130E23C-7753-490B-BC78-DA3FDB1F73A5}"/>
               </a:ext>
             </a:extLst>
           </p:cNvPr>
@@ -11585,7 +12267,7 @@
           <p:cNvPr id="167" name="diagram-246">
             <a:extLst xmlns:a="http://schemas.openxmlformats.org/drawingml/2006/main">
               <a:ext uri="{FF2B5EF4-FFF2-40B4-BE49-F238E27FC236}">
-                <a16:creationId xmlns:a16="http://schemas.microsoft.com/office/drawing/2014/main" id="{DB6BE377-D3F8-49B7-A534-2806C2DBE02F}"/>
+                <a16:creationId xmlns:a16="http://schemas.microsoft.com/office/drawing/2014/main" id="{0962DFF6-50EB-4420-AF45-6D94DE74B3DE}"/>
               </a:ext>
             </a:extLst>
           </p:cNvPr>
@@ -11617,7 +12299,7 @@
           <p:cNvPr id="168" name="diagram-247">
             <a:extLst xmlns:a="http://schemas.openxmlformats.org/drawingml/2006/main">
               <a:ext uri="{FF2B5EF4-FFF2-40B4-BE49-F238E27FC236}">
-                <a16:creationId xmlns:a16="http://schemas.microsoft.com/office/drawing/2014/main" id="{E585A5CC-F37A-4AF9-9615-806C4FDB9794}"/>
+                <a16:creationId xmlns:a16="http://schemas.microsoft.com/office/drawing/2014/main" id="{8FC9CF22-A401-4BBB-89E8-E30ED4A64982}"/>
               </a:ext>
             </a:extLst>
           </p:cNvPr>
@@ -11649,7 +12331,7 @@
           <p:cNvPr id="169" name="diagram-248">
             <a:extLst xmlns:a="http://schemas.openxmlformats.org/drawingml/2006/main">
               <a:ext uri="{FF2B5EF4-FFF2-40B4-BE49-F238E27FC236}">
-                <a16:creationId xmlns:a16="http://schemas.microsoft.com/office/drawing/2014/main" id="{A28CD51B-C4DE-43BE-9581-CA3609052CCA}"/>
+                <a16:creationId xmlns:a16="http://schemas.microsoft.com/office/drawing/2014/main" id="{D4559C46-BB82-4179-AFA4-99288987496F}"/>
               </a:ext>
             </a:extLst>
           </p:cNvPr>
@@ -11681,7 +12363,7 @@
           <p:cNvPr id="170" name="diagram-249">
             <a:extLst xmlns:a="http://schemas.openxmlformats.org/drawingml/2006/main">
               <a:ext uri="{FF2B5EF4-FFF2-40B4-BE49-F238E27FC236}">
-                <a16:creationId xmlns:a16="http://schemas.microsoft.com/office/drawing/2014/main" id="{DF222052-B7F7-4B50-ADA4-D1590520E309}"/>
+                <a16:creationId xmlns:a16="http://schemas.microsoft.com/office/drawing/2014/main" id="{0B692967-DE8E-417A-BCCC-BA460C0FF2B1}"/>
               </a:ext>
             </a:extLst>
           </p:cNvPr>
@@ -11713,7 +12395,7 @@
           <p:cNvPr id="171" name="diagram-250">
             <a:extLst xmlns:a="http://schemas.openxmlformats.org/drawingml/2006/main">
               <a:ext uri="{FF2B5EF4-FFF2-40B4-BE49-F238E27FC236}">
-                <a16:creationId xmlns:a16="http://schemas.microsoft.com/office/drawing/2014/main" id="{C4727DB9-59AA-4427-AB11-2CB6B19A5BD1}"/>
+                <a16:creationId xmlns:a16="http://schemas.microsoft.com/office/drawing/2014/main" id="{87311542-6922-4768-AF28-97B045079308}"/>
               </a:ext>
             </a:extLst>
           </p:cNvPr>
@@ -11745,7 +12427,7 @@
           <p:cNvPr id="172" name="diagram-251">
             <a:extLst xmlns:a="http://schemas.openxmlformats.org/drawingml/2006/main">
               <a:ext uri="{FF2B5EF4-FFF2-40B4-BE49-F238E27FC236}">
-                <a16:creationId xmlns:a16="http://schemas.microsoft.com/office/drawing/2014/main" id="{35DA257B-B73C-486D-8379-6CE2A7167A59}"/>
+                <a16:creationId xmlns:a16="http://schemas.microsoft.com/office/drawing/2014/main" id="{924187F5-DB4D-4287-AB66-E78F66751E9E}"/>
               </a:ext>
             </a:extLst>
           </p:cNvPr>
@@ -11777,7 +12459,7 @@
           <p:cNvPr id="173" name="diagram-252">
             <a:extLst xmlns:a="http://schemas.openxmlformats.org/drawingml/2006/main">
               <a:ext uri="{FF2B5EF4-FFF2-40B4-BE49-F238E27FC236}">
-                <a16:creationId xmlns:a16="http://schemas.microsoft.com/office/drawing/2014/main" id="{D3C15F71-B1B1-4131-8A16-EA6284741771}"/>
+                <a16:creationId xmlns:a16="http://schemas.microsoft.com/office/drawing/2014/main" id="{13D3D52A-E723-4A70-9CA6-AC1DDC0894BC}"/>
               </a:ext>
             </a:extLst>
           </p:cNvPr>
@@ -11809,7 +12491,7 @@
           <p:cNvPr id="174" name="diagram-253">
             <a:extLst xmlns:a="http://schemas.openxmlformats.org/drawingml/2006/main">
               <a:ext uri="{FF2B5EF4-FFF2-40B4-BE49-F238E27FC236}">
-                <a16:creationId xmlns:a16="http://schemas.microsoft.com/office/drawing/2014/main" id="{4D6AFC13-F5DE-4AC9-9E4A-489EB7935796}"/>
+                <a16:creationId xmlns:a16="http://schemas.microsoft.com/office/drawing/2014/main" id="{707BE37B-4FDC-4B08-9E4F-E001FAE96CE2}"/>
               </a:ext>
             </a:extLst>
           </p:cNvPr>
@@ -11841,7 +12523,7 @@
           <p:cNvPr id="175" name="diagram-254">
             <a:extLst xmlns:a="http://schemas.openxmlformats.org/drawingml/2006/main">
               <a:ext uri="{FF2B5EF4-FFF2-40B4-BE49-F238E27FC236}">
-                <a16:creationId xmlns:a16="http://schemas.microsoft.com/office/drawing/2014/main" id="{A5E3EE79-9D2F-4AFD-BD4E-44208EC9E23C}"/>
+                <a16:creationId xmlns:a16="http://schemas.microsoft.com/office/drawing/2014/main" id="{FCEEE0EC-D2A7-43B3-B6BD-B79961F38EF6}"/>
               </a:ext>
             </a:extLst>
           </p:cNvPr>
@@ -11873,7 +12555,7 @@
           <p:cNvPr id="176" name="diagram-255">
             <a:extLst xmlns:a="http://schemas.openxmlformats.org/drawingml/2006/main">
               <a:ext uri="{FF2B5EF4-FFF2-40B4-BE49-F238E27FC236}">
-                <a16:creationId xmlns:a16="http://schemas.microsoft.com/office/drawing/2014/main" id="{84996101-B1A9-4EB6-BC0A-96B16234DFFB}"/>
+                <a16:creationId xmlns:a16="http://schemas.microsoft.com/office/drawing/2014/main" id="{D5A8D2D6-2B7C-4E7D-8BBB-ECFC0F470197}"/>
               </a:ext>
             </a:extLst>
           </p:cNvPr>
@@ -11905,7 +12587,7 @@
           <p:cNvPr id="177" name="diagram-256">
             <a:extLst xmlns:a="http://schemas.openxmlformats.org/drawingml/2006/main">
               <a:ext uri="{FF2B5EF4-FFF2-40B4-BE49-F238E27FC236}">
-                <a16:creationId xmlns:a16="http://schemas.microsoft.com/office/drawing/2014/main" id="{21FB6664-6774-4E93-8FB4-5B13C5282ECF}"/>
+                <a16:creationId xmlns:a16="http://schemas.microsoft.com/office/drawing/2014/main" id="{B978A133-8CD7-490D-A18B-C692904BE043}"/>
               </a:ext>
             </a:extLst>
           </p:cNvPr>
@@ -11937,7 +12619,7 @@
           <p:cNvPr id="178" name="diagram-257">
             <a:extLst xmlns:a="http://schemas.openxmlformats.org/drawingml/2006/main">
               <a:ext uri="{FF2B5EF4-FFF2-40B4-BE49-F238E27FC236}">
-                <a16:creationId xmlns:a16="http://schemas.microsoft.com/office/drawing/2014/main" id="{25FABD9A-378D-4DB0-819B-76B38E504C13}"/>
+                <a16:creationId xmlns:a16="http://schemas.microsoft.com/office/drawing/2014/main" id="{FD15B445-0707-49DB-8614-EB2FA67D108E}"/>
               </a:ext>
             </a:extLst>
           </p:cNvPr>
@@ -11969,7 +12651,7 @@
           <p:cNvPr id="179" name="diagram-258">
             <a:extLst xmlns:a="http://schemas.openxmlformats.org/drawingml/2006/main">
               <a:ext uri="{FF2B5EF4-FFF2-40B4-BE49-F238E27FC236}">
-                <a16:creationId xmlns:a16="http://schemas.microsoft.com/office/drawing/2014/main" id="{4D3183B2-B4BB-45B5-9A30-4CE479762806}"/>
+                <a16:creationId xmlns:a16="http://schemas.microsoft.com/office/drawing/2014/main" id="{EAE589DA-61B1-4ADE-8133-D676B574267B}"/>
               </a:ext>
             </a:extLst>
           </p:cNvPr>
@@ -12001,7 +12683,7 @@
           <p:cNvPr id="180" name="diagram-259">
             <a:extLst xmlns:a="http://schemas.openxmlformats.org/drawingml/2006/main">
               <a:ext uri="{FF2B5EF4-FFF2-40B4-BE49-F238E27FC236}">
-                <a16:creationId xmlns:a16="http://schemas.microsoft.com/office/drawing/2014/main" id="{291F5D70-8B94-4AAE-913A-E7264D896438}"/>
+                <a16:creationId xmlns:a16="http://schemas.microsoft.com/office/drawing/2014/main" id="{4505C350-AA16-4F2F-830B-3BB89BFDA888}"/>
               </a:ext>
             </a:extLst>
           </p:cNvPr>
@@ -12033,7 +12715,7 @@
           <p:cNvPr id="181" name="diagram-260">
             <a:extLst xmlns:a="http://schemas.openxmlformats.org/drawingml/2006/main">
               <a:ext uri="{FF2B5EF4-FFF2-40B4-BE49-F238E27FC236}">
-                <a16:creationId xmlns:a16="http://schemas.microsoft.com/office/drawing/2014/main" id="{1B0C082A-2C4D-4BD3-AA88-8DBAB13DBE0B}"/>
+                <a16:creationId xmlns:a16="http://schemas.microsoft.com/office/drawing/2014/main" id="{2C3283E9-B56F-42C7-BDF0-B57E3EF391F1}"/>
               </a:ext>
             </a:extLst>
           </p:cNvPr>
@@ -12065,7 +12747,7 @@
           <p:cNvPr id="182" name="diagram-261">
             <a:extLst xmlns:a="http://schemas.openxmlformats.org/drawingml/2006/main">
               <a:ext uri="{FF2B5EF4-FFF2-40B4-BE49-F238E27FC236}">
-                <a16:creationId xmlns:a16="http://schemas.microsoft.com/office/drawing/2014/main" id="{52019543-5A4B-4456-A033-AB3DAC6DE8A9}"/>
+                <a16:creationId xmlns:a16="http://schemas.microsoft.com/office/drawing/2014/main" id="{0E0F3A3B-2161-4BF8-98FF-A1472B32D461}"/>
               </a:ext>
             </a:extLst>
           </p:cNvPr>
@@ -12097,7 +12779,7 @@
           <p:cNvPr id="183" name="diagram-262">
             <a:extLst xmlns:a="http://schemas.openxmlformats.org/drawingml/2006/main">
               <a:ext uri="{FF2B5EF4-FFF2-40B4-BE49-F238E27FC236}">
-                <a16:creationId xmlns:a16="http://schemas.microsoft.com/office/drawing/2014/main" id="{C3554ADE-C797-4605-91D6-10BAF388A159}"/>
+                <a16:creationId xmlns:a16="http://schemas.microsoft.com/office/drawing/2014/main" id="{414D8CD4-7248-4DF7-B48E-C9CF3CA47204}"/>
               </a:ext>
             </a:extLst>
           </p:cNvPr>
@@ -12129,7 +12811,7 @@
           <p:cNvPr id="184" name="diagram-263">
             <a:extLst xmlns:a="http://schemas.openxmlformats.org/drawingml/2006/main">
               <a:ext uri="{FF2B5EF4-FFF2-40B4-BE49-F238E27FC236}">
-                <a16:creationId xmlns:a16="http://schemas.microsoft.com/office/drawing/2014/main" id="{6441FEC1-88BE-4E93-AF63-67388245620B}"/>
+                <a16:creationId xmlns:a16="http://schemas.microsoft.com/office/drawing/2014/main" id="{E0EB7BA2-DDA1-4BA5-9FBF-9356B8EF1AF4}"/>
               </a:ext>
             </a:extLst>
           </p:cNvPr>
@@ -12161,7 +12843,7 @@
           <p:cNvPr id="185" name="diagram-264">
             <a:extLst xmlns:a="http://schemas.openxmlformats.org/drawingml/2006/main">
               <a:ext uri="{FF2B5EF4-FFF2-40B4-BE49-F238E27FC236}">
-                <a16:creationId xmlns:a16="http://schemas.microsoft.com/office/drawing/2014/main" id="{AA1CA8D1-98BF-451E-BA86-D1AB9AEF4453}"/>
+                <a16:creationId xmlns:a16="http://schemas.microsoft.com/office/drawing/2014/main" id="{60C6B492-AC41-4546-8E91-73C71B4D77FC}"/>
               </a:ext>
             </a:extLst>
           </p:cNvPr>
@@ -12193,7 +12875,7 @@
           <p:cNvPr id="186" name="diagram-265">
             <a:extLst xmlns:a="http://schemas.openxmlformats.org/drawingml/2006/main">
               <a:ext uri="{FF2B5EF4-FFF2-40B4-BE49-F238E27FC236}">
-                <a16:creationId xmlns:a16="http://schemas.microsoft.com/office/drawing/2014/main" id="{AAB9A66F-3B8A-48BB-9512-B01B5C6FDFCF}"/>
+                <a16:creationId xmlns:a16="http://schemas.microsoft.com/office/drawing/2014/main" id="{C09CC202-ED23-4A1D-9963-66E911B4DF39}"/>
               </a:ext>
             </a:extLst>
           </p:cNvPr>
@@ -12225,7 +12907,7 @@
           <p:cNvPr id="187" name="diagram-266">
             <a:extLst xmlns:a="http://schemas.openxmlformats.org/drawingml/2006/main">
               <a:ext uri="{FF2B5EF4-FFF2-40B4-BE49-F238E27FC236}">
-                <a16:creationId xmlns:a16="http://schemas.microsoft.com/office/drawing/2014/main" id="{29F9CD1A-E2C8-44AB-BCE0-CEDD70777EEE}"/>
+                <a16:creationId xmlns:a16="http://schemas.microsoft.com/office/drawing/2014/main" id="{38ACC18F-7749-4F66-AD6E-1B5E5EFE4E0B}"/>
               </a:ext>
             </a:extLst>
           </p:cNvPr>
@@ -12257,7 +12939,7 @@
           <p:cNvPr id="188" name="diagram-267">
             <a:extLst xmlns:a="http://schemas.openxmlformats.org/drawingml/2006/main">
               <a:ext uri="{FF2B5EF4-FFF2-40B4-BE49-F238E27FC236}">
-                <a16:creationId xmlns:a16="http://schemas.microsoft.com/office/drawing/2014/main" id="{546DDB25-BD01-4355-AE24-95F81828A6F1}"/>
+                <a16:creationId xmlns:a16="http://schemas.microsoft.com/office/drawing/2014/main" id="{8DC3A2D5-5A7B-46F5-9858-03AA92E08E0D}"/>
               </a:ext>
             </a:extLst>
           </p:cNvPr>
@@ -12289,7 +12971,7 @@
           <p:cNvPr id="189" name="diagram-268">
             <a:extLst xmlns:a="http://schemas.openxmlformats.org/drawingml/2006/main">
               <a:ext uri="{FF2B5EF4-FFF2-40B4-BE49-F238E27FC236}">
-                <a16:creationId xmlns:a16="http://schemas.microsoft.com/office/drawing/2014/main" id="{28BF31B4-BD15-49FB-8E42-A670C31CF4F9}"/>
+                <a16:creationId xmlns:a16="http://schemas.microsoft.com/office/drawing/2014/main" id="{105A596A-62E1-4175-8921-98598B9A571D}"/>
               </a:ext>
             </a:extLst>
           </p:cNvPr>
@@ -12321,7 +13003,7 @@
           <p:cNvPr id="190" name="diagram-269">
             <a:extLst xmlns:a="http://schemas.openxmlformats.org/drawingml/2006/main">
               <a:ext uri="{FF2B5EF4-FFF2-40B4-BE49-F238E27FC236}">
-                <a16:creationId xmlns:a16="http://schemas.microsoft.com/office/drawing/2014/main" id="{0E0BA6C9-56DC-403D-8126-AFE8414C21D4}"/>
+                <a16:creationId xmlns:a16="http://schemas.microsoft.com/office/drawing/2014/main" id="{EFAC63F8-BDDF-4F55-8E7B-35FB8AD28556}"/>
               </a:ext>
             </a:extLst>
           </p:cNvPr>
@@ -12353,7 +13035,7 @@
           <p:cNvPr id="191" name="diagram-270">
             <a:extLst xmlns:a="http://schemas.openxmlformats.org/drawingml/2006/main">
               <a:ext uri="{FF2B5EF4-FFF2-40B4-BE49-F238E27FC236}">
-                <a16:creationId xmlns:a16="http://schemas.microsoft.com/office/drawing/2014/main" id="{C50246E3-A7A7-44B9-859F-8D254CE7B668}"/>
+                <a16:creationId xmlns:a16="http://schemas.microsoft.com/office/drawing/2014/main" id="{AD538EDE-10D5-47F2-A6E1-2E826CA04083}"/>
               </a:ext>
             </a:extLst>
           </p:cNvPr>
@@ -12385,7 +13067,7 @@
           <p:cNvPr id="192" name="diagram-271">
             <a:extLst xmlns:a="http://schemas.openxmlformats.org/drawingml/2006/main">
               <a:ext uri="{FF2B5EF4-FFF2-40B4-BE49-F238E27FC236}">
-                <a16:creationId xmlns:a16="http://schemas.microsoft.com/office/drawing/2014/main" id="{C02A5AB9-D7D9-4019-BAF3-1D288E08C5C7}"/>
+                <a16:creationId xmlns:a16="http://schemas.microsoft.com/office/drawing/2014/main" id="{C931585C-A4F8-44F5-916A-9FA615ACD1B4}"/>
               </a:ext>
             </a:extLst>
           </p:cNvPr>
@@ -12417,7 +13099,7 @@
           <p:cNvPr id="193" name="diagram-272">
             <a:extLst xmlns:a="http://schemas.openxmlformats.org/drawingml/2006/main">
               <a:ext uri="{FF2B5EF4-FFF2-40B4-BE49-F238E27FC236}">
-                <a16:creationId xmlns:a16="http://schemas.microsoft.com/office/drawing/2014/main" id="{FE13B540-754D-43F7-9093-9FDF8D494605}"/>
+                <a16:creationId xmlns:a16="http://schemas.microsoft.com/office/drawing/2014/main" id="{10513B14-26A3-4FB0-B434-FA037A3F09E8}"/>
               </a:ext>
             </a:extLst>
           </p:cNvPr>
@@ -12449,7 +13131,7 @@
           <p:cNvPr id="194" name="diagram-273">
             <a:extLst xmlns:a="http://schemas.openxmlformats.org/drawingml/2006/main">
               <a:ext uri="{FF2B5EF4-FFF2-40B4-BE49-F238E27FC236}">
-                <a16:creationId xmlns:a16="http://schemas.microsoft.com/office/drawing/2014/main" id="{293A82FA-FF1E-4415-AD9F-F30AA67A40AE}"/>
+                <a16:creationId xmlns:a16="http://schemas.microsoft.com/office/drawing/2014/main" id="{6F416452-5806-44A8-BD89-F5DF98464500}"/>
               </a:ext>
             </a:extLst>
           </p:cNvPr>
@@ -12481,7 +13163,7 @@
           <p:cNvPr id="195" name="diagram-274">
             <a:extLst xmlns:a="http://schemas.openxmlformats.org/drawingml/2006/main">
               <a:ext uri="{FF2B5EF4-FFF2-40B4-BE49-F238E27FC236}">
-                <a16:creationId xmlns:a16="http://schemas.microsoft.com/office/drawing/2014/main" id="{A27F5548-6259-4492-8436-E4C56ED346E5}"/>
+                <a16:creationId xmlns:a16="http://schemas.microsoft.com/office/drawing/2014/main" id="{BDB1A43E-2436-4ADF-82FA-EC413AD63045}"/>
               </a:ext>
             </a:extLst>
           </p:cNvPr>
@@ -12513,7 +13195,7 @@
           <p:cNvPr id="196" name="diagram-275">
             <a:extLst xmlns:a="http://schemas.openxmlformats.org/drawingml/2006/main">
               <a:ext uri="{FF2B5EF4-FFF2-40B4-BE49-F238E27FC236}">
-                <a16:creationId xmlns:a16="http://schemas.microsoft.com/office/drawing/2014/main" id="{F15E0CFB-A0ED-4605-B0E3-F71372605BED}"/>
+                <a16:creationId xmlns:a16="http://schemas.microsoft.com/office/drawing/2014/main" id="{5EDE60C2-2778-4F92-A4F8-5AD6593477D7}"/>
               </a:ext>
             </a:extLst>
           </p:cNvPr>
@@ -12545,7 +13227,7 @@
           <p:cNvPr id="197" name="diagram-276">
             <a:extLst xmlns:a="http://schemas.openxmlformats.org/drawingml/2006/main">
               <a:ext uri="{FF2B5EF4-FFF2-40B4-BE49-F238E27FC236}">
-                <a16:creationId xmlns:a16="http://schemas.microsoft.com/office/drawing/2014/main" id="{D75F0DD9-9FEB-460C-9676-4DFFE3BA2EB3}"/>
+                <a16:creationId xmlns:a16="http://schemas.microsoft.com/office/drawing/2014/main" id="{F299A2AC-596D-4BAE-AB21-56C058CF53F2}"/>
               </a:ext>
             </a:extLst>
           </p:cNvPr>
@@ -12577,7 +13259,7 @@
           <p:cNvPr id="198" name="diagram-277">
             <a:extLst xmlns:a="http://schemas.openxmlformats.org/drawingml/2006/main">
               <a:ext uri="{FF2B5EF4-FFF2-40B4-BE49-F238E27FC236}">
-                <a16:creationId xmlns:a16="http://schemas.microsoft.com/office/drawing/2014/main" id="{0B734696-F0FA-47D4-91A2-F05D4024D3AC}"/>
+                <a16:creationId xmlns:a16="http://schemas.microsoft.com/office/drawing/2014/main" id="{C04A77EE-0C55-4403-8AD6-B4D6058A2131}"/>
               </a:ext>
             </a:extLst>
           </p:cNvPr>
@@ -12609,7 +13291,7 @@
           <p:cNvPr id="199" name="diagram-278">
             <a:extLst xmlns:a="http://schemas.openxmlformats.org/drawingml/2006/main">
               <a:ext uri="{FF2B5EF4-FFF2-40B4-BE49-F238E27FC236}">
-                <a16:creationId xmlns:a16="http://schemas.microsoft.com/office/drawing/2014/main" id="{37E0A553-F166-4C9A-8908-61F120FB8E82}"/>
+                <a16:creationId xmlns:a16="http://schemas.microsoft.com/office/drawing/2014/main" id="{C1213EAD-37AB-4C27-9421-5CE79E87FAF6}"/>
               </a:ext>
             </a:extLst>
           </p:cNvPr>
@@ -12641,7 +13323,7 @@
           <p:cNvPr id="200" name="diagram-279">
             <a:extLst xmlns:a="http://schemas.openxmlformats.org/drawingml/2006/main">
               <a:ext uri="{FF2B5EF4-FFF2-40B4-BE49-F238E27FC236}">
-                <a16:creationId xmlns:a16="http://schemas.microsoft.com/office/drawing/2014/main" id="{5D7A60AF-58E2-470A-9FD7-63F120C0465E}"/>
+                <a16:creationId xmlns:a16="http://schemas.microsoft.com/office/drawing/2014/main" id="{523AE1E0-28BA-403B-BE52-4750EEB93CC4}"/>
               </a:ext>
             </a:extLst>
           </p:cNvPr>
@@ -12673,7 +13355,7 @@
           <p:cNvPr id="201" name="diagram-280">
             <a:extLst xmlns:a="http://schemas.openxmlformats.org/drawingml/2006/main">
               <a:ext uri="{FF2B5EF4-FFF2-40B4-BE49-F238E27FC236}">
-                <a16:creationId xmlns:a16="http://schemas.microsoft.com/office/drawing/2014/main" id="{88884886-EAA9-44D5-8BC8-9FCB6D710721}"/>
+                <a16:creationId xmlns:a16="http://schemas.microsoft.com/office/drawing/2014/main" id="{C9119521-684C-42BB-8A8D-D59FF6FB1305}"/>
               </a:ext>
             </a:extLst>
           </p:cNvPr>
@@ -12705,7 +13387,7 @@
           <p:cNvPr id="202" name="diagram-281">
             <a:extLst xmlns:a="http://schemas.openxmlformats.org/drawingml/2006/main">
               <a:ext uri="{FF2B5EF4-FFF2-40B4-BE49-F238E27FC236}">
-                <a16:creationId xmlns:a16="http://schemas.microsoft.com/office/drawing/2014/main" id="{810F499E-9AF8-4B45-984F-FC99BD99C36E}"/>
+                <a16:creationId xmlns:a16="http://schemas.microsoft.com/office/drawing/2014/main" id="{D7A9314E-A65C-4D4D-8A5C-029B02EB5A62}"/>
               </a:ext>
             </a:extLst>
           </p:cNvPr>
@@ -12737,7 +13419,7 @@
           <p:cNvPr id="203" name="diagram-282">
             <a:extLst xmlns:a="http://schemas.openxmlformats.org/drawingml/2006/main">
               <a:ext uri="{FF2B5EF4-FFF2-40B4-BE49-F238E27FC236}">
-                <a16:creationId xmlns:a16="http://schemas.microsoft.com/office/drawing/2014/main" id="{A5E30244-2104-439D-A34A-CCF700E7AA39}"/>
+                <a16:creationId xmlns:a16="http://schemas.microsoft.com/office/drawing/2014/main" id="{EAE0DF85-3021-4638-BF29-30A1245A1FF8}"/>
               </a:ext>
             </a:extLst>
           </p:cNvPr>
@@ -12769,7 +13451,7 @@
           <p:cNvPr id="204" name="diagram-283">
             <a:extLst xmlns:a="http://schemas.openxmlformats.org/drawingml/2006/main">
               <a:ext uri="{FF2B5EF4-FFF2-40B4-BE49-F238E27FC236}">
-                <a16:creationId xmlns:a16="http://schemas.microsoft.com/office/drawing/2014/main" id="{2EACA62E-26D3-4CAA-9E0F-A5097FEF5E07}"/>
+                <a16:creationId xmlns:a16="http://schemas.microsoft.com/office/drawing/2014/main" id="{AC68DDE7-4A3B-448E-AAE6-798EC2466D54}"/>
               </a:ext>
             </a:extLst>
           </p:cNvPr>
@@ -12801,7 +13483,7 @@
           <p:cNvPr id="205" name="diagram-284">
             <a:extLst xmlns:a="http://schemas.openxmlformats.org/drawingml/2006/main">
               <a:ext uri="{FF2B5EF4-FFF2-40B4-BE49-F238E27FC236}">
-                <a16:creationId xmlns:a16="http://schemas.microsoft.com/office/drawing/2014/main" id="{2BE55FFB-2C72-455B-AB1C-F83C1F900C19}"/>
+                <a16:creationId xmlns:a16="http://schemas.microsoft.com/office/drawing/2014/main" id="{30EAAF04-0C80-4AD9-85B5-B86B082B36E8}"/>
               </a:ext>
             </a:extLst>
           </p:cNvPr>
@@ -12833,7 +13515,7 @@
           <p:cNvPr id="206" name="diagram-285">
             <a:extLst xmlns:a="http://schemas.openxmlformats.org/drawingml/2006/main">
               <a:ext uri="{FF2B5EF4-FFF2-40B4-BE49-F238E27FC236}">
-                <a16:creationId xmlns:a16="http://schemas.microsoft.com/office/drawing/2014/main" id="{D835A138-A308-4080-BBEE-66ACC5007D71}"/>
+                <a16:creationId xmlns:a16="http://schemas.microsoft.com/office/drawing/2014/main" id="{DF4CA073-EA34-4C1E-A4B9-BA5D62CD7C5C}"/>
               </a:ext>
             </a:extLst>
           </p:cNvPr>
@@ -12865,7 +13547,7 @@
           <p:cNvPr id="207" name="diagram-286">
             <a:extLst xmlns:a="http://schemas.openxmlformats.org/drawingml/2006/main">
               <a:ext uri="{FF2B5EF4-FFF2-40B4-BE49-F238E27FC236}">
-                <a16:creationId xmlns:a16="http://schemas.microsoft.com/office/drawing/2014/main" id="{8536B15B-67F3-424C-8371-A2C548E6DE63}"/>
+                <a16:creationId xmlns:a16="http://schemas.microsoft.com/office/drawing/2014/main" id="{207CBF8D-9971-4BD3-B28C-52E84DE3D667}"/>
               </a:ext>
             </a:extLst>
           </p:cNvPr>
@@ -12897,7 +13579,7 @@
           <p:cNvPr id="208" name="diagram-287">
             <a:extLst xmlns:a="http://schemas.openxmlformats.org/drawingml/2006/main">
               <a:ext uri="{FF2B5EF4-FFF2-40B4-BE49-F238E27FC236}">
-                <a16:creationId xmlns:a16="http://schemas.microsoft.com/office/drawing/2014/main" id="{9C6D1BDF-E9B1-4074-9F9A-387B82D2E53A}"/>
+                <a16:creationId xmlns:a16="http://schemas.microsoft.com/office/drawing/2014/main" id="{A0808FD5-D976-4D74-AB25-9224863598B3}"/>
               </a:ext>
             </a:extLst>
           </p:cNvPr>
@@ -12929,7 +13611,7 @@
           <p:cNvPr id="209" name="diagram-288">
             <a:extLst xmlns:a="http://schemas.openxmlformats.org/drawingml/2006/main">
               <a:ext uri="{FF2B5EF4-FFF2-40B4-BE49-F238E27FC236}">
-                <a16:creationId xmlns:a16="http://schemas.microsoft.com/office/drawing/2014/main" id="{E6942A72-AEE2-407A-9592-94FAFC04BEEA}"/>
+                <a16:creationId xmlns:a16="http://schemas.microsoft.com/office/drawing/2014/main" id="{5ED5738C-FAB4-444E-BDB3-0D7859AF6783}"/>
               </a:ext>
             </a:extLst>
           </p:cNvPr>
@@ -12961,7 +13643,7 @@
           <p:cNvPr id="210" name="diagram-289">
             <a:extLst xmlns:a="http://schemas.openxmlformats.org/drawingml/2006/main">
               <a:ext uri="{FF2B5EF4-FFF2-40B4-BE49-F238E27FC236}">
-                <a16:creationId xmlns:a16="http://schemas.microsoft.com/office/drawing/2014/main" id="{3B3B5DF0-3D60-4F20-A200-9C4AEA2FEBEB}"/>
+                <a16:creationId xmlns:a16="http://schemas.microsoft.com/office/drawing/2014/main" id="{4681DDFA-05BA-4270-A675-35CC6309F33B}"/>
               </a:ext>
             </a:extLst>
           </p:cNvPr>
@@ -12993,7 +13675,7 @@
           <p:cNvPr id="211" name="diagram-290">
             <a:extLst xmlns:a="http://schemas.openxmlformats.org/drawingml/2006/main">
               <a:ext uri="{FF2B5EF4-FFF2-40B4-BE49-F238E27FC236}">
-                <a16:creationId xmlns:a16="http://schemas.microsoft.com/office/drawing/2014/main" id="{B0707005-84B8-40C9-936D-17300E4F2F77}"/>
+                <a16:creationId xmlns:a16="http://schemas.microsoft.com/office/drawing/2014/main" id="{BA70CAA3-6775-4051-96AA-93F2F0D24F22}"/>
               </a:ext>
             </a:extLst>
           </p:cNvPr>
@@ -13025,7 +13707,7 @@
           <p:cNvPr id="212" name="diagram-291">
             <a:extLst xmlns:a="http://schemas.openxmlformats.org/drawingml/2006/main">
               <a:ext uri="{FF2B5EF4-FFF2-40B4-BE49-F238E27FC236}">
-                <a16:creationId xmlns:a16="http://schemas.microsoft.com/office/drawing/2014/main" id="{81B4D95A-CE48-4611-8905-AE8A961B9B83}"/>
+                <a16:creationId xmlns:a16="http://schemas.microsoft.com/office/drawing/2014/main" id="{302CA998-697B-4C3B-BDBA-458953529E42}"/>
               </a:ext>
             </a:extLst>
           </p:cNvPr>
@@ -13057,7 +13739,7 @@
           <p:cNvPr id="213" name="diagram-292">
             <a:extLst xmlns:a="http://schemas.openxmlformats.org/drawingml/2006/main">
               <a:ext uri="{FF2B5EF4-FFF2-40B4-BE49-F238E27FC236}">
-                <a16:creationId xmlns:a16="http://schemas.microsoft.com/office/drawing/2014/main" id="{EEA44D30-56FA-48AE-BAEC-AD0210CCDC8D}"/>
+                <a16:creationId xmlns:a16="http://schemas.microsoft.com/office/drawing/2014/main" id="{F0017017-8373-493C-B1D2-A4EAC0CFBB2C}"/>
               </a:ext>
             </a:extLst>
           </p:cNvPr>
@@ -13089,7 +13771,7 @@
           <p:cNvPr id="214" name="diagram-293">
             <a:extLst xmlns:a="http://schemas.openxmlformats.org/drawingml/2006/main">
               <a:ext uri="{FF2B5EF4-FFF2-40B4-BE49-F238E27FC236}">
-                <a16:creationId xmlns:a16="http://schemas.microsoft.com/office/drawing/2014/main" id="{64603768-DF88-462F-9D09-6403838603FB}"/>
+                <a16:creationId xmlns:a16="http://schemas.microsoft.com/office/drawing/2014/main" id="{04D234D2-B1CC-4341-8C64-126E6FCFA664}"/>
               </a:ext>
             </a:extLst>
           </p:cNvPr>
@@ -13121,7 +13803,7 @@
           <p:cNvPr id="215" name="diagram-294">
             <a:extLst xmlns:a="http://schemas.openxmlformats.org/drawingml/2006/main">
               <a:ext uri="{FF2B5EF4-FFF2-40B4-BE49-F238E27FC236}">
-                <a16:creationId xmlns:a16="http://schemas.microsoft.com/office/drawing/2014/main" id="{0AD09D21-0946-4685-970B-FFAF4EE24519}"/>
+                <a16:creationId xmlns:a16="http://schemas.microsoft.com/office/drawing/2014/main" id="{6E139F62-15E8-4B91-9546-76FA0B5679AD}"/>
               </a:ext>
             </a:extLst>
           </p:cNvPr>
@@ -13153,7 +13835,7 @@
           <p:cNvPr id="216" name="diagram-295">
             <a:extLst xmlns:a="http://schemas.openxmlformats.org/drawingml/2006/main">
               <a:ext uri="{FF2B5EF4-FFF2-40B4-BE49-F238E27FC236}">
-                <a16:creationId xmlns:a16="http://schemas.microsoft.com/office/drawing/2014/main" id="{EF68A889-2162-4D42-9659-0B78189DB059}"/>
+                <a16:creationId xmlns:a16="http://schemas.microsoft.com/office/drawing/2014/main" id="{FCA5D2EC-BA03-47BB-B7AC-3F893993CF5E}"/>
               </a:ext>
             </a:extLst>
           </p:cNvPr>
@@ -13185,7 +13867,7 @@
           <p:cNvPr id="217" name="diagram-296">
             <a:extLst xmlns:a="http://schemas.openxmlformats.org/drawingml/2006/main">
               <a:ext uri="{FF2B5EF4-FFF2-40B4-BE49-F238E27FC236}">
-                <a16:creationId xmlns:a16="http://schemas.microsoft.com/office/drawing/2014/main" id="{29BDFDF7-C0E9-41AC-843D-74DCF81A9A8C}"/>
+                <a16:creationId xmlns:a16="http://schemas.microsoft.com/office/drawing/2014/main" id="{F9023A91-B3C1-405F-8193-52C1260BEC75}"/>
               </a:ext>
             </a:extLst>
           </p:cNvPr>
@@ -13217,7 +13899,7 @@
           <p:cNvPr id="218" name="diagram-297">
             <a:extLst xmlns:a="http://schemas.openxmlformats.org/drawingml/2006/main">
               <a:ext uri="{FF2B5EF4-FFF2-40B4-BE49-F238E27FC236}">
-                <a16:creationId xmlns:a16="http://schemas.microsoft.com/office/drawing/2014/main" id="{8E79C3CA-5A9F-4595-9A75-1EA5B529B7B4}"/>
+                <a16:creationId xmlns:a16="http://schemas.microsoft.com/office/drawing/2014/main" id="{BEE6EE50-9525-43D3-B39A-DD6EB2E47447}"/>
               </a:ext>
             </a:extLst>
           </p:cNvPr>
@@ -13249,7 +13931,7 @@
           <p:cNvPr id="219" name="diagram-298">
             <a:extLst xmlns:a="http://schemas.openxmlformats.org/drawingml/2006/main">
               <a:ext uri="{FF2B5EF4-FFF2-40B4-BE49-F238E27FC236}">
-                <a16:creationId xmlns:a16="http://schemas.microsoft.com/office/drawing/2014/main" id="{2F615A3D-52AA-4EDA-811C-568F9AAFED54}"/>
+                <a16:creationId xmlns:a16="http://schemas.microsoft.com/office/drawing/2014/main" id="{FC50C2A7-B1CF-4A35-96E7-E904F763EDE2}"/>
               </a:ext>
             </a:extLst>
           </p:cNvPr>
@@ -13281,7 +13963,7 @@
           <p:cNvPr id="220" name="diagram-299">
             <a:extLst xmlns:a="http://schemas.openxmlformats.org/drawingml/2006/main">
               <a:ext uri="{FF2B5EF4-FFF2-40B4-BE49-F238E27FC236}">
-                <a16:creationId xmlns:a16="http://schemas.microsoft.com/office/drawing/2014/main" id="{20840F34-BDAB-4520-BAEE-2C80300B85A4}"/>
+                <a16:creationId xmlns:a16="http://schemas.microsoft.com/office/drawing/2014/main" id="{D77CB523-48DE-475C-9120-1A554D485EDA}"/>
               </a:ext>
             </a:extLst>
           </p:cNvPr>
@@ -13313,7 +13995,7 @@
           <p:cNvPr id="221" name="diagram-300">
             <a:extLst xmlns:a="http://schemas.openxmlformats.org/drawingml/2006/main">
               <a:ext uri="{FF2B5EF4-FFF2-40B4-BE49-F238E27FC236}">
-                <a16:creationId xmlns:a16="http://schemas.microsoft.com/office/drawing/2014/main" id="{E6DB470B-904B-42C9-8BB3-FE98C542629D}"/>
+                <a16:creationId xmlns:a16="http://schemas.microsoft.com/office/drawing/2014/main" id="{C562C2B9-18B4-421A-9951-831079294440}"/>
               </a:ext>
             </a:extLst>
           </p:cNvPr>
@@ -13345,7 +14027,7 @@
           <p:cNvPr id="222" name="diagram-301">
             <a:extLst xmlns:a="http://schemas.openxmlformats.org/drawingml/2006/main">
               <a:ext uri="{FF2B5EF4-FFF2-40B4-BE49-F238E27FC236}">
-                <a16:creationId xmlns:a16="http://schemas.microsoft.com/office/drawing/2014/main" id="{A8CC38B6-4A6C-499E-B438-1D0233FD8FB9}"/>
+                <a16:creationId xmlns:a16="http://schemas.microsoft.com/office/drawing/2014/main" id="{F6917D6C-06E6-4FC5-A464-BDA1CA7CA37C}"/>
               </a:ext>
             </a:extLst>
           </p:cNvPr>
@@ -13377,7 +14059,7 @@
           <p:cNvPr id="223" name="diagram-302">
             <a:extLst xmlns:a="http://schemas.openxmlformats.org/drawingml/2006/main">
               <a:ext uri="{FF2B5EF4-FFF2-40B4-BE49-F238E27FC236}">
-                <a16:creationId xmlns:a16="http://schemas.microsoft.com/office/drawing/2014/main" id="{8ADFA0F2-BFE1-4607-BEDC-3FC2B336D5C6}"/>
+                <a16:creationId xmlns:a16="http://schemas.microsoft.com/office/drawing/2014/main" id="{CA6BF41A-642D-46EB-8C85-30FE7E7CD2B1}"/>
               </a:ext>
             </a:extLst>
           </p:cNvPr>
@@ -13409,7 +14091,7 @@
           <p:cNvPr id="224" name="diagram-303">
             <a:extLst xmlns:a="http://schemas.openxmlformats.org/drawingml/2006/main">
               <a:ext uri="{FF2B5EF4-FFF2-40B4-BE49-F238E27FC236}">
-                <a16:creationId xmlns:a16="http://schemas.microsoft.com/office/drawing/2014/main" id="{5A7AF758-469D-4A0F-A290-B9ECC84A151B}"/>
+                <a16:creationId xmlns:a16="http://schemas.microsoft.com/office/drawing/2014/main" id="{0A8B7411-6593-4CA8-BF85-33CCFB791229}"/>
               </a:ext>
             </a:extLst>
           </p:cNvPr>
@@ -13441,7 +14123,7 @@
           <p:cNvPr id="225" name="diagram-304">
             <a:extLst xmlns:a="http://schemas.openxmlformats.org/drawingml/2006/main">
               <a:ext uri="{FF2B5EF4-FFF2-40B4-BE49-F238E27FC236}">
-                <a16:creationId xmlns:a16="http://schemas.microsoft.com/office/drawing/2014/main" id="{AB6148A0-A651-435B-AC1B-4CA1F3B33B02}"/>
+                <a16:creationId xmlns:a16="http://schemas.microsoft.com/office/drawing/2014/main" id="{AC9DFB5C-F3A0-4CD4-8F50-2FBE1E952550}"/>
               </a:ext>
             </a:extLst>
           </p:cNvPr>
@@ -13473,7 +14155,7 @@
           <p:cNvPr id="226" name="diagram-305">
             <a:extLst xmlns:a="http://schemas.openxmlformats.org/drawingml/2006/main">
               <a:ext uri="{FF2B5EF4-FFF2-40B4-BE49-F238E27FC236}">
-                <a16:creationId xmlns:a16="http://schemas.microsoft.com/office/drawing/2014/main" id="{339B5FFC-968C-4753-A86F-C411C0F99E0C}"/>
+                <a16:creationId xmlns:a16="http://schemas.microsoft.com/office/drawing/2014/main" id="{6DBB15C1-60A3-493B-9438-72984B3021BD}"/>
               </a:ext>
             </a:extLst>
           </p:cNvPr>
@@ -13505,7 +14187,7 @@
           <p:cNvPr id="227" name="diagram-306">
             <a:extLst xmlns:a="http://schemas.openxmlformats.org/drawingml/2006/main">
               <a:ext uri="{FF2B5EF4-FFF2-40B4-BE49-F238E27FC236}">
-                <a16:creationId xmlns:a16="http://schemas.microsoft.com/office/drawing/2014/main" id="{BA72D77F-6195-4F99-A1C9-31F61456FBA1}"/>
+                <a16:creationId xmlns:a16="http://schemas.microsoft.com/office/drawing/2014/main" id="{77E309FB-C67F-4CB9-B956-D1B8787401BD}"/>
               </a:ext>
             </a:extLst>
           </p:cNvPr>
@@ -13537,7 +14219,7 @@
           <p:cNvPr id="228" name="diagram-307">
             <a:extLst xmlns:a="http://schemas.openxmlformats.org/drawingml/2006/main">
               <a:ext uri="{FF2B5EF4-FFF2-40B4-BE49-F238E27FC236}">
-                <a16:creationId xmlns:a16="http://schemas.microsoft.com/office/drawing/2014/main" id="{D570E0FA-ACD1-4FA1-9597-B1E1F3720D26}"/>
+                <a16:creationId xmlns:a16="http://schemas.microsoft.com/office/drawing/2014/main" id="{220A4CE5-D3FC-4D7F-8755-786EC7DF4605}"/>
               </a:ext>
             </a:extLst>
           </p:cNvPr>
@@ -13569,7 +14251,7 @@
           <p:cNvPr id="229" name="diagram-308">
             <a:extLst xmlns:a="http://schemas.openxmlformats.org/drawingml/2006/main">
               <a:ext uri="{FF2B5EF4-FFF2-40B4-BE49-F238E27FC236}">
-                <a16:creationId xmlns:a16="http://schemas.microsoft.com/office/drawing/2014/main" id="{BB998E76-115E-45D6-BB8B-70137E66E7C4}"/>
+                <a16:creationId xmlns:a16="http://schemas.microsoft.com/office/drawing/2014/main" id="{76899A75-E3DB-4366-AC1E-E3A91F57F2FF}"/>
               </a:ext>
             </a:extLst>
           </p:cNvPr>
@@ -13601,7 +14283,7 @@
           <p:cNvPr id="230" name="diagram-309">
             <a:extLst xmlns:a="http://schemas.openxmlformats.org/drawingml/2006/main">
               <a:ext uri="{FF2B5EF4-FFF2-40B4-BE49-F238E27FC236}">
-                <a16:creationId xmlns:a16="http://schemas.microsoft.com/office/drawing/2014/main" id="{97F68733-F171-4BA2-86C5-8EAF764B0B18}"/>
+                <a16:creationId xmlns:a16="http://schemas.microsoft.com/office/drawing/2014/main" id="{EE79A9F7-712A-4D0C-8B8C-CA93E8EC3ACF}"/>
               </a:ext>
             </a:extLst>
           </p:cNvPr>
@@ -13633,7 +14315,7 @@
           <p:cNvPr id="231" name="diagram-310">
             <a:extLst xmlns:a="http://schemas.openxmlformats.org/drawingml/2006/main">
               <a:ext uri="{FF2B5EF4-FFF2-40B4-BE49-F238E27FC236}">
-                <a16:creationId xmlns:a16="http://schemas.microsoft.com/office/drawing/2014/main" id="{961C9244-22BC-4549-A940-67AF1FCDA8E7}"/>
+                <a16:creationId xmlns:a16="http://schemas.microsoft.com/office/drawing/2014/main" id="{6F3DEB2D-E060-4170-A8F1-50328A518603}"/>
               </a:ext>
             </a:extLst>
           </p:cNvPr>
@@ -13665,7 +14347,7 @@
           <p:cNvPr id="232" name="diagram-311">
             <a:extLst xmlns:a="http://schemas.openxmlformats.org/drawingml/2006/main">
               <a:ext uri="{FF2B5EF4-FFF2-40B4-BE49-F238E27FC236}">
-                <a16:creationId xmlns:a16="http://schemas.microsoft.com/office/drawing/2014/main" id="{CAA3504D-3EF2-43FE-B9FE-0D998091C002}"/>
+                <a16:creationId xmlns:a16="http://schemas.microsoft.com/office/drawing/2014/main" id="{3E49F76E-3321-47C6-8194-96547BA0EAB7}"/>
               </a:ext>
             </a:extLst>
           </p:cNvPr>
@@ -13697,7 +14379,7 @@
           <p:cNvPr id="233" name="diagram-312">
             <a:extLst xmlns:a="http://schemas.openxmlformats.org/drawingml/2006/main">
               <a:ext uri="{FF2B5EF4-FFF2-40B4-BE49-F238E27FC236}">
-                <a16:creationId xmlns:a16="http://schemas.microsoft.com/office/drawing/2014/main" id="{976C7EA9-CCE6-4CBE-924E-D29DADB616FB}"/>
+                <a16:creationId xmlns:a16="http://schemas.microsoft.com/office/drawing/2014/main" id="{2246C856-02E9-4A3C-B448-B4A7186665B9}"/>
               </a:ext>
             </a:extLst>
           </p:cNvPr>
@@ -13729,7 +14411,7 @@
           <p:cNvPr id="234" name="diagram-313">
             <a:extLst xmlns:a="http://schemas.openxmlformats.org/drawingml/2006/main">
               <a:ext uri="{FF2B5EF4-FFF2-40B4-BE49-F238E27FC236}">
-                <a16:creationId xmlns:a16="http://schemas.microsoft.com/office/drawing/2014/main" id="{920EEF0C-7041-4CA8-8E13-71D62C6B4644}"/>
+                <a16:creationId xmlns:a16="http://schemas.microsoft.com/office/drawing/2014/main" id="{2D79C26B-6889-4458-A23D-F2A1655ECBBB}"/>
               </a:ext>
             </a:extLst>
           </p:cNvPr>
@@ -13761,7 +14443,7 @@
           <p:cNvPr id="235" name="diagram-314">
             <a:extLst xmlns:a="http://schemas.openxmlformats.org/drawingml/2006/main">
               <a:ext uri="{FF2B5EF4-FFF2-40B4-BE49-F238E27FC236}">
-                <a16:creationId xmlns:a16="http://schemas.microsoft.com/office/drawing/2014/main" id="{7E03FAD7-5C1B-4615-9560-2370791098FA}"/>
+                <a16:creationId xmlns:a16="http://schemas.microsoft.com/office/drawing/2014/main" id="{EFFCE3A2-92D0-4121-B2B8-CBC9912030B0}"/>
               </a:ext>
             </a:extLst>
           </p:cNvPr>
@@ -13793,7 +14475,7 @@
           <p:cNvPr id="236" name="diagram-315">
             <a:extLst xmlns:a="http://schemas.openxmlformats.org/drawingml/2006/main">
               <a:ext uri="{FF2B5EF4-FFF2-40B4-BE49-F238E27FC236}">
-                <a16:creationId xmlns:a16="http://schemas.microsoft.com/office/drawing/2014/main" id="{1AE90E36-DE27-4FE0-A760-2D7C50DD3B95}"/>
+                <a16:creationId xmlns:a16="http://schemas.microsoft.com/office/drawing/2014/main" id="{8AD19100-F481-4BBB-A18B-703A76ACD28D}"/>
               </a:ext>
             </a:extLst>
           </p:cNvPr>
@@ -13825,7 +14507,7 @@
           <p:cNvPr id="237" name="diagram-316">
             <a:extLst xmlns:a="http://schemas.openxmlformats.org/drawingml/2006/main">
               <a:ext uri="{FF2B5EF4-FFF2-40B4-BE49-F238E27FC236}">
-                <a16:creationId xmlns:a16="http://schemas.microsoft.com/office/drawing/2014/main" id="{FDE5515D-9A45-4DCC-B948-E5321361D16D}"/>
+                <a16:creationId xmlns:a16="http://schemas.microsoft.com/office/drawing/2014/main" id="{570820FE-D79C-4F5B-BEE0-503B812FEB30}"/>
               </a:ext>
             </a:extLst>
           </p:cNvPr>
@@ -13857,7 +14539,7 @@
           <p:cNvPr id="238" name="diagram-317">
             <a:extLst xmlns:a="http://schemas.openxmlformats.org/drawingml/2006/main">
               <a:ext uri="{FF2B5EF4-FFF2-40B4-BE49-F238E27FC236}">
-                <a16:creationId xmlns:a16="http://schemas.microsoft.com/office/drawing/2014/main" id="{9D40A222-CE3B-43E4-A3A8-63705DF564FC}"/>
+                <a16:creationId xmlns:a16="http://schemas.microsoft.com/office/drawing/2014/main" id="{395A6B45-0C15-4790-9690-13416BF90922}"/>
               </a:ext>
             </a:extLst>
           </p:cNvPr>
@@ -13889,7 +14571,7 @@
           <p:cNvPr id="239" name="diagram-318">
             <a:extLst xmlns:a="http://schemas.openxmlformats.org/drawingml/2006/main">
               <a:ext uri="{FF2B5EF4-FFF2-40B4-BE49-F238E27FC236}">
-                <a16:creationId xmlns:a16="http://schemas.microsoft.com/office/drawing/2014/main" id="{FA3710DE-D609-44EB-ADE1-7123D7E53585}"/>
+                <a16:creationId xmlns:a16="http://schemas.microsoft.com/office/drawing/2014/main" id="{F6C07459-4C52-49E9-AD20-1B9BA8B2CB15}"/>
               </a:ext>
             </a:extLst>
           </p:cNvPr>
@@ -13921,7 +14603,7 @@
           <p:cNvPr id="240" name="diagram-319">
             <a:extLst xmlns:a="http://schemas.openxmlformats.org/drawingml/2006/main">
               <a:ext uri="{FF2B5EF4-FFF2-40B4-BE49-F238E27FC236}">
-                <a16:creationId xmlns:a16="http://schemas.microsoft.com/office/drawing/2014/main" id="{331F9F63-C9C3-499C-AB9C-414DDEE23AF8}"/>
+                <a16:creationId xmlns:a16="http://schemas.microsoft.com/office/drawing/2014/main" id="{7FDA177D-516A-4781-B43F-4B9760054EC4}"/>
               </a:ext>
             </a:extLst>
           </p:cNvPr>
@@ -13953,7 +14635,7 @@
           <p:cNvPr id="241" name="diagram-320">
             <a:extLst xmlns:a="http://schemas.openxmlformats.org/drawingml/2006/main">
               <a:ext uri="{FF2B5EF4-FFF2-40B4-BE49-F238E27FC236}">
-                <a16:creationId xmlns:a16="http://schemas.microsoft.com/office/drawing/2014/main" id="{EB05F8F3-C410-4025-B012-9E95D98B7FCB}"/>
+                <a16:creationId xmlns:a16="http://schemas.microsoft.com/office/drawing/2014/main" id="{89133A8A-6DE4-4373-BFC3-5E742E77C375}"/>
               </a:ext>
             </a:extLst>
           </p:cNvPr>
@@ -13985,7 +14667,7 @@
           <p:cNvPr id="242" name="diagram-321">
             <a:extLst xmlns:a="http://schemas.openxmlformats.org/drawingml/2006/main">
               <a:ext uri="{FF2B5EF4-FFF2-40B4-BE49-F238E27FC236}">
-                <a16:creationId xmlns:a16="http://schemas.microsoft.com/office/drawing/2014/main" id="{F6314AF3-A9FA-4795-AFEA-6198CC0E6B2C}"/>
+                <a16:creationId xmlns:a16="http://schemas.microsoft.com/office/drawing/2014/main" id="{E2C30DF2-52F8-44E6-82BD-62A190595818}"/>
               </a:ext>
             </a:extLst>
           </p:cNvPr>
@@ -14017,7 +14699,7 @@
           <p:cNvPr id="243" name="diagram-322">
             <a:extLst xmlns:a="http://schemas.openxmlformats.org/drawingml/2006/main">
               <a:ext uri="{FF2B5EF4-FFF2-40B4-BE49-F238E27FC236}">
-                <a16:creationId xmlns:a16="http://schemas.microsoft.com/office/drawing/2014/main" id="{9C526F63-9D73-4CBA-9CD6-B4B1F18A3D8B}"/>
+                <a16:creationId xmlns:a16="http://schemas.microsoft.com/office/drawing/2014/main" id="{183B113E-AFE6-4A73-A20D-6FB308739873}"/>
               </a:ext>
             </a:extLst>
           </p:cNvPr>
@@ -14049,7 +14731,7 @@
           <p:cNvPr id="244" name="diagram-323">
             <a:extLst xmlns:a="http://schemas.openxmlformats.org/drawingml/2006/main">
               <a:ext uri="{FF2B5EF4-FFF2-40B4-BE49-F238E27FC236}">
-                <a16:creationId xmlns:a16="http://schemas.microsoft.com/office/drawing/2014/main" id="{3272D4DC-E26E-49C6-A889-773A3735E670}"/>
+                <a16:creationId xmlns:a16="http://schemas.microsoft.com/office/drawing/2014/main" id="{7F9B3891-B453-455E-A5F3-C12985820450}"/>
               </a:ext>
             </a:extLst>
           </p:cNvPr>
@@ -14081,7 +14763,7 @@
           <p:cNvPr id="245" name="diagram-324">
             <a:extLst xmlns:a="http://schemas.openxmlformats.org/drawingml/2006/main">
               <a:ext uri="{FF2B5EF4-FFF2-40B4-BE49-F238E27FC236}">
-                <a16:creationId xmlns:a16="http://schemas.microsoft.com/office/drawing/2014/main" id="{3118E344-97E2-43D9-ACB6-D0327B417EC2}"/>
+                <a16:creationId xmlns:a16="http://schemas.microsoft.com/office/drawing/2014/main" id="{2B4E77C0-11D7-4B2F-92BB-3FA599656BEB}"/>
               </a:ext>
             </a:extLst>
           </p:cNvPr>
@@ -14113,7 +14795,7 @@
           <p:cNvPr id="246" name="diagram-325">
             <a:extLst xmlns:a="http://schemas.openxmlformats.org/drawingml/2006/main">
               <a:ext uri="{FF2B5EF4-FFF2-40B4-BE49-F238E27FC236}">
-                <a16:creationId xmlns:a16="http://schemas.microsoft.com/office/drawing/2014/main" id="{F470A33A-C9DA-4582-8576-283217668FA3}"/>
+                <a16:creationId xmlns:a16="http://schemas.microsoft.com/office/drawing/2014/main" id="{9F0931D9-3CF7-4C1A-9E8B-D924793495B3}"/>
               </a:ext>
             </a:extLst>
           </p:cNvPr>
@@ -14145,7 +14827,7 @@
           <p:cNvPr id="247" name="diagram-326">
             <a:extLst xmlns:a="http://schemas.openxmlformats.org/drawingml/2006/main">
               <a:ext uri="{FF2B5EF4-FFF2-40B4-BE49-F238E27FC236}">
-                <a16:creationId xmlns:a16="http://schemas.microsoft.com/office/drawing/2014/main" id="{A4661D63-89EB-4623-9159-D1674C4363CF}"/>
+                <a16:creationId xmlns:a16="http://schemas.microsoft.com/office/drawing/2014/main" id="{A4FF7FDB-00BE-4073-B196-CF0F6D1505B5}"/>
               </a:ext>
             </a:extLst>
           </p:cNvPr>
@@ -14177,7 +14859,7 @@
           <p:cNvPr id="248" name="diagram-327">
             <a:extLst xmlns:a="http://schemas.openxmlformats.org/drawingml/2006/main">
               <a:ext uri="{FF2B5EF4-FFF2-40B4-BE49-F238E27FC236}">
-                <a16:creationId xmlns:a16="http://schemas.microsoft.com/office/drawing/2014/main" id="{A42B2EDF-4559-4448-A8DE-46481F5D61DB}"/>
+                <a16:creationId xmlns:a16="http://schemas.microsoft.com/office/drawing/2014/main" id="{FEBC4759-F3AF-4351-9CDA-04AF83DBE988}"/>
               </a:ext>
             </a:extLst>
           </p:cNvPr>
@@ -14209,7 +14891,7 @@
           <p:cNvPr id="249" name="diagram-328">
             <a:extLst xmlns:a="http://schemas.openxmlformats.org/drawingml/2006/main">
               <a:ext uri="{FF2B5EF4-FFF2-40B4-BE49-F238E27FC236}">
-                <a16:creationId xmlns:a16="http://schemas.microsoft.com/office/drawing/2014/main" id="{C3C742DF-D0AE-41DF-A731-C7EDAE06AD0A}"/>
+                <a16:creationId xmlns:a16="http://schemas.microsoft.com/office/drawing/2014/main" id="{D305F759-7035-425F-A32F-A122042AFB3B}"/>
               </a:ext>
             </a:extLst>
           </p:cNvPr>
@@ -14241,7 +14923,7 @@
           <p:cNvPr id="250" name="diagram-329">
             <a:extLst xmlns:a="http://schemas.openxmlformats.org/drawingml/2006/main">
               <a:ext uri="{FF2B5EF4-FFF2-40B4-BE49-F238E27FC236}">
-                <a16:creationId xmlns:a16="http://schemas.microsoft.com/office/drawing/2014/main" id="{6A67C18B-A4D2-4B04-AB04-703DA989BBA8}"/>
+                <a16:creationId xmlns:a16="http://schemas.microsoft.com/office/drawing/2014/main" id="{70A02916-477E-4D58-ABE7-92BDFF9AB852}"/>
               </a:ext>
             </a:extLst>
           </p:cNvPr>
@@ -14273,7 +14955,7 @@
           <p:cNvPr id="251" name="diagram-330">
             <a:extLst xmlns:a="http://schemas.openxmlformats.org/drawingml/2006/main">
               <a:ext uri="{FF2B5EF4-FFF2-40B4-BE49-F238E27FC236}">
-                <a16:creationId xmlns:a16="http://schemas.microsoft.com/office/drawing/2014/main" id="{B903404E-31DE-4A48-95AA-20CFB09E36A6}"/>
+                <a16:creationId xmlns:a16="http://schemas.microsoft.com/office/drawing/2014/main" id="{1373F18A-BE61-4EE1-8C9A-58EC07BE2523}"/>
               </a:ext>
             </a:extLst>
           </p:cNvPr>
@@ -14305,7 +14987,7 @@
           <p:cNvPr id="252" name="diagram-331">
             <a:extLst xmlns:a="http://schemas.openxmlformats.org/drawingml/2006/main">
               <a:ext uri="{FF2B5EF4-FFF2-40B4-BE49-F238E27FC236}">
-                <a16:creationId xmlns:a16="http://schemas.microsoft.com/office/drawing/2014/main" id="{19D34F10-176E-4143-8DFE-06F0178A83B1}"/>
+                <a16:creationId xmlns:a16="http://schemas.microsoft.com/office/drawing/2014/main" id="{E8CBDC18-B2F9-41A7-AA41-14D38E413C95}"/>
               </a:ext>
             </a:extLst>
           </p:cNvPr>
@@ -14337,7 +15019,7 @@
           <p:cNvPr id="253" name="diagram-332">
             <a:extLst xmlns:a="http://schemas.openxmlformats.org/drawingml/2006/main">
               <a:ext uri="{FF2B5EF4-FFF2-40B4-BE49-F238E27FC236}">
-                <a16:creationId xmlns:a16="http://schemas.microsoft.com/office/drawing/2014/main" id="{37EDFAF2-102B-43AF-A0A0-C069574A2F1F}"/>
+                <a16:creationId xmlns:a16="http://schemas.microsoft.com/office/drawing/2014/main" id="{F5A26815-3017-4557-A515-E05E102702D6}"/>
               </a:ext>
             </a:extLst>
           </p:cNvPr>
@@ -14369,7 +15051,7 @@
           <p:cNvPr id="254" name="diagram-333">
             <a:extLst xmlns:a="http://schemas.openxmlformats.org/drawingml/2006/main">
               <a:ext uri="{FF2B5EF4-FFF2-40B4-BE49-F238E27FC236}">
-                <a16:creationId xmlns:a16="http://schemas.microsoft.com/office/drawing/2014/main" id="{EA24CE6D-4595-4B38-A639-CF8DF7C4D963}"/>
+                <a16:creationId xmlns:a16="http://schemas.microsoft.com/office/drawing/2014/main" id="{9F768692-E4BF-4AA6-A559-974D889103C0}"/>
               </a:ext>
             </a:extLst>
           </p:cNvPr>
@@ -14401,7 +15083,7 @@
           <p:cNvPr id="255" name="diagram-334">
             <a:extLst xmlns:a="http://schemas.openxmlformats.org/drawingml/2006/main">
               <a:ext uri="{FF2B5EF4-FFF2-40B4-BE49-F238E27FC236}">
-                <a16:creationId xmlns:a16="http://schemas.microsoft.com/office/drawing/2014/main" id="{23DA1CB1-B2FA-43D9-B9E8-5F8546653A17}"/>
+                <a16:creationId xmlns:a16="http://schemas.microsoft.com/office/drawing/2014/main" id="{04F3336D-5EF3-4373-AD49-0C64CB0B1271}"/>
               </a:ext>
             </a:extLst>
           </p:cNvPr>
@@ -14433,7 +15115,7 @@
           <p:cNvPr id="256" name="diagram-335">
             <a:extLst xmlns:a="http://schemas.openxmlformats.org/drawingml/2006/main">
               <a:ext uri="{FF2B5EF4-FFF2-40B4-BE49-F238E27FC236}">
-                <a16:creationId xmlns:a16="http://schemas.microsoft.com/office/drawing/2014/main" id="{1305FB7A-4BF4-4CC1-A750-29C7FC1A0BFD}"/>
+                <a16:creationId xmlns:a16="http://schemas.microsoft.com/office/drawing/2014/main" id="{42EFE270-D3C6-401B-B2C4-1D072E141655}"/>
               </a:ext>
             </a:extLst>
           </p:cNvPr>
@@ -14465,7 +15147,7 @@
           <p:cNvPr id="257" name="diagram-336">
             <a:extLst xmlns:a="http://schemas.openxmlformats.org/drawingml/2006/main">
               <a:ext uri="{FF2B5EF4-FFF2-40B4-BE49-F238E27FC236}">
-                <a16:creationId xmlns:a16="http://schemas.microsoft.com/office/drawing/2014/main" id="{1BF1E7F5-9564-4140-9D17-BF481752D5A9}"/>
+                <a16:creationId xmlns:a16="http://schemas.microsoft.com/office/drawing/2014/main" id="{7C76542D-3DE9-44B7-8491-378A76A5607C}"/>
               </a:ext>
             </a:extLst>
           </p:cNvPr>
@@ -14497,7 +15179,7 @@
           <p:cNvPr id="258" name="diagram-337">
             <a:extLst xmlns:a="http://schemas.openxmlformats.org/drawingml/2006/main">
               <a:ext uri="{FF2B5EF4-FFF2-40B4-BE49-F238E27FC236}">
-                <a16:creationId xmlns:a16="http://schemas.microsoft.com/office/drawing/2014/main" id="{DED637B6-DA2E-4DC5-97E8-C34C777E865D}"/>
+                <a16:creationId xmlns:a16="http://schemas.microsoft.com/office/drawing/2014/main" id="{6A1A8F10-3A42-4E00-ABD9-2FFAA5E838F4}"/>
               </a:ext>
             </a:extLst>
           </p:cNvPr>
@@ -14529,7 +15211,7 @@
           <p:cNvPr id="259" name="diagram-338">
             <a:extLst xmlns:a="http://schemas.openxmlformats.org/drawingml/2006/main">
               <a:ext uri="{FF2B5EF4-FFF2-40B4-BE49-F238E27FC236}">
-                <a16:creationId xmlns:a16="http://schemas.microsoft.com/office/drawing/2014/main" id="{00A6BB91-9AA9-4426-9E76-900ACD6A4B77}"/>
+                <a16:creationId xmlns:a16="http://schemas.microsoft.com/office/drawing/2014/main" id="{504AFA96-998A-4C86-AE4E-CE7C065118FA}"/>
               </a:ext>
             </a:extLst>
           </p:cNvPr>
@@ -14561,7 +15243,7 @@
           <p:cNvPr id="260" name="diagram-339">
             <a:extLst xmlns:a="http://schemas.openxmlformats.org/drawingml/2006/main">
               <a:ext uri="{FF2B5EF4-FFF2-40B4-BE49-F238E27FC236}">
-                <a16:creationId xmlns:a16="http://schemas.microsoft.com/office/drawing/2014/main" id="{5BE47268-CC6E-47BF-97A3-5914C38A0682}"/>
+                <a16:creationId xmlns:a16="http://schemas.microsoft.com/office/drawing/2014/main" id="{10406094-0513-48AD-88F8-9696A57606F3}"/>
               </a:ext>
             </a:extLst>
           </p:cNvPr>
@@ -14593,7 +15275,7 @@
           <p:cNvPr id="261" name="diagram-340">
             <a:extLst xmlns:a="http://schemas.openxmlformats.org/drawingml/2006/main">
               <a:ext uri="{FF2B5EF4-FFF2-40B4-BE49-F238E27FC236}">
-                <a16:creationId xmlns:a16="http://schemas.microsoft.com/office/drawing/2014/main" id="{2CEA8D2D-7373-4156-9DAD-3AFD56955567}"/>
+                <a16:creationId xmlns:a16="http://schemas.microsoft.com/office/drawing/2014/main" id="{5D9DEBDF-A3CE-4C66-921B-DB75AD401F2B}"/>
               </a:ext>
             </a:extLst>
           </p:cNvPr>
@@ -14625,7 +15307,7 @@
           <p:cNvPr id="262" name="diagram-341">
             <a:extLst xmlns:a="http://schemas.openxmlformats.org/drawingml/2006/main">
               <a:ext uri="{FF2B5EF4-FFF2-40B4-BE49-F238E27FC236}">
-                <a16:creationId xmlns:a16="http://schemas.microsoft.com/office/drawing/2014/main" id="{42C6AC1E-CDBC-4930-8531-81DD8985B50D}"/>
+                <a16:creationId xmlns:a16="http://schemas.microsoft.com/office/drawing/2014/main" id="{257ECDC7-475B-43BC-94C2-EFDBDC5BA0D9}"/>
               </a:ext>
             </a:extLst>
           </p:cNvPr>
@@ -14657,7 +15339,7 @@
           <p:cNvPr id="263" name="diagram-342">
             <a:extLst xmlns:a="http://schemas.openxmlformats.org/drawingml/2006/main">
               <a:ext uri="{FF2B5EF4-FFF2-40B4-BE49-F238E27FC236}">
-                <a16:creationId xmlns:a16="http://schemas.microsoft.com/office/drawing/2014/main" id="{F1CDA499-06CD-4A06-87F6-3962A2C50740}"/>
+                <a16:creationId xmlns:a16="http://schemas.microsoft.com/office/drawing/2014/main" id="{CD9867D1-DBC9-4506-B8F0-6CEABE513F3F}"/>
               </a:ext>
             </a:extLst>
           </p:cNvPr>
@@ -14689,7 +15371,7 @@
           <p:cNvPr id="264" name="diagram-343">
             <a:extLst xmlns:a="http://schemas.openxmlformats.org/drawingml/2006/main">
               <a:ext uri="{FF2B5EF4-FFF2-40B4-BE49-F238E27FC236}">
-                <a16:creationId xmlns:a16="http://schemas.microsoft.com/office/drawing/2014/main" id="{EC5A5838-5947-4749-AB5C-2D696CCD9679}"/>
+                <a16:creationId xmlns:a16="http://schemas.microsoft.com/office/drawing/2014/main" id="{D8B2E94F-8B5E-4334-B859-4833A51357D5}"/>
               </a:ext>
             </a:extLst>
           </p:cNvPr>
@@ -14721,7 +15403,7 @@
           <p:cNvPr id="265" name="diagram-344">
             <a:extLst xmlns:a="http://schemas.openxmlformats.org/drawingml/2006/main">
               <a:ext uri="{FF2B5EF4-FFF2-40B4-BE49-F238E27FC236}">
-                <a16:creationId xmlns:a16="http://schemas.microsoft.com/office/drawing/2014/main" id="{B3D165E8-0BF7-4306-91A7-FC6FDA99AB6B}"/>
+                <a16:creationId xmlns:a16="http://schemas.microsoft.com/office/drawing/2014/main" id="{0226D686-C9BA-41EB-8877-89D2F2753821}"/>
               </a:ext>
             </a:extLst>
           </p:cNvPr>
@@ -14753,7 +15435,7 @@
           <p:cNvPr id="266" name="diagram-345">
             <a:extLst xmlns:a="http://schemas.openxmlformats.org/drawingml/2006/main">
               <a:ext uri="{FF2B5EF4-FFF2-40B4-BE49-F238E27FC236}">
-                <a16:creationId xmlns:a16="http://schemas.microsoft.com/office/drawing/2014/main" id="{4C4D6E72-E388-4729-9281-EB537423B9ED}"/>
+                <a16:creationId xmlns:a16="http://schemas.microsoft.com/office/drawing/2014/main" id="{D4984A7B-6884-4F0A-B7F2-92761713B8B8}"/>
               </a:ext>
             </a:extLst>
           </p:cNvPr>
@@ -14785,7 +15467,7 @@
           <p:cNvPr id="267" name="diagram-346">
             <a:extLst xmlns:a="http://schemas.openxmlformats.org/drawingml/2006/main">
               <a:ext uri="{FF2B5EF4-FFF2-40B4-BE49-F238E27FC236}">
-                <a16:creationId xmlns:a16="http://schemas.microsoft.com/office/drawing/2014/main" id="{76A10F9D-DE98-4579-9AA0-9CD40A82975B}"/>
+                <a16:creationId xmlns:a16="http://schemas.microsoft.com/office/drawing/2014/main" id="{926DDA2E-37E8-442D-9A20-63EDA12F3D03}"/>
               </a:ext>
             </a:extLst>
           </p:cNvPr>
@@ -14817,7 +15499,7 @@
           <p:cNvPr id="268" name="diagram-347">
             <a:extLst xmlns:a="http://schemas.openxmlformats.org/drawingml/2006/main">
               <a:ext uri="{FF2B5EF4-FFF2-40B4-BE49-F238E27FC236}">
-                <a16:creationId xmlns:a16="http://schemas.microsoft.com/office/drawing/2014/main" id="{1A581277-DFEA-49C5-97C0-0984248D3C47}"/>
+                <a16:creationId xmlns:a16="http://schemas.microsoft.com/office/drawing/2014/main" id="{D883E7FF-0A62-4536-B9EA-0F8734365D4B}"/>
               </a:ext>
             </a:extLst>
           </p:cNvPr>
@@ -14849,7 +15531,7 @@
           <p:cNvPr id="269" name="diagram-348">
             <a:extLst xmlns:a="http://schemas.openxmlformats.org/drawingml/2006/main">
               <a:ext uri="{FF2B5EF4-FFF2-40B4-BE49-F238E27FC236}">
-                <a16:creationId xmlns:a16="http://schemas.microsoft.com/office/drawing/2014/main" id="{D22098F2-DB48-448D-8D8E-1537F847DCBB}"/>
+                <a16:creationId xmlns:a16="http://schemas.microsoft.com/office/drawing/2014/main" id="{6BAE6BA3-E5FD-4D69-AD07-5C9F0FF5018D}"/>
               </a:ext>
             </a:extLst>
           </p:cNvPr>
@@ -14881,7 +15563,7 @@
           <p:cNvPr id="270" name="diagram-349">
             <a:extLst xmlns:a="http://schemas.openxmlformats.org/drawingml/2006/main">
               <a:ext uri="{FF2B5EF4-FFF2-40B4-BE49-F238E27FC236}">
-                <a16:creationId xmlns:a16="http://schemas.microsoft.com/office/drawing/2014/main" id="{0CB77A70-3DC4-4ED4-8D80-BDB8FC7957F7}"/>
+                <a16:creationId xmlns:a16="http://schemas.microsoft.com/office/drawing/2014/main" id="{B3AC3C60-ADBD-4128-B042-C85FB95DD80A}"/>
               </a:ext>
             </a:extLst>
           </p:cNvPr>
@@ -14913,7 +15595,7 @@
           <p:cNvPr id="271" name="diagram-350">
             <a:extLst xmlns:a="http://schemas.openxmlformats.org/drawingml/2006/main">
               <a:ext uri="{FF2B5EF4-FFF2-40B4-BE49-F238E27FC236}">
-                <a16:creationId xmlns:a16="http://schemas.microsoft.com/office/drawing/2014/main" id="{15E65823-1791-436C-82C9-CAC072B2B562}"/>
+                <a16:creationId xmlns:a16="http://schemas.microsoft.com/office/drawing/2014/main" id="{D0FE0CFA-EC15-465D-B38C-C1093E2141CE}"/>
               </a:ext>
             </a:extLst>
           </p:cNvPr>
@@ -14945,7 +15627,7 @@
           <p:cNvPr id="272" name="diagram-351">
             <a:extLst xmlns:a="http://schemas.openxmlformats.org/drawingml/2006/main">
               <a:ext uri="{FF2B5EF4-FFF2-40B4-BE49-F238E27FC236}">
-                <a16:creationId xmlns:a16="http://schemas.microsoft.com/office/drawing/2014/main" id="{6980252D-2C1A-4422-B9F1-537A59710A0E}"/>
+                <a16:creationId xmlns:a16="http://schemas.microsoft.com/office/drawing/2014/main" id="{6D49D575-77E9-44BC-9DFD-A6ED0AB69F6F}"/>
               </a:ext>
             </a:extLst>
           </p:cNvPr>
@@ -14977,7 +15659,7 @@
           <p:cNvPr id="273" name="diagram-352">
             <a:extLst xmlns:a="http://schemas.openxmlformats.org/drawingml/2006/main">
               <a:ext uri="{FF2B5EF4-FFF2-40B4-BE49-F238E27FC236}">
-                <a16:creationId xmlns:a16="http://schemas.microsoft.com/office/drawing/2014/main" id="{7359E958-EF33-414F-B74C-1EB75EB6D6F4}"/>
+                <a16:creationId xmlns:a16="http://schemas.microsoft.com/office/drawing/2014/main" id="{0ABD8CC1-A6EB-4192-8CA1-CC7DB7FF3579}"/>
               </a:ext>
             </a:extLst>
           </p:cNvPr>
@@ -15009,7 +15691,7 @@
           <p:cNvPr id="274" name="diagram-353">
             <a:extLst xmlns:a="http://schemas.openxmlformats.org/drawingml/2006/main">
               <a:ext uri="{FF2B5EF4-FFF2-40B4-BE49-F238E27FC236}">
-                <a16:creationId xmlns:a16="http://schemas.microsoft.com/office/drawing/2014/main" id="{B0A15F98-B8AB-40A3-8E09-E4DC09315FE9}"/>
+                <a16:creationId xmlns:a16="http://schemas.microsoft.com/office/drawing/2014/main" id="{C3773F88-C68C-4D44-B70B-258FFC02106A}"/>
               </a:ext>
             </a:extLst>
           </p:cNvPr>
@@ -15041,7 +15723,7 @@
           <p:cNvPr id="275" name="diagram-354">
             <a:extLst xmlns:a="http://schemas.openxmlformats.org/drawingml/2006/main">
               <a:ext uri="{FF2B5EF4-FFF2-40B4-BE49-F238E27FC236}">
-                <a16:creationId xmlns:a16="http://schemas.microsoft.com/office/drawing/2014/main" id="{3CB135AA-2BE5-41A5-B508-694C36A38D65}"/>
+                <a16:creationId xmlns:a16="http://schemas.microsoft.com/office/drawing/2014/main" id="{F33AFD36-C497-4077-98D0-0F4E2AF7FBD1}"/>
               </a:ext>
             </a:extLst>
           </p:cNvPr>
@@ -15073,7 +15755,7 @@
           <p:cNvPr id="276" name="diagram-355">
             <a:extLst xmlns:a="http://schemas.openxmlformats.org/drawingml/2006/main">
               <a:ext uri="{FF2B5EF4-FFF2-40B4-BE49-F238E27FC236}">
-                <a16:creationId xmlns:a16="http://schemas.microsoft.com/office/drawing/2014/main" id="{C8219887-6953-4100-B0F0-30D4E9CA44B5}"/>
+                <a16:creationId xmlns:a16="http://schemas.microsoft.com/office/drawing/2014/main" id="{81D5037E-F701-4F64-A073-7C42A9512F21}"/>
               </a:ext>
             </a:extLst>
           </p:cNvPr>
@@ -15105,7 +15787,7 @@
           <p:cNvPr id="277" name="diagram-356">
             <a:extLst xmlns:a="http://schemas.openxmlformats.org/drawingml/2006/main">
               <a:ext uri="{FF2B5EF4-FFF2-40B4-BE49-F238E27FC236}">
-                <a16:creationId xmlns:a16="http://schemas.microsoft.com/office/drawing/2014/main" id="{F0C4B314-18B1-45ED-98B6-5030CA0C7EF6}"/>
+                <a16:creationId xmlns:a16="http://schemas.microsoft.com/office/drawing/2014/main" id="{7615CEF3-5C57-4E56-8E5B-05356B6780EF}"/>
               </a:ext>
             </a:extLst>
           </p:cNvPr>
@@ -15137,7 +15819,7 @@
           <p:cNvPr id="278" name="diagram-357">
             <a:extLst xmlns:a="http://schemas.openxmlformats.org/drawingml/2006/main">
               <a:ext uri="{FF2B5EF4-FFF2-40B4-BE49-F238E27FC236}">
-                <a16:creationId xmlns:a16="http://schemas.microsoft.com/office/drawing/2014/main" id="{4F868544-A995-40D9-95AD-2B45A8C4C5B1}"/>
+                <a16:creationId xmlns:a16="http://schemas.microsoft.com/office/drawing/2014/main" id="{B7938FAB-DFAC-48DD-AE09-97E8CBC8953B}"/>
               </a:ext>
             </a:extLst>
           </p:cNvPr>
@@ -15169,7 +15851,7 @@
           <p:cNvPr id="279" name="diagram-358">
             <a:extLst xmlns:a="http://schemas.openxmlformats.org/drawingml/2006/main">
               <a:ext uri="{FF2B5EF4-FFF2-40B4-BE49-F238E27FC236}">
-                <a16:creationId xmlns:a16="http://schemas.microsoft.com/office/drawing/2014/main" id="{F334A2D6-B597-4FA1-9C83-02391835FEEA}"/>
+                <a16:creationId xmlns:a16="http://schemas.microsoft.com/office/drawing/2014/main" id="{9ED89E31-16BD-4E48-9900-DF329141B57C}"/>
               </a:ext>
             </a:extLst>
           </p:cNvPr>
@@ -15201,7 +15883,7 @@
           <p:cNvPr id="280" name="diagram-359">
             <a:extLst xmlns:a="http://schemas.openxmlformats.org/drawingml/2006/main">
               <a:ext uri="{FF2B5EF4-FFF2-40B4-BE49-F238E27FC236}">
-                <a16:creationId xmlns:a16="http://schemas.microsoft.com/office/drawing/2014/main" id="{564E509B-B376-4D3A-83AC-F05704337018}"/>
+                <a16:creationId xmlns:a16="http://schemas.microsoft.com/office/drawing/2014/main" id="{9F36CBCF-1A88-4F25-B8AB-DE400E251D29}"/>
               </a:ext>
             </a:extLst>
           </p:cNvPr>
@@ -15233,7 +15915,7 @@
           <p:cNvPr id="281" name="diagram-360">
             <a:extLst xmlns:a="http://schemas.openxmlformats.org/drawingml/2006/main">
               <a:ext uri="{FF2B5EF4-FFF2-40B4-BE49-F238E27FC236}">
-                <a16:creationId xmlns:a16="http://schemas.microsoft.com/office/drawing/2014/main" id="{0707F04D-0E9B-4A3E-9D46-0525E7D0DE05}"/>
+                <a16:creationId xmlns:a16="http://schemas.microsoft.com/office/drawing/2014/main" id="{2FFB2F9F-3155-4BE1-95F4-51611EDEF567}"/>
               </a:ext>
             </a:extLst>
           </p:cNvPr>
@@ -15265,7 +15947,7 @@
           <p:cNvPr id="282" name="diagram-361">
             <a:extLst xmlns:a="http://schemas.openxmlformats.org/drawingml/2006/main">
               <a:ext uri="{FF2B5EF4-FFF2-40B4-BE49-F238E27FC236}">
-                <a16:creationId xmlns:a16="http://schemas.microsoft.com/office/drawing/2014/main" id="{D98D5220-9B9C-4400-9FB2-79A1D9916797}"/>
+                <a16:creationId xmlns:a16="http://schemas.microsoft.com/office/drawing/2014/main" id="{4946232F-46DE-460C-9387-6325605B1F74}"/>
               </a:ext>
             </a:extLst>
           </p:cNvPr>
@@ -15297,7 +15979,7 @@
           <p:cNvPr id="283" name="diagram-362">
             <a:extLst xmlns:a="http://schemas.openxmlformats.org/drawingml/2006/main">
               <a:ext uri="{FF2B5EF4-FFF2-40B4-BE49-F238E27FC236}">
-                <a16:creationId xmlns:a16="http://schemas.microsoft.com/office/drawing/2014/main" id="{6D98E8F4-2536-452D-BA2B-924005069A6C}"/>
+                <a16:creationId xmlns:a16="http://schemas.microsoft.com/office/drawing/2014/main" id="{DCABF730-A94D-479C-B652-37AFE6C4BC0A}"/>
               </a:ext>
             </a:extLst>
           </p:cNvPr>
@@ -15329,7 +16011,7 @@
           <p:cNvPr id="284" name="diagram-363">
             <a:extLst xmlns:a="http://schemas.openxmlformats.org/drawingml/2006/main">
               <a:ext uri="{FF2B5EF4-FFF2-40B4-BE49-F238E27FC236}">
-                <a16:creationId xmlns:a16="http://schemas.microsoft.com/office/drawing/2014/main" id="{AA7074B7-435C-4186-A3F8-9D58E6273CE1}"/>
+                <a16:creationId xmlns:a16="http://schemas.microsoft.com/office/drawing/2014/main" id="{41299044-936D-4D53-8E37-D137B81DD679}"/>
               </a:ext>
             </a:extLst>
           </p:cNvPr>
@@ -15361,7 +16043,7 @@
           <p:cNvPr id="285" name="diagram-364">
             <a:extLst xmlns:a="http://schemas.openxmlformats.org/drawingml/2006/main">
               <a:ext uri="{FF2B5EF4-FFF2-40B4-BE49-F238E27FC236}">
-                <a16:creationId xmlns:a16="http://schemas.microsoft.com/office/drawing/2014/main" id="{08460ED2-726B-4A94-B982-E3DF5C023162}"/>
+                <a16:creationId xmlns:a16="http://schemas.microsoft.com/office/drawing/2014/main" id="{7FDE4B85-4986-438A-B384-0348804AE733}"/>
               </a:ext>
             </a:extLst>
           </p:cNvPr>
@@ -15393,7 +16075,7 @@
           <p:cNvPr id="286" name="diagram-365">
             <a:extLst xmlns:a="http://schemas.openxmlformats.org/drawingml/2006/main">
               <a:ext uri="{FF2B5EF4-FFF2-40B4-BE49-F238E27FC236}">
-                <a16:creationId xmlns:a16="http://schemas.microsoft.com/office/drawing/2014/main" id="{9FBA2BA8-DF05-49DA-B968-CDF435E9E015}"/>
+                <a16:creationId xmlns:a16="http://schemas.microsoft.com/office/drawing/2014/main" id="{73AB89D7-3F07-47FD-B6F1-083BCB89ECC5}"/>
               </a:ext>
             </a:extLst>
           </p:cNvPr>
@@ -15425,7 +16107,7 @@
           <p:cNvPr id="287" name="diagram-366">
             <a:extLst xmlns:a="http://schemas.openxmlformats.org/drawingml/2006/main">
               <a:ext uri="{FF2B5EF4-FFF2-40B4-BE49-F238E27FC236}">
-                <a16:creationId xmlns:a16="http://schemas.microsoft.com/office/drawing/2014/main" id="{FB7095C5-E346-4682-8097-1F32226F6164}"/>
+                <a16:creationId xmlns:a16="http://schemas.microsoft.com/office/drawing/2014/main" id="{88264D82-98A0-43BC-A33F-59AD28C00352}"/>
               </a:ext>
             </a:extLst>
           </p:cNvPr>
@@ -15457,7 +16139,7 @@
           <p:cNvPr id="288" name="diagram-367">
             <a:extLst xmlns:a="http://schemas.openxmlformats.org/drawingml/2006/main">
               <a:ext uri="{FF2B5EF4-FFF2-40B4-BE49-F238E27FC236}">
-                <a16:creationId xmlns:a16="http://schemas.microsoft.com/office/drawing/2014/main" id="{4DDE87D7-FB9A-4963-8D36-BC38BFA1EF8E}"/>
+                <a16:creationId xmlns:a16="http://schemas.microsoft.com/office/drawing/2014/main" id="{58F8FE7A-2C25-4378-BC9B-FC1B1536E425}"/>
               </a:ext>
             </a:extLst>
           </p:cNvPr>
@@ -15489,7 +16171,7 @@
           <p:cNvPr id="289" name="diagram-368">
             <a:extLst xmlns:a="http://schemas.openxmlformats.org/drawingml/2006/main">
               <a:ext uri="{FF2B5EF4-FFF2-40B4-BE49-F238E27FC236}">
-                <a16:creationId xmlns:a16="http://schemas.microsoft.com/office/drawing/2014/main" id="{7E33E00C-667F-4B31-959B-C2DD4D1DC785}"/>
+                <a16:creationId xmlns:a16="http://schemas.microsoft.com/office/drawing/2014/main" id="{C44589F1-9A09-4746-A567-98C744BBF4EF}"/>
               </a:ext>
             </a:extLst>
           </p:cNvPr>
@@ -15521,7 +16203,7 @@
           <p:cNvPr id="290" name="diagram-369">
             <a:extLst xmlns:a="http://schemas.openxmlformats.org/drawingml/2006/main">
               <a:ext uri="{FF2B5EF4-FFF2-40B4-BE49-F238E27FC236}">
-                <a16:creationId xmlns:a16="http://schemas.microsoft.com/office/drawing/2014/main" id="{F3288D21-67A4-4795-AB37-EE3F5FFC99E1}"/>
+                <a16:creationId xmlns:a16="http://schemas.microsoft.com/office/drawing/2014/main" id="{A3642A6E-BC35-4D9B-AF60-7A45A264062B}"/>
               </a:ext>
             </a:extLst>
           </p:cNvPr>
@@ -15553,7 +16235,7 @@
           <p:cNvPr id="291" name="diagram-370">
             <a:extLst xmlns:a="http://schemas.openxmlformats.org/drawingml/2006/main">
               <a:ext uri="{FF2B5EF4-FFF2-40B4-BE49-F238E27FC236}">
-                <a16:creationId xmlns:a16="http://schemas.microsoft.com/office/drawing/2014/main" id="{6B4C30FC-47B4-41FE-AE05-2F88D4AAF323}"/>
+                <a16:creationId xmlns:a16="http://schemas.microsoft.com/office/drawing/2014/main" id="{3C72BE1F-3A10-423C-8D3B-DF457CCDFD12}"/>
               </a:ext>
             </a:extLst>
           </p:cNvPr>
@@ -15585,7 +16267,7 @@
           <p:cNvPr id="292" name="diagram-371">
             <a:extLst xmlns:a="http://schemas.openxmlformats.org/drawingml/2006/main">
               <a:ext uri="{FF2B5EF4-FFF2-40B4-BE49-F238E27FC236}">
-                <a16:creationId xmlns:a16="http://schemas.microsoft.com/office/drawing/2014/main" id="{C0B1B1EA-9091-434E-B106-5ADD87825DC6}"/>
+                <a16:creationId xmlns:a16="http://schemas.microsoft.com/office/drawing/2014/main" id="{904B4669-7CFF-4956-84C4-7F66B6F2E7B2}"/>
               </a:ext>
             </a:extLst>
           </p:cNvPr>
@@ -15617,7 +16299,7 @@
           <p:cNvPr id="293" name="diagram-372">
             <a:extLst xmlns:a="http://schemas.openxmlformats.org/drawingml/2006/main">
               <a:ext uri="{FF2B5EF4-FFF2-40B4-BE49-F238E27FC236}">
-                <a16:creationId xmlns:a16="http://schemas.microsoft.com/office/drawing/2014/main" id="{EDE8B4E9-5152-4853-8F34-8FA9647A9F23}"/>
+                <a16:creationId xmlns:a16="http://schemas.microsoft.com/office/drawing/2014/main" id="{D6D58EA8-8AAA-4F11-947E-01C4FE21DF8B}"/>
               </a:ext>
             </a:extLst>
           </p:cNvPr>
@@ -15649,7 +16331,7 @@
           <p:cNvPr id="294" name="diagram-373">
             <a:extLst xmlns:a="http://schemas.openxmlformats.org/drawingml/2006/main">
               <a:ext uri="{FF2B5EF4-FFF2-40B4-BE49-F238E27FC236}">
-                <a16:creationId xmlns:a16="http://schemas.microsoft.com/office/drawing/2014/main" id="{CDCB0F08-F174-451F-B32F-84680C4DC8A9}"/>
+                <a16:creationId xmlns:a16="http://schemas.microsoft.com/office/drawing/2014/main" id="{969BAB04-BAC3-4FC7-9673-427F3A24085A}"/>
               </a:ext>
             </a:extLst>
           </p:cNvPr>
@@ -15681,7 +16363,7 @@
           <p:cNvPr id="295" name="diagram-374">
             <a:extLst xmlns:a="http://schemas.openxmlformats.org/drawingml/2006/main">
               <a:ext uri="{FF2B5EF4-FFF2-40B4-BE49-F238E27FC236}">
-                <a16:creationId xmlns:a16="http://schemas.microsoft.com/office/drawing/2014/main" id="{D0A1C4AA-3802-4427-A6D7-BA18B8FC97C4}"/>
+                <a16:creationId xmlns:a16="http://schemas.microsoft.com/office/drawing/2014/main" id="{46934DB1-F619-481F-A117-A342C8453E24}"/>
               </a:ext>
             </a:extLst>
           </p:cNvPr>
@@ -15713,7 +16395,7 @@
           <p:cNvPr id="296" name="diagram-375">
             <a:extLst xmlns:a="http://schemas.openxmlformats.org/drawingml/2006/main">
               <a:ext uri="{FF2B5EF4-FFF2-40B4-BE49-F238E27FC236}">
-                <a16:creationId xmlns:a16="http://schemas.microsoft.com/office/drawing/2014/main" id="{7522A9E7-7BAC-450D-935C-40BE8763D775}"/>
+                <a16:creationId xmlns:a16="http://schemas.microsoft.com/office/drawing/2014/main" id="{32690F56-1879-484C-8055-CA102021A49F}"/>
               </a:ext>
             </a:extLst>
           </p:cNvPr>
@@ -15745,7 +16427,7 @@
           <p:cNvPr id="297" name="diagram-376">
             <a:extLst xmlns:a="http://schemas.openxmlformats.org/drawingml/2006/main">
               <a:ext uri="{FF2B5EF4-FFF2-40B4-BE49-F238E27FC236}">
-                <a16:creationId xmlns:a16="http://schemas.microsoft.com/office/drawing/2014/main" id="{80277F19-B253-4654-99A3-B8C3A20BCCC4}"/>
+                <a16:creationId xmlns:a16="http://schemas.microsoft.com/office/drawing/2014/main" id="{CD61FBCC-5361-481E-AB02-700EE360668A}"/>
               </a:ext>
             </a:extLst>
           </p:cNvPr>
@@ -15777,7 +16459,7 @@
           <p:cNvPr id="298" name="diagram-377">
             <a:extLst xmlns:a="http://schemas.openxmlformats.org/drawingml/2006/main">
               <a:ext uri="{FF2B5EF4-FFF2-40B4-BE49-F238E27FC236}">
-                <a16:creationId xmlns:a16="http://schemas.microsoft.com/office/drawing/2014/main" id="{E0229BE8-FD80-46C9-A59D-CB81B209B03D}"/>
+                <a16:creationId xmlns:a16="http://schemas.microsoft.com/office/drawing/2014/main" id="{12CDBD62-4396-48C0-AA07-A0C3AC56FABB}"/>
               </a:ext>
             </a:extLst>
           </p:cNvPr>
@@ -15809,7 +16491,7 @@
           <p:cNvPr id="299" name="diagram-378">
             <a:extLst xmlns:a="http://schemas.openxmlformats.org/drawingml/2006/main">
               <a:ext uri="{FF2B5EF4-FFF2-40B4-BE49-F238E27FC236}">
-                <a16:creationId xmlns:a16="http://schemas.microsoft.com/office/drawing/2014/main" id="{3B5702F3-B69E-4563-90C2-DCDB22C3725E}"/>
+                <a16:creationId xmlns:a16="http://schemas.microsoft.com/office/drawing/2014/main" id="{0C62F70A-B99D-4576-93DE-4F0217A1BBCC}"/>
               </a:ext>
             </a:extLst>
           </p:cNvPr>
@@ -15841,7 +16523,7 @@
           <p:cNvPr id="300" name="block-border-379">
             <a:extLst xmlns:a="http://schemas.openxmlformats.org/drawingml/2006/main">
               <a:ext uri="{FF2B5EF4-FFF2-40B4-BE49-F238E27FC236}">
-                <a16:creationId xmlns:a16="http://schemas.microsoft.com/office/drawing/2014/main" id="{F6C7D941-ECAB-4391-8B50-1338D32BE044}"/>
+                <a16:creationId xmlns:a16="http://schemas.microsoft.com/office/drawing/2014/main" id="{1CF6AD2B-53E0-4FFA-BF14-262B230808DC}"/>
               </a:ext>
             </a:extLst>
           </p:cNvPr>
@@ -15896,7 +16578,7 @@
           <p:cNvPr id="302" name="text-380">
             <a:extLst xmlns:a="http://schemas.openxmlformats.org/drawingml/2006/main">
               <a:ext uri="{FF2B5EF4-FFF2-40B4-BE49-F238E27FC236}">
-                <a16:creationId xmlns:a16="http://schemas.microsoft.com/office/drawing/2014/main" id="{433CE0AA-1397-47F8-80C4-ABFD2FB573FD}"/>
+                <a16:creationId xmlns:a16="http://schemas.microsoft.com/office/drawing/2014/main" id="{6144B611-E329-42A2-B57F-5220423AAD1F}"/>
               </a:ext>
             </a:extLst>
           </p:cNvPr>
@@ -15953,7 +16635,7 @@
           <p:cNvPr id="303" name="text-381">
             <a:extLst xmlns:a="http://schemas.openxmlformats.org/drawingml/2006/main">
               <a:ext uri="{FF2B5EF4-FFF2-40B4-BE49-F238E27FC236}">
-                <a16:creationId xmlns:a16="http://schemas.microsoft.com/office/drawing/2014/main" id="{AD57BEB8-1846-4B9F-9865-C63095AB40B8}"/>
+                <a16:creationId xmlns:a16="http://schemas.microsoft.com/office/drawing/2014/main" id="{48B63D11-27E8-4421-91DE-92758AF0B2B4}"/>
               </a:ext>
             </a:extLst>
           </p:cNvPr>
@@ -16010,7 +16692,7 @@
           <p:cNvPr id="304" name="text-382">
             <a:extLst xmlns:a="http://schemas.openxmlformats.org/drawingml/2006/main">
               <a:ext uri="{FF2B5EF4-FFF2-40B4-BE49-F238E27FC236}">
-                <a16:creationId xmlns:a16="http://schemas.microsoft.com/office/drawing/2014/main" id="{6CA44653-4FCE-4B3C-9F1C-6589ADA1E582}"/>
+                <a16:creationId xmlns:a16="http://schemas.microsoft.com/office/drawing/2014/main" id="{42EF8930-0089-4CB9-8543-8F3759D83ED3}"/>
               </a:ext>
             </a:extLst>
           </p:cNvPr>
@@ -16067,7 +16749,7 @@
           <p:cNvPr id="305" name="text-383">
             <a:extLst xmlns:a="http://schemas.openxmlformats.org/drawingml/2006/main">
               <a:ext uri="{FF2B5EF4-FFF2-40B4-BE49-F238E27FC236}">
-                <a16:creationId xmlns:a16="http://schemas.microsoft.com/office/drawing/2014/main" id="{7F919D89-A63E-43D0-BDC5-D2D1984E92FC}"/>
+                <a16:creationId xmlns:a16="http://schemas.microsoft.com/office/drawing/2014/main" id="{871D1042-8AA3-4A88-9897-D43BCC4E3F6D}"/>
               </a:ext>
             </a:extLst>
           </p:cNvPr>
@@ -16124,7 +16806,7 @@
           <p:cNvPr id="306" name="text-384">
             <a:extLst xmlns:a="http://schemas.openxmlformats.org/drawingml/2006/main">
               <a:ext uri="{FF2B5EF4-FFF2-40B4-BE49-F238E27FC236}">
-                <a16:creationId xmlns:a16="http://schemas.microsoft.com/office/drawing/2014/main" id="{0CF31FA1-847E-4DF7-B5B4-44E0FE139F80}"/>
+                <a16:creationId xmlns:a16="http://schemas.microsoft.com/office/drawing/2014/main" id="{740F7368-F97C-4C03-A052-4575A0E00706}"/>
               </a:ext>
             </a:extLst>
           </p:cNvPr>
@@ -16181,7 +16863,7 @@
           <p:cNvPr id="307" name="text-385">
             <a:extLst xmlns:a="http://schemas.openxmlformats.org/drawingml/2006/main">
               <a:ext uri="{FF2B5EF4-FFF2-40B4-BE49-F238E27FC236}">
-                <a16:creationId xmlns:a16="http://schemas.microsoft.com/office/drawing/2014/main" id="{BFB6F1B4-109D-4793-B1C5-585E35E69BE4}"/>
+                <a16:creationId xmlns:a16="http://schemas.microsoft.com/office/drawing/2014/main" id="{B96E0EED-535B-4B6E-96B1-87AEB5998725}"/>
               </a:ext>
             </a:extLst>
           </p:cNvPr>
@@ -16236,7 +16918,7 @@
     </p:spTree>
     <p:extLst>
       <p:ext uri="{BB962C8B-B14F-4D97-AF65-F5344CB8AC3E}">
-        <p14:creationId xmlns:p14="http://schemas.microsoft.com/office/powerpoint/2010/main" val="294880013"/>
+        <p14:creationId xmlns:p14="http://schemas.microsoft.com/office/powerpoint/2010/main" val="1290937543"/>
       </p:ext>
     </p:extLst>
   </p:cSld>
@@ -16267,7 +16949,7 @@
           <p:cNvPr id="29" name="text-386">
             <a:extLst xmlns:a="http://schemas.openxmlformats.org/drawingml/2006/main">
               <a:ext uri="{FF2B5EF4-FFF2-40B4-BE49-F238E27FC236}">
-                <a16:creationId xmlns:a16="http://schemas.microsoft.com/office/drawing/2014/main" id="{A2F97162-3C93-4D18-ADA9-9DB21468CAF2}"/>
+                <a16:creationId xmlns:a16="http://schemas.microsoft.com/office/drawing/2014/main" id="{C4D42240-ECF5-476B-B2B7-A7A14043AE71}"/>
               </a:ext>
             </a:extLst>
           </p:cNvPr>
@@ -16324,7 +17006,7 @@
           <p:cNvPr id="2" name="text-387">
             <a:extLst xmlns:a="http://schemas.openxmlformats.org/drawingml/2006/main">
               <a:ext uri="{FF2B5EF4-FFF2-40B4-BE49-F238E27FC236}">
-                <a16:creationId xmlns:a16="http://schemas.microsoft.com/office/drawing/2014/main" id="{83194B58-A587-43F9-B46C-82B1D25193C8}"/>
+                <a16:creationId xmlns:a16="http://schemas.microsoft.com/office/drawing/2014/main" id="{8932B542-B7E2-40EA-A797-7599208A0131}"/>
               </a:ext>
             </a:extLst>
           </p:cNvPr>
@@ -16381,7 +17063,7 @@
           <p:cNvPr id="3" name="text-388">
             <a:extLst xmlns:a="http://schemas.openxmlformats.org/drawingml/2006/main">
               <a:ext uri="{FF2B5EF4-FFF2-40B4-BE49-F238E27FC236}">
-                <a16:creationId xmlns:a16="http://schemas.microsoft.com/office/drawing/2014/main" id="{AFAB9231-C982-41C2-B544-4B0EE30CF65B}"/>
+                <a16:creationId xmlns:a16="http://schemas.microsoft.com/office/drawing/2014/main" id="{D39AFAB4-B7A7-49E6-AC43-1FDEF299621A}"/>
               </a:ext>
             </a:extLst>
           </p:cNvPr>
@@ -16438,7 +17120,7 @@
           <p:cNvPr id="4" name="text-389">
             <a:extLst xmlns:a="http://schemas.openxmlformats.org/drawingml/2006/main">
               <a:ext uri="{FF2B5EF4-FFF2-40B4-BE49-F238E27FC236}">
-                <a16:creationId xmlns:a16="http://schemas.microsoft.com/office/drawing/2014/main" id="{F2E5B26A-7233-449E-B40D-7929DC2663BB}"/>
+                <a16:creationId xmlns:a16="http://schemas.microsoft.com/office/drawing/2014/main" id="{616CE2AD-333E-4723-8A98-4134D5574666}"/>
               </a:ext>
             </a:extLst>
           </p:cNvPr>
@@ -16495,7 +17177,7 @@
           <p:cNvPr id="5" name="diagram-390">
             <a:extLst xmlns:a="http://schemas.openxmlformats.org/drawingml/2006/main">
               <a:ext uri="{FF2B5EF4-FFF2-40B4-BE49-F238E27FC236}">
-                <a16:creationId xmlns:a16="http://schemas.microsoft.com/office/drawing/2014/main" id="{0A0517D4-C6EA-49F6-873A-A0D248DC1030}"/>
+                <a16:creationId xmlns:a16="http://schemas.microsoft.com/office/drawing/2014/main" id="{24779AFA-5274-461D-9F41-5014E8AB40EA}"/>
               </a:ext>
             </a:extLst>
           </p:cNvPr>
@@ -16556,7 +17238,7 @@
           <p:cNvPr id="6" name="diagram-391">
             <a:extLst xmlns:a="http://schemas.openxmlformats.org/drawingml/2006/main">
               <a:ext uri="{FF2B5EF4-FFF2-40B4-BE49-F238E27FC236}">
-                <a16:creationId xmlns:a16="http://schemas.microsoft.com/office/drawing/2014/main" id="{39001566-E7CE-43F0-BEC0-3ACC0903C2AE}"/>
+                <a16:creationId xmlns:a16="http://schemas.microsoft.com/office/drawing/2014/main" id="{43F07D7F-3671-4131-826A-F9EE8CCBBE6A}"/>
               </a:ext>
             </a:extLst>
           </p:cNvPr>
@@ -16617,7 +17299,7 @@
           <p:cNvPr id="7" name="diagram-392">
             <a:extLst xmlns:a="http://schemas.openxmlformats.org/drawingml/2006/main">
               <a:ext uri="{FF2B5EF4-FFF2-40B4-BE49-F238E27FC236}">
-                <a16:creationId xmlns:a16="http://schemas.microsoft.com/office/drawing/2014/main" id="{2507F5A0-5907-494E-A6D3-10126E2DC788}"/>
+                <a16:creationId xmlns:a16="http://schemas.microsoft.com/office/drawing/2014/main" id="{F896BB55-812E-4DC1-89D8-C2A8C952A106}"/>
               </a:ext>
             </a:extLst>
           </p:cNvPr>
@@ -16678,7 +17360,7 @@
           <p:cNvPr id="8" name="diagram-393">
             <a:extLst xmlns:a="http://schemas.openxmlformats.org/drawingml/2006/main">
               <a:ext uri="{FF2B5EF4-FFF2-40B4-BE49-F238E27FC236}">
-                <a16:creationId xmlns:a16="http://schemas.microsoft.com/office/drawing/2014/main" id="{881F0CB6-98E9-4FEA-BECF-9CFAEA3C6D38}"/>
+                <a16:creationId xmlns:a16="http://schemas.microsoft.com/office/drawing/2014/main" id="{8A2F9682-430F-48A0-A965-B0D07428D319}"/>
               </a:ext>
             </a:extLst>
           </p:cNvPr>
@@ -16739,7 +17421,7 @@
           <p:cNvPr id="9" name="diagram-394">
             <a:extLst xmlns:a="http://schemas.openxmlformats.org/drawingml/2006/main">
               <a:ext uri="{FF2B5EF4-FFF2-40B4-BE49-F238E27FC236}">
-                <a16:creationId xmlns:a16="http://schemas.microsoft.com/office/drawing/2014/main" id="{190F8D95-B100-428F-BF74-2302207BB645}"/>
+                <a16:creationId xmlns:a16="http://schemas.microsoft.com/office/drawing/2014/main" id="{C4D2E274-BFED-4ED3-ACEC-CF5D7164BDCA}"/>
               </a:ext>
             </a:extLst>
           </p:cNvPr>
@@ -16771,7 +17453,7 @@
           <p:cNvPr id="10" name="text-395">
             <a:extLst xmlns:a="http://schemas.openxmlformats.org/drawingml/2006/main">
               <a:ext uri="{FF2B5EF4-FFF2-40B4-BE49-F238E27FC236}">
-                <a16:creationId xmlns:a16="http://schemas.microsoft.com/office/drawing/2014/main" id="{FFB64919-DA77-41D9-A9BF-45EFADAEDB12}"/>
+                <a16:creationId xmlns:a16="http://schemas.microsoft.com/office/drawing/2014/main" id="{7FD691A8-A64B-49BA-9BFC-0BE75E5AC697}"/>
               </a:ext>
             </a:extLst>
           </p:cNvPr>
@@ -16828,7 +17510,7 @@
           <p:cNvPr id="11" name="diagram-396">
             <a:extLst xmlns:a="http://schemas.openxmlformats.org/drawingml/2006/main">
               <a:ext uri="{FF2B5EF4-FFF2-40B4-BE49-F238E27FC236}">
-                <a16:creationId xmlns:a16="http://schemas.microsoft.com/office/drawing/2014/main" id="{5FC7EA71-CADE-43CD-9C98-E71ABB780AC3}"/>
+                <a16:creationId xmlns:a16="http://schemas.microsoft.com/office/drawing/2014/main" id="{29906C80-E523-46B9-BB3D-834BDE4E034A}"/>
               </a:ext>
             </a:extLst>
           </p:cNvPr>
@@ -16860,7 +17542,7 @@
           <p:cNvPr id="12" name="text-397">
             <a:extLst xmlns:a="http://schemas.openxmlformats.org/drawingml/2006/main">
               <a:ext uri="{FF2B5EF4-FFF2-40B4-BE49-F238E27FC236}">
-                <a16:creationId xmlns:a16="http://schemas.microsoft.com/office/drawing/2014/main" id="{756D7A6E-CEE3-4020-9712-310DF65B369C}"/>
+                <a16:creationId xmlns:a16="http://schemas.microsoft.com/office/drawing/2014/main" id="{D03695D0-7C8F-4711-936D-F73F8C156ECF}"/>
               </a:ext>
             </a:extLst>
           </p:cNvPr>
@@ -16917,7 +17599,7 @@
           <p:cNvPr id="13" name="diagram-398">
             <a:extLst xmlns:a="http://schemas.openxmlformats.org/drawingml/2006/main">
               <a:ext uri="{FF2B5EF4-FFF2-40B4-BE49-F238E27FC236}">
-                <a16:creationId xmlns:a16="http://schemas.microsoft.com/office/drawing/2014/main" id="{BF973C43-DBD6-4A94-887A-2A964E60E8D5}"/>
+                <a16:creationId xmlns:a16="http://schemas.microsoft.com/office/drawing/2014/main" id="{196F18CB-72B5-4476-B000-2F753943C640}"/>
               </a:ext>
             </a:extLst>
           </p:cNvPr>
@@ -16978,7 +17660,7 @@
           <p:cNvPr id="14" name="diagram-399">
             <a:extLst xmlns:a="http://schemas.openxmlformats.org/drawingml/2006/main">
               <a:ext uri="{FF2B5EF4-FFF2-40B4-BE49-F238E27FC236}">
-                <a16:creationId xmlns:a16="http://schemas.microsoft.com/office/drawing/2014/main" id="{3E3E9FD1-1CEA-4C7D-86D6-6AAE7924EA1E}"/>
+                <a16:creationId xmlns:a16="http://schemas.microsoft.com/office/drawing/2014/main" id="{DB60FD82-23EF-498C-90BC-1828E6702E30}"/>
               </a:ext>
             </a:extLst>
           </p:cNvPr>
@@ -17039,7 +17721,7 @@
           <p:cNvPr id="15" name="diagram-400">
             <a:extLst xmlns:a="http://schemas.openxmlformats.org/drawingml/2006/main">
               <a:ext uri="{FF2B5EF4-FFF2-40B4-BE49-F238E27FC236}">
-                <a16:creationId xmlns:a16="http://schemas.microsoft.com/office/drawing/2014/main" id="{180133A5-E4C0-4351-8646-F0481FC1F11E}"/>
+                <a16:creationId xmlns:a16="http://schemas.microsoft.com/office/drawing/2014/main" id="{B22FC3E8-9C9E-41B9-829E-9B6A7B5CF999}"/>
               </a:ext>
             </a:extLst>
           </p:cNvPr>
@@ -17100,7 +17782,7 @@
           <p:cNvPr id="16" name="diagram-401">
             <a:extLst xmlns:a="http://schemas.openxmlformats.org/drawingml/2006/main">
               <a:ext uri="{FF2B5EF4-FFF2-40B4-BE49-F238E27FC236}">
-                <a16:creationId xmlns:a16="http://schemas.microsoft.com/office/drawing/2014/main" id="{7DF2E6F4-3D34-4975-A1D2-92C62C885BFB}"/>
+                <a16:creationId xmlns:a16="http://schemas.microsoft.com/office/drawing/2014/main" id="{3C470C2F-75B1-482F-9FF2-A28ECE05B889}"/>
               </a:ext>
             </a:extLst>
           </p:cNvPr>
@@ -17161,7 +17843,7 @@
           <p:cNvPr id="17" name="diagram-402">
             <a:extLst xmlns:a="http://schemas.openxmlformats.org/drawingml/2006/main">
               <a:ext uri="{FF2B5EF4-FFF2-40B4-BE49-F238E27FC236}">
-                <a16:creationId xmlns:a16="http://schemas.microsoft.com/office/drawing/2014/main" id="{699817F3-3840-491D-827D-D09BABFBE89B}"/>
+                <a16:creationId xmlns:a16="http://schemas.microsoft.com/office/drawing/2014/main" id="{1926B72F-25DF-4425-A23C-C43A67C96903}"/>
               </a:ext>
             </a:extLst>
           </p:cNvPr>
@@ -17222,7 +17904,7 @@
           <p:cNvPr id="18" name="diagram-403">
             <a:extLst xmlns:a="http://schemas.openxmlformats.org/drawingml/2006/main">
               <a:ext uri="{FF2B5EF4-FFF2-40B4-BE49-F238E27FC236}">
-                <a16:creationId xmlns:a16="http://schemas.microsoft.com/office/drawing/2014/main" id="{CD5283EE-B98E-4D10-9C3B-127197BEC538}"/>
+                <a16:creationId xmlns:a16="http://schemas.microsoft.com/office/drawing/2014/main" id="{48D858CD-8FBC-4122-A86E-C71065200E26}"/>
               </a:ext>
             </a:extLst>
           </p:cNvPr>
@@ -17283,7 +17965,7 @@
           <p:cNvPr id="19" name="diagram-404">
             <a:extLst xmlns:a="http://schemas.openxmlformats.org/drawingml/2006/main">
               <a:ext uri="{FF2B5EF4-FFF2-40B4-BE49-F238E27FC236}">
-                <a16:creationId xmlns:a16="http://schemas.microsoft.com/office/drawing/2014/main" id="{522E9A4F-3287-4CB9-B5F3-444DEA378240}"/>
+                <a16:creationId xmlns:a16="http://schemas.microsoft.com/office/drawing/2014/main" id="{9D803A53-D757-4B02-A41F-14EE8BADB1A2}"/>
               </a:ext>
             </a:extLst>
           </p:cNvPr>
@@ -17344,7 +18026,7 @@
           <p:cNvPr id="20" name="diagram-405">
             <a:extLst xmlns:a="http://schemas.openxmlformats.org/drawingml/2006/main">
               <a:ext uri="{FF2B5EF4-FFF2-40B4-BE49-F238E27FC236}">
-                <a16:creationId xmlns:a16="http://schemas.microsoft.com/office/drawing/2014/main" id="{9B5598DD-7D08-4A21-B261-1F0971118E65}"/>
+                <a16:creationId xmlns:a16="http://schemas.microsoft.com/office/drawing/2014/main" id="{567385B4-1771-43C5-94ED-F6A8404D7410}"/>
               </a:ext>
             </a:extLst>
           </p:cNvPr>
@@ -17405,7 +18087,7 @@
           <p:cNvPr id="21" name="text-406">
             <a:extLst xmlns:a="http://schemas.openxmlformats.org/drawingml/2006/main">
               <a:ext uri="{FF2B5EF4-FFF2-40B4-BE49-F238E27FC236}">
-                <a16:creationId xmlns:a16="http://schemas.microsoft.com/office/drawing/2014/main" id="{7AFDC0B8-63F5-44EF-B4AC-B6AE726D496A}"/>
+                <a16:creationId xmlns:a16="http://schemas.microsoft.com/office/drawing/2014/main" id="{644B3459-3202-46E5-AD2B-AD215AFB8012}"/>
               </a:ext>
             </a:extLst>
           </p:cNvPr>
@@ -17485,7 +18167,7 @@
           <p:cNvPr id="22" name="diagram-407">
             <a:extLst xmlns:a="http://schemas.openxmlformats.org/drawingml/2006/main">
               <a:ext uri="{FF2B5EF4-FFF2-40B4-BE49-F238E27FC236}">
-                <a16:creationId xmlns:a16="http://schemas.microsoft.com/office/drawing/2014/main" id="{E3E75706-E3D6-454A-949A-745FC21C3185}"/>
+                <a16:creationId xmlns:a16="http://schemas.microsoft.com/office/drawing/2014/main" id="{0F201716-A247-49AE-A28C-3AE5E798DABB}"/>
               </a:ext>
             </a:extLst>
           </p:cNvPr>
@@ -17569,7 +18251,7 @@
           <p:cNvPr id="23" name="diagram-408">
             <a:extLst xmlns:a="http://schemas.openxmlformats.org/drawingml/2006/main">
               <a:ext uri="{FF2B5EF4-FFF2-40B4-BE49-F238E27FC236}">
-                <a16:creationId xmlns:a16="http://schemas.microsoft.com/office/drawing/2014/main" id="{345AAF73-307A-4CA7-8124-92828DCF8D21}"/>
+                <a16:creationId xmlns:a16="http://schemas.microsoft.com/office/drawing/2014/main" id="{3B9AB6C2-4D71-4030-820B-6788FB5FC985}"/>
               </a:ext>
             </a:extLst>
           </p:cNvPr>
@@ -17728,7 +18410,7 @@
           <p:cNvPr id="27" name="text-409">
             <a:extLst xmlns:a="http://schemas.openxmlformats.org/drawingml/2006/main">
               <a:ext uri="{FF2B5EF4-FFF2-40B4-BE49-F238E27FC236}">
-                <a16:creationId xmlns:a16="http://schemas.microsoft.com/office/drawing/2014/main" id="{6DB42C01-AB39-453A-9F1E-CFB83EEBA114}"/>
+                <a16:creationId xmlns:a16="http://schemas.microsoft.com/office/drawing/2014/main" id="{6803CA6D-EA03-4F09-81B5-9F5B79CA0DAE}"/>
               </a:ext>
             </a:extLst>
           </p:cNvPr>
@@ -17808,7 +18490,7 @@
           <p:cNvPr id="28" name="text-410">
             <a:extLst xmlns:a="http://schemas.openxmlformats.org/drawingml/2006/main">
               <a:ext uri="{FF2B5EF4-FFF2-40B4-BE49-F238E27FC236}">
-                <a16:creationId xmlns:a16="http://schemas.microsoft.com/office/drawing/2014/main" id="{7C4EDC11-B248-47BA-AF05-9BE3948951F9}"/>
+                <a16:creationId xmlns:a16="http://schemas.microsoft.com/office/drawing/2014/main" id="{A64F0F43-C7FB-498A-8FF1-113785418567}"/>
               </a:ext>
             </a:extLst>
           </p:cNvPr>
@@ -17863,7 +18545,7 @@
     </p:spTree>
     <p:extLst>
       <p:ext uri="{BB962C8B-B14F-4D97-AF65-F5344CB8AC3E}">
-        <p14:creationId xmlns:p14="http://schemas.microsoft.com/office/powerpoint/2010/main" val="609411166"/>
+        <p14:creationId xmlns:p14="http://schemas.microsoft.com/office/powerpoint/2010/main" val="1181794501"/>
       </p:ext>
     </p:extLst>
   </p:cSld>
@@ -17894,7 +18576,7 @@
           <p:cNvPr id="18" name="text-411">
             <a:extLst xmlns:a="http://schemas.openxmlformats.org/drawingml/2006/main">
               <a:ext uri="{FF2B5EF4-FFF2-40B4-BE49-F238E27FC236}">
-                <a16:creationId xmlns:a16="http://schemas.microsoft.com/office/drawing/2014/main" id="{F0EC0882-CE53-43E9-A118-CDC8BD8C0BBC}"/>
+                <a16:creationId xmlns:a16="http://schemas.microsoft.com/office/drawing/2014/main" id="{ADF9CF54-F203-4D52-83FE-8716B15AEA63}"/>
               </a:ext>
             </a:extLst>
           </p:cNvPr>
@@ -17951,7 +18633,7 @@
           <p:cNvPr id="2" name="text-412">
             <a:extLst xmlns:a="http://schemas.openxmlformats.org/drawingml/2006/main">
               <a:ext uri="{FF2B5EF4-FFF2-40B4-BE49-F238E27FC236}">
-                <a16:creationId xmlns:a16="http://schemas.microsoft.com/office/drawing/2014/main" id="{797A6D82-AC37-442B-B8BD-1086D3560EFE}"/>
+                <a16:creationId xmlns:a16="http://schemas.microsoft.com/office/drawing/2014/main" id="{61A89FD8-74AB-4A35-83EC-89DB4E5C8344}"/>
               </a:ext>
             </a:extLst>
           </p:cNvPr>
@@ -18008,7 +18690,7 @@
           <p:cNvPr id="3" name="text-413">
             <a:extLst xmlns:a="http://schemas.openxmlformats.org/drawingml/2006/main">
               <a:ext uri="{FF2B5EF4-FFF2-40B4-BE49-F238E27FC236}">
-                <a16:creationId xmlns:a16="http://schemas.microsoft.com/office/drawing/2014/main" id="{6BBD384F-6190-47CD-AFD6-CB7AABE1D351}"/>
+                <a16:creationId xmlns:a16="http://schemas.microsoft.com/office/drawing/2014/main" id="{32C980B0-CFA1-4550-8A4E-61D845E7AC8F}"/>
               </a:ext>
             </a:extLst>
           </p:cNvPr>
@@ -18065,7 +18747,7 @@
           <p:cNvPr id="4" name="text-414">
             <a:extLst xmlns:a="http://schemas.openxmlformats.org/drawingml/2006/main">
               <a:ext uri="{FF2B5EF4-FFF2-40B4-BE49-F238E27FC236}">
-                <a16:creationId xmlns:a16="http://schemas.microsoft.com/office/drawing/2014/main" id="{DD6EC604-6C45-4836-B70F-514AC0D7C027}"/>
+                <a16:creationId xmlns:a16="http://schemas.microsoft.com/office/drawing/2014/main" id="{A07FA3FD-4B1A-4E66-A7E4-97A3C57EE34C}"/>
               </a:ext>
             </a:extLst>
           </p:cNvPr>
@@ -18122,7 +18804,7 @@
           <p:cNvPr id="5" name="diagram-415">
             <a:extLst xmlns:a="http://schemas.openxmlformats.org/drawingml/2006/main">
               <a:ext uri="{FF2B5EF4-FFF2-40B4-BE49-F238E27FC236}">
-                <a16:creationId xmlns:a16="http://schemas.microsoft.com/office/drawing/2014/main" id="{894AEFCF-E1EA-4A49-AA97-66CDA49ED25A}"/>
+                <a16:creationId xmlns:a16="http://schemas.microsoft.com/office/drawing/2014/main" id="{90775D9F-A7FE-4A8E-9487-4365F37581B4}"/>
               </a:ext>
             </a:extLst>
           </p:cNvPr>
@@ -18183,7 +18865,7 @@
           <p:cNvPr id="6" name="flow-416">
             <a:extLst xmlns:a="http://schemas.openxmlformats.org/drawingml/2006/main">
               <a:ext uri="{FF2B5EF4-FFF2-40B4-BE49-F238E27FC236}">
-                <a16:creationId xmlns:a16="http://schemas.microsoft.com/office/drawing/2014/main" id="{8E580EA4-F87D-49B3-95BC-EBCE5E002D51}"/>
+                <a16:creationId xmlns:a16="http://schemas.microsoft.com/office/drawing/2014/main" id="{78C232CF-C98E-4723-8404-815D8DE5BDA4}"/>
               </a:ext>
             </a:extLst>
           </p:cNvPr>
@@ -18213,7 +18895,7 @@
           <p:cNvPr id="7" name="diagram-417">
             <a:extLst xmlns:a="http://schemas.openxmlformats.org/drawingml/2006/main">
               <a:ext uri="{FF2B5EF4-FFF2-40B4-BE49-F238E27FC236}">
-                <a16:creationId xmlns:a16="http://schemas.microsoft.com/office/drawing/2014/main" id="{5C2A43C9-3AC5-4938-87CC-D01FE7E4E1CD}"/>
+                <a16:creationId xmlns:a16="http://schemas.microsoft.com/office/drawing/2014/main" id="{764A07EA-0610-4437-BE17-A26D7BB861D1}"/>
               </a:ext>
             </a:extLst>
           </p:cNvPr>
@@ -18274,7 +18956,7 @@
           <p:cNvPr id="8" name="flow-418">
             <a:extLst xmlns:a="http://schemas.openxmlformats.org/drawingml/2006/main">
               <a:ext uri="{FF2B5EF4-FFF2-40B4-BE49-F238E27FC236}">
-                <a16:creationId xmlns:a16="http://schemas.microsoft.com/office/drawing/2014/main" id="{9E587CC2-2AB8-41DB-B6FD-5D492B870E36}"/>
+                <a16:creationId xmlns:a16="http://schemas.microsoft.com/office/drawing/2014/main" id="{EF87BED4-36C6-4E61-8492-64366CDC66E9}"/>
               </a:ext>
             </a:extLst>
           </p:cNvPr>
@@ -18304,7 +18986,7 @@
           <p:cNvPr id="9" name="diagram-419">
             <a:extLst xmlns:a="http://schemas.openxmlformats.org/drawingml/2006/main">
               <a:ext uri="{FF2B5EF4-FFF2-40B4-BE49-F238E27FC236}">
-                <a16:creationId xmlns:a16="http://schemas.microsoft.com/office/drawing/2014/main" id="{4523488A-2D85-47B2-95B7-915369D973D3}"/>
+                <a16:creationId xmlns:a16="http://schemas.microsoft.com/office/drawing/2014/main" id="{E2CE39B9-3C25-4045-A698-ADA1A58A72EB}"/>
               </a:ext>
             </a:extLst>
           </p:cNvPr>
@@ -18365,7 +19047,7 @@
           <p:cNvPr id="10" name="flow-420">
             <a:extLst xmlns:a="http://schemas.openxmlformats.org/drawingml/2006/main">
               <a:ext uri="{FF2B5EF4-FFF2-40B4-BE49-F238E27FC236}">
-                <a16:creationId xmlns:a16="http://schemas.microsoft.com/office/drawing/2014/main" id="{23DD8F8C-1BAA-4D93-A8D3-93313A7B6FDE}"/>
+                <a16:creationId xmlns:a16="http://schemas.microsoft.com/office/drawing/2014/main" id="{94C8A764-F76A-4D73-B0F4-539409F3954F}"/>
               </a:ext>
             </a:extLst>
           </p:cNvPr>
@@ -18395,7 +19077,7 @@
           <p:cNvPr id="11" name="diagram-421">
             <a:extLst xmlns:a="http://schemas.openxmlformats.org/drawingml/2006/main">
               <a:ext uri="{FF2B5EF4-FFF2-40B4-BE49-F238E27FC236}">
-                <a16:creationId xmlns:a16="http://schemas.microsoft.com/office/drawing/2014/main" id="{58078F79-E446-4A64-B83A-B17BC2995D72}"/>
+                <a16:creationId xmlns:a16="http://schemas.microsoft.com/office/drawing/2014/main" id="{5F1EA272-424B-4F1A-BB28-255EFD5B5CE9}"/>
               </a:ext>
             </a:extLst>
           </p:cNvPr>
@@ -18456,7 +19138,7 @@
           <p:cNvPr id="12" name="text-422">
             <a:extLst xmlns:a="http://schemas.openxmlformats.org/drawingml/2006/main">
               <a:ext uri="{FF2B5EF4-FFF2-40B4-BE49-F238E27FC236}">
-                <a16:creationId xmlns:a16="http://schemas.microsoft.com/office/drawing/2014/main" id="{E8A496D4-DFF6-4326-9087-50B5F5D51540}"/>
+                <a16:creationId xmlns:a16="http://schemas.microsoft.com/office/drawing/2014/main" id="{D15D42F8-F5A9-42C3-811C-50BD5554EF37}"/>
               </a:ext>
             </a:extLst>
           </p:cNvPr>
@@ -18513,7 +19195,7 @@
           <p:cNvPr id="13" name="text-423">
             <a:extLst xmlns:a="http://schemas.openxmlformats.org/drawingml/2006/main">
               <a:ext uri="{FF2B5EF4-FFF2-40B4-BE49-F238E27FC236}">
-                <a16:creationId xmlns:a16="http://schemas.microsoft.com/office/drawing/2014/main" id="{510692F8-6D9E-4111-A9E2-48BE060E6F77}"/>
+                <a16:creationId xmlns:a16="http://schemas.microsoft.com/office/drawing/2014/main" id="{C662E64F-7FE6-4040-9499-1AF139B8D27B}"/>
               </a:ext>
             </a:extLst>
           </p:cNvPr>
@@ -18570,7 +19252,7 @@
           <p:cNvPr id="14" name="text-424">
             <a:extLst xmlns:a="http://schemas.openxmlformats.org/drawingml/2006/main">
               <a:ext uri="{FF2B5EF4-FFF2-40B4-BE49-F238E27FC236}">
-                <a16:creationId xmlns:a16="http://schemas.microsoft.com/office/drawing/2014/main" id="{5E7C042B-690F-43CB-ABA2-EFF39EFDA175}"/>
+                <a16:creationId xmlns:a16="http://schemas.microsoft.com/office/drawing/2014/main" id="{60E66BC5-0CF0-4499-BCE4-9DE87C0D98A8}"/>
               </a:ext>
             </a:extLst>
           </p:cNvPr>
@@ -18582,7 +19264,7 @@
         <p:spPr>
           <a:xfrm xmlns:a="http://schemas.openxmlformats.org/drawingml/2006/main">
             <a:off x="571500" y="4514850"/>
-            <a:ext cx="5238750" cy="895350"/>
+            <a:ext cx="5238750" cy="1000125"/>
           </a:xfrm>
           <a:prstGeom xmlns:a="http://schemas.openxmlformats.org/drawingml/2006/main" prst="rect">
             <a:avLst/>
@@ -18599,7 +19281,7 @@
           <a:lstStyle xmlns:a="http://schemas.openxmlformats.org/drawingml/2006/main"/>
           <a:p xmlns:a="http://schemas.openxmlformats.org/drawingml/2006/main">
             <a:pPr algn="l">
-              <a:defRPr sz="2025" b="0">
+              <a:defRPr sz="1875" b="0">
                 <a:solidFill>
                   <a:srgbClr val="142B3F"/>
                 </a:solidFill>
@@ -18609,7 +19291,7 @@
               </a:defRPr>
             </a:pPr>
             <a:r>
-              <a:rPr sz="2025" b="0">
+              <a:rPr sz="1875" b="0">
                 <a:solidFill>
                   <a:srgbClr val="142B3F"/>
                 </a:solidFill>
@@ -18617,12 +19299,12 @@
                 <a:ea typeface="Arial"/>
                 <a:cs typeface="Arial"/>
               </a:rPr>
-              <a:t>More blocks improve utilisation</a:t>
+              <a:t>More blocks improve SM utilisation</a:t>
             </a:r>
           </a:p>
           <a:p xmlns:a="http://schemas.openxmlformats.org/drawingml/2006/main">
             <a:pPr algn="l">
-              <a:defRPr sz="2025" b="0">
+              <a:defRPr sz="1875" b="0">
                 <a:solidFill>
                   <a:srgbClr val="142B3F"/>
                 </a:solidFill>
@@ -18632,7 +19314,7 @@
               </a:defRPr>
             </a:pPr>
             <a:r>
-              <a:rPr sz="2025" b="0">
+              <a:rPr sz="1875" b="0">
                 <a:solidFill>
                   <a:srgbClr val="142B3F"/>
                 </a:solidFill>
@@ -18640,7 +19322,30 @@
                 <a:ea typeface="Arial"/>
                 <a:cs typeface="Arial"/>
               </a:rPr>
-              <a:t>Fixed overhead costs less per pixel</a:t>
+              <a:t>Coalesced writes use bandwidth</a:t>
+            </a:r>
+          </a:p>
+          <a:p xmlns:a="http://schemas.openxmlformats.org/drawingml/2006/main">
+            <a:pPr algn="l">
+              <a:defRPr sz="1875" b="0">
+                <a:solidFill>
+                  <a:srgbClr val="142B3F"/>
+                </a:solidFill>
+                <a:latin typeface="Arial"/>
+                <a:ea typeface="Arial"/>
+                <a:cs typeface="Arial"/>
+              </a:defRPr>
+            </a:pPr>
+            <a:r>
+              <a:rPr sz="1875" b="0">
+                <a:solidFill>
+                  <a:srgbClr val="142B3F"/>
+                </a:solidFill>
+                <a:latin typeface="Arial"/>
+                <a:ea typeface="Arial"/>
+                <a:cs typeface="Arial"/>
+              </a:rPr>
+              <a:t>Register use limits residency</a:t>
             </a:r>
           </a:p>
         </p:txBody>
@@ -18650,7 +19355,7 @@
           <p:cNvPr id="15" name="text-425">
             <a:extLst xmlns:a="http://schemas.openxmlformats.org/drawingml/2006/main">
               <a:ext uri="{FF2B5EF4-FFF2-40B4-BE49-F238E27FC236}">
-                <a16:creationId xmlns:a16="http://schemas.microsoft.com/office/drawing/2014/main" id="{45561038-CBF0-434A-8EE2-E17FF254B6B4}"/>
+                <a16:creationId xmlns:a16="http://schemas.microsoft.com/office/drawing/2014/main" id="{6D948366-080D-4B1A-9D83-530BFF6E9757}"/>
               </a:ext>
             </a:extLst>
           </p:cNvPr>
@@ -18707,7 +19412,7 @@
           <p:cNvPr id="16" name="text-426">
             <a:extLst xmlns:a="http://schemas.openxmlformats.org/drawingml/2006/main">
               <a:ext uri="{FF2B5EF4-FFF2-40B4-BE49-F238E27FC236}">
-                <a16:creationId xmlns:a16="http://schemas.microsoft.com/office/drawing/2014/main" id="{3FB17E55-4C98-45FE-88C1-2E5E7AC1CC55}"/>
+                <a16:creationId xmlns:a16="http://schemas.microsoft.com/office/drawing/2014/main" id="{6406FEBA-F8F4-4423-8074-0989BF882F8A}"/>
               </a:ext>
             </a:extLst>
           </p:cNvPr>
@@ -18719,7 +19424,7 @@
         <p:spPr>
           <a:xfrm xmlns:a="http://schemas.openxmlformats.org/drawingml/2006/main">
             <a:off x="6562725" y="4514850"/>
-            <a:ext cx="5000625" cy="895350"/>
+            <a:ext cx="5000625" cy="1000125"/>
           </a:xfrm>
           <a:prstGeom xmlns:a="http://schemas.openxmlformats.org/drawingml/2006/main" prst="rect">
             <a:avLst/>
@@ -18736,7 +19441,7 @@
           <a:lstStyle xmlns:a="http://schemas.openxmlformats.org/drawingml/2006/main"/>
           <a:p xmlns:a="http://schemas.openxmlformats.org/drawingml/2006/main">
             <a:pPr algn="l">
-              <a:defRPr sz="2025" b="0">
+              <a:defRPr sz="1875" b="0">
                 <a:solidFill>
                   <a:srgbClr val="142B3F"/>
                 </a:solidFill>
@@ -18746,7 +19451,7 @@
               </a:defRPr>
             </a:pPr>
             <a:r>
-              <a:rPr sz="2025" b="0">
+              <a:rPr sz="1875" b="0">
                 <a:solidFill>
                   <a:srgbClr val="142B3F"/>
                 </a:solidFill>
@@ -18754,12 +19459,12 @@
                 <a:ea typeface="Arial"/>
                 <a:cs typeface="Arial"/>
               </a:rPr>
-              <a:t>Transfers also grow with image size</a:t>
+              <a:t>Copies and irregular reads cost time</a:t>
             </a:r>
           </a:p>
           <a:p xmlns:a="http://schemas.openxmlformats.org/drawingml/2006/main">
             <a:pPr algn="l">
-              <a:defRPr sz="2025" b="0">
+              <a:defRPr sz="1875" b="0">
                 <a:solidFill>
                   <a:srgbClr val="142B3F"/>
                 </a:solidFill>
@@ -18769,7 +19474,7 @@
               </a:defRPr>
             </a:pPr>
             <a:r>
-              <a:rPr sz="2025" b="0">
+              <a:rPr sz="1875" b="0">
                 <a:solidFill>
                   <a:srgbClr val="142B3F"/>
                 </a:solidFill>
@@ -18777,7 +19482,30 @@
                 <a:ea typeface="Arial"/>
                 <a:cs typeface="Arial"/>
               </a:rPr>
-              <a:t>Bandwidth eventually limits the gain</a:t>
+              <a:t>Keep intermediate images resident</a:t>
+            </a:r>
+          </a:p>
+          <a:p xmlns:a="http://schemas.openxmlformats.org/drawingml/2006/main">
+            <a:pPr algn="l">
+              <a:defRPr sz="1875" b="0">
+                <a:solidFill>
+                  <a:srgbClr val="142B3F"/>
+                </a:solidFill>
+                <a:latin typeface="Arial"/>
+                <a:ea typeface="Arial"/>
+                <a:cs typeface="Arial"/>
+              </a:defRPr>
+            </a:pPr>
+            <a:r>
+              <a:rPr sz="1875" b="0">
+                <a:solidFill>
+                  <a:srgbClr val="142B3F"/>
+                </a:solidFill>
+                <a:latin typeface="Arial"/>
+                <a:ea typeface="Arial"/>
+                <a:cs typeface="Arial"/>
+              </a:rPr>
+              <a:t>Profile total time, not just the kernel</a:t>
             </a:r>
           </a:p>
         </p:txBody>
@@ -18787,7 +19515,7 @@
           <p:cNvPr id="17" name="text-427">
             <a:extLst xmlns:a="http://schemas.openxmlformats.org/drawingml/2006/main">
               <a:ext uri="{FF2B5EF4-FFF2-40B4-BE49-F238E27FC236}">
-                <a16:creationId xmlns:a16="http://schemas.microsoft.com/office/drawing/2014/main" id="{3FAC4289-C982-4C84-A199-E178AD385173}"/>
+                <a16:creationId xmlns:a16="http://schemas.microsoft.com/office/drawing/2014/main" id="{67C31621-997E-4DB5-B1EC-96FE180DF742}"/>
               </a:ext>
             </a:extLst>
           </p:cNvPr>
@@ -18842,7 +19570,7 @@
     </p:spTree>
     <p:extLst>
       <p:ext uri="{BB962C8B-B14F-4D97-AF65-F5344CB8AC3E}">
-        <p14:creationId xmlns:p14="http://schemas.microsoft.com/office/powerpoint/2010/main" val="130562404"/>
+        <p14:creationId xmlns:p14="http://schemas.microsoft.com/office/powerpoint/2010/main" val="745199693"/>
       </p:ext>
     </p:extLst>
   </p:cSld>
@@ -18873,7 +19601,7 @@
           <p:cNvPr id="17" name="text-428">
             <a:extLst xmlns:a="http://schemas.openxmlformats.org/drawingml/2006/main">
               <a:ext uri="{FF2B5EF4-FFF2-40B4-BE49-F238E27FC236}">
-                <a16:creationId xmlns:a16="http://schemas.microsoft.com/office/drawing/2014/main" id="{752386B5-DCAD-4061-AFC5-2E18B54B7282}"/>
+                <a16:creationId xmlns:a16="http://schemas.microsoft.com/office/drawing/2014/main" id="{1A33B0F4-BE59-4B22-B096-3E018A36B125}"/>
               </a:ext>
             </a:extLst>
           </p:cNvPr>
@@ -18930,7 +19658,7 @@
           <p:cNvPr id="2" name="text-429">
             <a:extLst xmlns:a="http://schemas.openxmlformats.org/drawingml/2006/main">
               <a:ext uri="{FF2B5EF4-FFF2-40B4-BE49-F238E27FC236}">
-                <a16:creationId xmlns:a16="http://schemas.microsoft.com/office/drawing/2014/main" id="{8F6F9A2F-319F-473F-9AC8-87FAF84BBA82}"/>
+                <a16:creationId xmlns:a16="http://schemas.microsoft.com/office/drawing/2014/main" id="{D1595835-EBD7-40C5-A89F-1FF31DC6B9F7}"/>
               </a:ext>
             </a:extLst>
           </p:cNvPr>
@@ -18987,7 +19715,7 @@
           <p:cNvPr id="3" name="text-430">
             <a:extLst xmlns:a="http://schemas.openxmlformats.org/drawingml/2006/main">
               <a:ext uri="{FF2B5EF4-FFF2-40B4-BE49-F238E27FC236}">
-                <a16:creationId xmlns:a16="http://schemas.microsoft.com/office/drawing/2014/main" id="{9C0946CF-AB04-46AA-924A-995234738173}"/>
+                <a16:creationId xmlns:a16="http://schemas.microsoft.com/office/drawing/2014/main" id="{7523F4DA-1910-41C2-AC6C-A5F6D9E315B6}"/>
               </a:ext>
             </a:extLst>
           </p:cNvPr>
@@ -19044,7 +19772,7 @@
           <p:cNvPr id="4" name="text-431">
             <a:extLst xmlns:a="http://schemas.openxmlformats.org/drawingml/2006/main">
               <a:ext uri="{FF2B5EF4-FFF2-40B4-BE49-F238E27FC236}">
-                <a16:creationId xmlns:a16="http://schemas.microsoft.com/office/drawing/2014/main" id="{18F83DA7-B89E-4DB8-939A-F08F3D61E8BA}"/>
+                <a16:creationId xmlns:a16="http://schemas.microsoft.com/office/drawing/2014/main" id="{0271B9C3-C16E-4CBD-8701-1DEB4C2628D0}"/>
               </a:ext>
             </a:extLst>
           </p:cNvPr>
@@ -19101,7 +19829,7 @@
           <p:cNvPr id="5" name="diagram-432">
             <a:extLst xmlns:a="http://schemas.openxmlformats.org/drawingml/2006/main">
               <a:ext uri="{FF2B5EF4-FFF2-40B4-BE49-F238E27FC236}">
-                <a16:creationId xmlns:a16="http://schemas.microsoft.com/office/drawing/2014/main" id="{790C1A8F-AFFF-426E-98E7-AE232DB04A73}"/>
+                <a16:creationId xmlns:a16="http://schemas.microsoft.com/office/drawing/2014/main" id="{81A06C3B-BDE7-4008-A9DD-FFD59BA0C510}"/>
               </a:ext>
             </a:extLst>
           </p:cNvPr>
@@ -19162,7 +19890,7 @@
           <p:cNvPr id="6" name="diagram-433">
             <a:extLst xmlns:a="http://schemas.openxmlformats.org/drawingml/2006/main">
               <a:ext uri="{FF2B5EF4-FFF2-40B4-BE49-F238E27FC236}">
-                <a16:creationId xmlns:a16="http://schemas.microsoft.com/office/drawing/2014/main" id="{742C4E63-B333-4D4A-817E-62B1B99DF4B4}"/>
+                <a16:creationId xmlns:a16="http://schemas.microsoft.com/office/drawing/2014/main" id="{FAF16563-F893-4225-A3A4-2F46C2278C28}"/>
               </a:ext>
             </a:extLst>
           </p:cNvPr>
@@ -19223,7 +19951,7 @@
           <p:cNvPr id="7" name="diagram-434">
             <a:extLst xmlns:a="http://schemas.openxmlformats.org/drawingml/2006/main">
               <a:ext uri="{FF2B5EF4-FFF2-40B4-BE49-F238E27FC236}">
-                <a16:creationId xmlns:a16="http://schemas.microsoft.com/office/drawing/2014/main" id="{3F7C8DA3-03D9-4452-856A-0E6BF55C81D2}"/>
+                <a16:creationId xmlns:a16="http://schemas.microsoft.com/office/drawing/2014/main" id="{A24BBEAF-87FF-4EBD-B0D7-08AFCD5A4D49}"/>
               </a:ext>
             </a:extLst>
           </p:cNvPr>
@@ -19334,7 +20062,7 @@
           <p:cNvPr id="10" name="text-435">
             <a:extLst xmlns:a="http://schemas.openxmlformats.org/drawingml/2006/main">
               <a:ext uri="{FF2B5EF4-FFF2-40B4-BE49-F238E27FC236}">
-                <a16:creationId xmlns:a16="http://schemas.microsoft.com/office/drawing/2014/main" id="{7A6FB998-06F7-4C3D-A355-1A0A7BB254D1}"/>
+                <a16:creationId xmlns:a16="http://schemas.microsoft.com/office/drawing/2014/main" id="{FDD83194-426F-4E9D-A93D-C9A64EF0C863}"/>
               </a:ext>
             </a:extLst>
           </p:cNvPr>
@@ -19391,7 +20119,7 @@
           <p:cNvPr id="11" name="diagram-436">
             <a:extLst xmlns:a="http://schemas.openxmlformats.org/drawingml/2006/main">
               <a:ext uri="{FF2B5EF4-FFF2-40B4-BE49-F238E27FC236}">
-                <a16:creationId xmlns:a16="http://schemas.microsoft.com/office/drawing/2014/main" id="{666DECC4-FF3F-4581-BE4E-B52B612374DB}"/>
+                <a16:creationId xmlns:a16="http://schemas.microsoft.com/office/drawing/2014/main" id="{69901490-D47F-4ADE-AF03-69E0B441EEF6}"/>
               </a:ext>
             </a:extLst>
           </p:cNvPr>
@@ -19452,7 +20180,7 @@
           <p:cNvPr id="12" name="diagram-437">
             <a:extLst xmlns:a="http://schemas.openxmlformats.org/drawingml/2006/main">
               <a:ext uri="{FF2B5EF4-FFF2-40B4-BE49-F238E27FC236}">
-                <a16:creationId xmlns:a16="http://schemas.microsoft.com/office/drawing/2014/main" id="{2CEFE6D8-1096-45E6-9DCD-F0B3545F670C}"/>
+                <a16:creationId xmlns:a16="http://schemas.microsoft.com/office/drawing/2014/main" id="{3C12D875-5BAD-49D3-AEB2-D21227BB4383}"/>
               </a:ext>
             </a:extLst>
           </p:cNvPr>
@@ -19538,7 +20266,7 @@
           <p:cNvPr id="14" name="text-438">
             <a:extLst xmlns:a="http://schemas.openxmlformats.org/drawingml/2006/main">
               <a:ext uri="{FF2B5EF4-FFF2-40B4-BE49-F238E27FC236}">
-                <a16:creationId xmlns:a16="http://schemas.microsoft.com/office/drawing/2014/main" id="{4F7F80F1-5449-4F62-853E-26E917F8834D}"/>
+                <a16:creationId xmlns:a16="http://schemas.microsoft.com/office/drawing/2014/main" id="{711C6D1D-21EF-4B5D-BA92-2991202BD2E1}"/>
               </a:ext>
             </a:extLst>
           </p:cNvPr>
@@ -19595,7 +20323,7 @@
           <p:cNvPr id="15" name="text-439">
             <a:extLst xmlns:a="http://schemas.openxmlformats.org/drawingml/2006/main">
               <a:ext uri="{FF2B5EF4-FFF2-40B4-BE49-F238E27FC236}">
-                <a16:creationId xmlns:a16="http://schemas.microsoft.com/office/drawing/2014/main" id="{A4B166B7-409A-430C-9CA9-82DFECFD2AFB}"/>
+                <a16:creationId xmlns:a16="http://schemas.microsoft.com/office/drawing/2014/main" id="{DD7C566B-601E-485E-8A53-E38F488EED16}"/>
               </a:ext>
             </a:extLst>
           </p:cNvPr>
@@ -19652,7 +20380,7 @@
           <p:cNvPr id="16" name="text-440">
             <a:extLst xmlns:a="http://schemas.openxmlformats.org/drawingml/2006/main">
               <a:ext uri="{FF2B5EF4-FFF2-40B4-BE49-F238E27FC236}">
-                <a16:creationId xmlns:a16="http://schemas.microsoft.com/office/drawing/2014/main" id="{355F39F6-1F8B-4725-B17A-8DB6C51B2319}"/>
+                <a16:creationId xmlns:a16="http://schemas.microsoft.com/office/drawing/2014/main" id="{69CD4944-0CB5-48B6-8536-0C9DEC02B17A}"/>
               </a:ext>
             </a:extLst>
           </p:cNvPr>
@@ -19707,7 +20435,7 @@
     </p:spTree>
     <p:extLst>
       <p:ext uri="{BB962C8B-B14F-4D97-AF65-F5344CB8AC3E}">
-        <p14:creationId xmlns:p14="http://schemas.microsoft.com/office/powerpoint/2010/main" val="1148897999"/>
+        <p14:creationId xmlns:p14="http://schemas.microsoft.com/office/powerpoint/2010/main" val="764099982"/>
       </p:ext>
     </p:extLst>
   </p:cSld>
@@ -19738,7 +20466,7 @@
           <p:cNvPr id="8" name="text-441">
             <a:extLst xmlns:a="http://schemas.openxmlformats.org/drawingml/2006/main">
               <a:ext uri="{FF2B5EF4-FFF2-40B4-BE49-F238E27FC236}">
-                <a16:creationId xmlns:a16="http://schemas.microsoft.com/office/drawing/2014/main" id="{D308D29F-108B-430B-9572-5D53EB8360EC}"/>
+                <a16:creationId xmlns:a16="http://schemas.microsoft.com/office/drawing/2014/main" id="{8C80E1A1-A195-4B9A-9462-EE54F6695ACB}"/>
               </a:ext>
             </a:extLst>
           </p:cNvPr>
@@ -19795,7 +20523,7 @@
           <p:cNvPr id="2" name="text-442">
             <a:extLst xmlns:a="http://schemas.openxmlformats.org/drawingml/2006/main">
               <a:ext uri="{FF2B5EF4-FFF2-40B4-BE49-F238E27FC236}">
-                <a16:creationId xmlns:a16="http://schemas.microsoft.com/office/drawing/2014/main" id="{5C750D81-3ECC-42ED-A3FD-BBB63D2BE06E}"/>
+                <a16:creationId xmlns:a16="http://schemas.microsoft.com/office/drawing/2014/main" id="{6A1E48D9-6DB1-4E49-811C-88F2B8645FD4}"/>
               </a:ext>
             </a:extLst>
           </p:cNvPr>
@@ -19852,7 +20580,7 @@
           <p:cNvPr id="3" name="text-443">
             <a:extLst xmlns:a="http://schemas.openxmlformats.org/drawingml/2006/main">
               <a:ext uri="{FF2B5EF4-FFF2-40B4-BE49-F238E27FC236}">
-                <a16:creationId xmlns:a16="http://schemas.microsoft.com/office/drawing/2014/main" id="{816A4CBB-E054-4D94-84CC-8A9BC1B5A385}"/>
+                <a16:creationId xmlns:a16="http://schemas.microsoft.com/office/drawing/2014/main" id="{73912C12-1F7A-441A-9714-6926077B54EA}"/>
               </a:ext>
             </a:extLst>
           </p:cNvPr>
@@ -19909,7 +20637,7 @@
           <p:cNvPr id="4" name="text-444">
             <a:extLst xmlns:a="http://schemas.openxmlformats.org/drawingml/2006/main">
               <a:ext uri="{FF2B5EF4-FFF2-40B4-BE49-F238E27FC236}">
-                <a16:creationId xmlns:a16="http://schemas.microsoft.com/office/drawing/2014/main" id="{A309D1D9-C498-4ED9-9212-523BD158F429}"/>
+                <a16:creationId xmlns:a16="http://schemas.microsoft.com/office/drawing/2014/main" id="{D42FEFFA-8A47-4245-B2DE-67B77201D59D}"/>
               </a:ext>
             </a:extLst>
           </p:cNvPr>
@@ -19966,7 +20694,7 @@
           <p:cNvPr id="5" name="text-445">
             <a:extLst xmlns:a="http://schemas.openxmlformats.org/drawingml/2006/main">
               <a:ext uri="{FF2B5EF4-FFF2-40B4-BE49-F238E27FC236}">
-                <a16:creationId xmlns:a16="http://schemas.microsoft.com/office/drawing/2014/main" id="{D507AE21-8833-41B8-BC2E-BE623FBBECBF}"/>
+                <a16:creationId xmlns:a16="http://schemas.microsoft.com/office/drawing/2014/main" id="{E1964131-6C98-42BD-8620-C2D7F673C37B}"/>
               </a:ext>
             </a:extLst>
           </p:cNvPr>
@@ -20120,7 +20848,7 @@
           <p:cNvPr id="6" name="text-446">
             <a:extLst xmlns:a="http://schemas.openxmlformats.org/drawingml/2006/main">
               <a:ext uri="{FF2B5EF4-FFF2-40B4-BE49-F238E27FC236}">
-                <a16:creationId xmlns:a16="http://schemas.microsoft.com/office/drawing/2014/main" id="{792D0E9F-C326-4095-9B45-967468E86008}"/>
+                <a16:creationId xmlns:a16="http://schemas.microsoft.com/office/drawing/2014/main" id="{A79B0B74-D6C5-4AB0-966B-C820911F2FB7}"/>
               </a:ext>
             </a:extLst>
           </p:cNvPr>
@@ -20177,7 +20905,7 @@
           <p:cNvPr id="7" name="text-447">
             <a:extLst xmlns:a="http://schemas.openxmlformats.org/drawingml/2006/main">
               <a:ext uri="{FF2B5EF4-FFF2-40B4-BE49-F238E27FC236}">
-                <a16:creationId xmlns:a16="http://schemas.microsoft.com/office/drawing/2014/main" id="{7DD702C8-FB0C-4007-B4DC-80CDCC5C9061}"/>
+                <a16:creationId xmlns:a16="http://schemas.microsoft.com/office/drawing/2014/main" id="{40ECA9D9-AEE3-4A98-AE35-1546926C6A43}"/>
               </a:ext>
             </a:extLst>
           </p:cNvPr>
@@ -20255,7 +20983,7 @@
     </p:spTree>
     <p:extLst>
       <p:ext uri="{BB962C8B-B14F-4D97-AF65-F5344CB8AC3E}">
-        <p14:creationId xmlns:p14="http://schemas.microsoft.com/office/powerpoint/2010/main" val="1508700468"/>
+        <p14:creationId xmlns:p14="http://schemas.microsoft.com/office/powerpoint/2010/main" val="1724802509"/>
       </p:ext>
     </p:extLst>
   </p:cSld>
@@ -20286,7 +21014,7 @@
           <p:cNvPr id="9" name="text-448">
             <a:extLst xmlns:a="http://schemas.openxmlformats.org/drawingml/2006/main">
               <a:ext uri="{FF2B5EF4-FFF2-40B4-BE49-F238E27FC236}">
-                <a16:creationId xmlns:a16="http://schemas.microsoft.com/office/drawing/2014/main" id="{7351A98C-8C07-447C-BE46-9549B1A716D6}"/>
+                <a16:creationId xmlns:a16="http://schemas.microsoft.com/office/drawing/2014/main" id="{913CA52C-BBE6-4A8B-83E7-667AC6237253}"/>
               </a:ext>
             </a:extLst>
           </p:cNvPr>
@@ -20343,7 +21071,7 @@
           <p:cNvPr id="2" name="text-449">
             <a:extLst xmlns:a="http://schemas.openxmlformats.org/drawingml/2006/main">
               <a:ext uri="{FF2B5EF4-FFF2-40B4-BE49-F238E27FC236}">
-                <a16:creationId xmlns:a16="http://schemas.microsoft.com/office/drawing/2014/main" id="{DD8A841C-FBCC-4574-81A2-1D4BE154C78A}"/>
+                <a16:creationId xmlns:a16="http://schemas.microsoft.com/office/drawing/2014/main" id="{4218CADF-4147-4BA8-AFEF-AF09D5BD85D0}"/>
               </a:ext>
             </a:extLst>
           </p:cNvPr>
@@ -20400,7 +21128,7 @@
           <p:cNvPr id="3" name="text-450">
             <a:extLst xmlns:a="http://schemas.openxmlformats.org/drawingml/2006/main">
               <a:ext uri="{FF2B5EF4-FFF2-40B4-BE49-F238E27FC236}">
-                <a16:creationId xmlns:a16="http://schemas.microsoft.com/office/drawing/2014/main" id="{DBF8D17C-84ED-4B6B-BF4D-D00007916888}"/>
+                <a16:creationId xmlns:a16="http://schemas.microsoft.com/office/drawing/2014/main" id="{9F633824-B737-478E-98D1-5E6AE7858A2C}"/>
               </a:ext>
             </a:extLst>
           </p:cNvPr>
@@ -20457,7 +21185,7 @@
           <p:cNvPr id="4" name="text-451">
             <a:extLst xmlns:a="http://schemas.openxmlformats.org/drawingml/2006/main">
               <a:ext uri="{FF2B5EF4-FFF2-40B4-BE49-F238E27FC236}">
-                <a16:creationId xmlns:a16="http://schemas.microsoft.com/office/drawing/2014/main" id="{7041A3DC-35F6-49BA-A118-D77195E7C97C}"/>
+                <a16:creationId xmlns:a16="http://schemas.microsoft.com/office/drawing/2014/main" id="{C0B4E07E-406F-4D26-8D92-FA42F04E27D5}"/>
               </a:ext>
             </a:extLst>
           </p:cNvPr>
@@ -20514,7 +21242,7 @@
           <p:cNvPr id="5" name="text-452">
             <a:extLst xmlns:a="http://schemas.openxmlformats.org/drawingml/2006/main">
               <a:ext uri="{FF2B5EF4-FFF2-40B4-BE49-F238E27FC236}">
-                <a16:creationId xmlns:a16="http://schemas.microsoft.com/office/drawing/2014/main" id="{B09935FE-DFE0-4363-80AB-7A8C56AC8DB3}"/>
+                <a16:creationId xmlns:a16="http://schemas.microsoft.com/office/drawing/2014/main" id="{DD362399-7BB2-4676-ADA4-C931F01995C7}"/>
               </a:ext>
             </a:extLst>
           </p:cNvPr>
@@ -20571,7 +21299,7 @@
           <p:cNvPr id="6" name="text-453">
             <a:extLst xmlns:a="http://schemas.openxmlformats.org/drawingml/2006/main">
               <a:ext uri="{FF2B5EF4-FFF2-40B4-BE49-F238E27FC236}">
-                <a16:creationId xmlns:a16="http://schemas.microsoft.com/office/drawing/2014/main" id="{E6EF8800-5A62-453D-A246-79907596C5AD}"/>
+                <a16:creationId xmlns:a16="http://schemas.microsoft.com/office/drawing/2014/main" id="{4DF87F42-4F87-4E41-8D77-072C6E4556B4}"/>
               </a:ext>
             </a:extLst>
           </p:cNvPr>
@@ -20651,7 +21379,7 @@
           <p:cNvPr id="7" name="text-454">
             <a:extLst xmlns:a="http://schemas.openxmlformats.org/drawingml/2006/main">
               <a:ext uri="{FF2B5EF4-FFF2-40B4-BE49-F238E27FC236}">
-                <a16:creationId xmlns:a16="http://schemas.microsoft.com/office/drawing/2014/main" id="{23945105-9528-40D0-ABA7-9CD2A9096F14}"/>
+                <a16:creationId xmlns:a16="http://schemas.microsoft.com/office/drawing/2014/main" id="{C78AB896-39AA-49B6-8382-BAE42EB6CD5C}"/>
               </a:ext>
             </a:extLst>
           </p:cNvPr>
@@ -20708,7 +21436,7 @@
           <p:cNvPr id="8" name="text-455">
             <a:extLst xmlns:a="http://schemas.openxmlformats.org/drawingml/2006/main">
               <a:ext uri="{FF2B5EF4-FFF2-40B4-BE49-F238E27FC236}">
-                <a16:creationId xmlns:a16="http://schemas.microsoft.com/office/drawing/2014/main" id="{9EAC5B01-8697-4DE1-A812-BF7E0DA039AA}"/>
+                <a16:creationId xmlns:a16="http://schemas.microsoft.com/office/drawing/2014/main" id="{6D149F3C-50F6-4513-B95C-04B0DE47FB91}"/>
               </a:ext>
             </a:extLst>
           </p:cNvPr>
@@ -20878,7 +21606,7 @@
     </p:spTree>
     <p:extLst>
       <p:ext uri="{BB962C8B-B14F-4D97-AF65-F5344CB8AC3E}">
-        <p14:creationId xmlns:p14="http://schemas.microsoft.com/office/powerpoint/2010/main" val="1774797799"/>
+        <p14:creationId xmlns:p14="http://schemas.microsoft.com/office/powerpoint/2010/main" val="1602535208"/>
       </p:ext>
     </p:extLst>
   </p:cSld>
@@ -20909,7 +21637,7 @@
           <p:cNvPr id="10" name="text-456">
             <a:extLst xmlns:a="http://schemas.openxmlformats.org/drawingml/2006/main">
               <a:ext uri="{FF2B5EF4-FFF2-40B4-BE49-F238E27FC236}">
-                <a16:creationId xmlns:a16="http://schemas.microsoft.com/office/drawing/2014/main" id="{E803D225-2892-46EC-96F3-40D457BB5FDA}"/>
+                <a16:creationId xmlns:a16="http://schemas.microsoft.com/office/drawing/2014/main" id="{6BF2F6F4-3D9E-4D83-A863-0C41D297B87B}"/>
               </a:ext>
             </a:extLst>
           </p:cNvPr>
@@ -20966,7 +21694,7 @@
           <p:cNvPr id="2" name="text-457">
             <a:extLst xmlns:a="http://schemas.openxmlformats.org/drawingml/2006/main">
               <a:ext uri="{FF2B5EF4-FFF2-40B4-BE49-F238E27FC236}">
-                <a16:creationId xmlns:a16="http://schemas.microsoft.com/office/drawing/2014/main" id="{8E7ACA22-E465-4638-A7BC-87BCA0DAE433}"/>
+                <a16:creationId xmlns:a16="http://schemas.microsoft.com/office/drawing/2014/main" id="{D9BB4266-7A0C-447D-ABEC-F8AC6EC65ACB}"/>
               </a:ext>
             </a:extLst>
           </p:cNvPr>
@@ -21023,7 +21751,7 @@
           <p:cNvPr id="3" name="text-458">
             <a:extLst xmlns:a="http://schemas.openxmlformats.org/drawingml/2006/main">
               <a:ext uri="{FF2B5EF4-FFF2-40B4-BE49-F238E27FC236}">
-                <a16:creationId xmlns:a16="http://schemas.microsoft.com/office/drawing/2014/main" id="{9E3FD47B-02E4-46E8-A43B-2BA99D7EA856}"/>
+                <a16:creationId xmlns:a16="http://schemas.microsoft.com/office/drawing/2014/main" id="{4D82B182-418A-49CC-8497-DBB9C9155E51}"/>
               </a:ext>
             </a:extLst>
           </p:cNvPr>
@@ -21080,7 +21808,7 @@
           <p:cNvPr id="4" name="text-459">
             <a:extLst xmlns:a="http://schemas.openxmlformats.org/drawingml/2006/main">
               <a:ext uri="{FF2B5EF4-FFF2-40B4-BE49-F238E27FC236}">
-                <a16:creationId xmlns:a16="http://schemas.microsoft.com/office/drawing/2014/main" id="{A3DDCA75-C8DD-4F8F-AE12-B9DF0FE1E0AE}"/>
+                <a16:creationId xmlns:a16="http://schemas.microsoft.com/office/drawing/2014/main" id="{B48DBD9C-A6EA-4A9B-B331-746ADB2097E8}"/>
               </a:ext>
             </a:extLst>
           </p:cNvPr>
@@ -21137,7 +21865,7 @@
           <p:cNvPr id="5" name="text-460">
             <a:extLst xmlns:a="http://schemas.openxmlformats.org/drawingml/2006/main">
               <a:ext uri="{FF2B5EF4-FFF2-40B4-BE49-F238E27FC236}">
-                <a16:creationId xmlns:a16="http://schemas.microsoft.com/office/drawing/2014/main" id="{76B4F89F-90CE-45C5-849A-5887FC64FD67}"/>
+                <a16:creationId xmlns:a16="http://schemas.microsoft.com/office/drawing/2014/main" id="{DE71CFF0-A114-41F7-A856-350C2C3E9731}"/>
               </a:ext>
             </a:extLst>
           </p:cNvPr>
@@ -21194,7 +21922,7 @@
           <p:cNvPr id="6" name="text-461">
             <a:extLst xmlns:a="http://schemas.openxmlformats.org/drawingml/2006/main">
               <a:ext uri="{FF2B5EF4-FFF2-40B4-BE49-F238E27FC236}">
-                <a16:creationId xmlns:a16="http://schemas.microsoft.com/office/drawing/2014/main" id="{A39124DF-CF8D-4209-91B6-DD1CE9697B8F}"/>
+                <a16:creationId xmlns:a16="http://schemas.microsoft.com/office/drawing/2014/main" id="{6376E472-710B-4BBC-9D3C-3C997DD186E5}"/>
               </a:ext>
             </a:extLst>
           </p:cNvPr>
@@ -21251,7 +21979,7 @@
           <p:cNvPr id="7" name="text-462">
             <a:extLst xmlns:a="http://schemas.openxmlformats.org/drawingml/2006/main">
               <a:ext uri="{FF2B5EF4-FFF2-40B4-BE49-F238E27FC236}">
-                <a16:creationId xmlns:a16="http://schemas.microsoft.com/office/drawing/2014/main" id="{3F21A443-C314-44C0-B567-DADD54AC30A2}"/>
+                <a16:creationId xmlns:a16="http://schemas.microsoft.com/office/drawing/2014/main" id="{52B13598-9674-418D-8BDA-0C409CF5AA1C}"/>
               </a:ext>
             </a:extLst>
           </p:cNvPr>
@@ -21308,7 +22036,7 @@
           <p:cNvPr id="8" name="text-463">
             <a:extLst xmlns:a="http://schemas.openxmlformats.org/drawingml/2006/main">
               <a:ext uri="{FF2B5EF4-FFF2-40B4-BE49-F238E27FC236}">
-                <a16:creationId xmlns:a16="http://schemas.microsoft.com/office/drawing/2014/main" id="{95564237-9A33-48A1-855F-002C96864B83}"/>
+                <a16:creationId xmlns:a16="http://schemas.microsoft.com/office/drawing/2014/main" id="{F0A201A2-690B-49DF-97A4-ABC91495E82B}"/>
               </a:ext>
             </a:extLst>
           </p:cNvPr>
@@ -21365,7 +22093,7 @@
           <p:cNvPr id="9" name="text-464">
             <a:extLst xmlns:a="http://schemas.openxmlformats.org/drawingml/2006/main">
               <a:ext uri="{FF2B5EF4-FFF2-40B4-BE49-F238E27FC236}">
-                <a16:creationId xmlns:a16="http://schemas.microsoft.com/office/drawing/2014/main" id="{7050C532-3A63-4683-B8FC-A2B6A0DA7D18}"/>
+                <a16:creationId xmlns:a16="http://schemas.microsoft.com/office/drawing/2014/main" id="{FE4EEAD2-DE6F-446D-8B7D-F61521FA856E}"/>
               </a:ext>
             </a:extLst>
           </p:cNvPr>
@@ -21420,7 +22148,7 @@
     </p:spTree>
     <p:extLst>
       <p:ext uri="{BB962C8B-B14F-4D97-AF65-F5344CB8AC3E}">
-        <p14:creationId xmlns:p14="http://schemas.microsoft.com/office/powerpoint/2010/main" val="1016300056"/>
+        <p14:creationId xmlns:p14="http://schemas.microsoft.com/office/powerpoint/2010/main" val="1489692354"/>
       </p:ext>
     </p:extLst>
   </p:cSld>
